--- a/deck/ACE_Architecture.pptx
+++ b/deck/ACE_Architecture.pptx
@@ -20,9 +20,10 @@
     <p:sldId id="268" r:id="rId14"/>
     <p:sldId id="269" r:id="rId15"/>
     <p:sldId id="270" r:id="rId16"/>
+    <p:sldId id="271" r:id="rId17"/>
   </p:sldIdLst>
   <p:notesMasterIdLst>
-    <p:notesMasterId r:id="rId17"/>
+    <p:notesMasterId r:id="rId18"/>
   </p:notesMasterIdLst>
   <p:sldSz cx="12192000" cy="6858000"/>
   <p:notesSz cx="6858000" cy="12192000"/>
@@ -1086,6 +1087,94 @@
 </p:notes>
 </file>
 
+<file path=ppt/notesSlides/notesSlide16.xml><?xml version="1.0" encoding="utf-8"?>
+<p:notes xmlns:a="http://schemas.openxmlformats.org/drawingml/2006/main" xmlns:r="http://schemas.openxmlformats.org/officeDocument/2006/relationships" xmlns:p="http://schemas.openxmlformats.org/presentationml/2006/main">
+  <p:cSld>
+    <p:spTree>
+      <p:nvGrpSpPr>
+        <p:cNvPr id="1" name=""/>
+        <p:cNvGrpSpPr/>
+        <p:nvPr/>
+      </p:nvGrpSpPr>
+      <p:grpSpPr>
+        <a:xfrm>
+          <a:off x="0" y="0"/>
+          <a:ext cx="0" cy="0"/>
+          <a:chOff x="0" y="0"/>
+          <a:chExt cx="0" cy="0"/>
+        </a:xfrm>
+      </p:grpSpPr>
+      <p:sp>
+        <p:nvSpPr>
+          <p:cNvPr id="2" name="Slide Image Placeholder 1"/>
+          <p:cNvSpPr>
+            <a:spLocks noGrp="1" noRot="1" noChangeAspect="1"/>
+          </p:cNvSpPr>
+          <p:nvPr>
+            <p:ph type="sldImg"/>
+          </p:nvPr>
+        </p:nvSpPr>
+        <p:spPr/>
+      </p:sp>
+      <p:sp>
+        <p:nvSpPr>
+          <p:cNvPr id="3" name="Notes Placeholder 2"/>
+          <p:cNvSpPr>
+            <a:spLocks noGrp="1"/>
+          </p:cNvSpPr>
+          <p:nvPr>
+            <p:ph type="body" idx="1"/>
+          </p:nvPr>
+        </p:nvSpPr>
+        <p:spPr/>
+        <p:txBody>
+          <a:bodyPr/>
+          <a:lstStyle/>
+          <a:p>
+            <a:r>
+              <a:rPr lang="en-US" dirty="0"/>
+              <a:t/>
+            </a:r>
+            <a:endParaRPr lang="en-US" dirty="0"/>
+          </a:p>
+        </p:txBody>
+      </p:sp>
+      <p:sp>
+        <p:nvSpPr>
+          <p:cNvPr id="4" name="Slide Number Placeholder 3"/>
+          <p:cNvSpPr>
+            <a:spLocks noGrp="1"/>
+          </p:cNvSpPr>
+          <p:nvPr>
+            <p:ph type="sldNum" sz="quarter" idx="10"/>
+          </p:nvPr>
+        </p:nvSpPr>
+        <p:spPr/>
+        <p:txBody>
+          <a:bodyPr/>
+          <a:lstStyle/>
+          <a:p>
+            <a:fld id="{F7021451-1387-4CA6-816F-3879F97B5CBC}" type="slidenum">
+              <a:rPr lang="en-US"/>
+              <a:t>16</a:t>
+            </a:fld>
+            <a:endParaRPr lang="en-US"/>
+          </a:p>
+        </p:txBody>
+      </p:sp>
+    </p:spTree>
+    <p:extLst>
+      <p:ext uri="{BB962C8B-B14F-4D97-AF65-F5344CB8AC3E}">
+        <p14:creationId xmlns:p14="http://schemas.microsoft.com/office/powerpoint/2010/main" val="1024086991"/>
+      </p:ext>
+    </p:extLst>
+  </p:cSld>
+  <p:clrMapOvr>
+    <a:masterClrMapping/>
+  </p:clrMapOvr>
+</p:notes>
+</file>
+
 <file path=ppt/notesSlides/notesSlide2.xml><?xml version="1.0" encoding="utf-8"?>
 <p:notes xmlns:a="http://schemas.openxmlformats.org/drawingml/2006/main" xmlns:r="http://schemas.openxmlformats.org/officeDocument/2006/relationships" xmlns:p="http://schemas.openxmlformats.org/presentationml/2006/main">
   <p:cSld>
@@ -4679,7 +4768,7 @@
                 <a:ea typeface="Calibri" pitchFamily="34" charset="-122"/>
                 <a:cs typeface="Calibri" pitchFamily="34" charset="-120"/>
               </a:rPr>
-              <a:t>TRUST BY DESIGN</a:t>
+              <a:t>BEYOND PRO-FEE</a:t>
             </a:r>
             <a:endParaRPr lang="en-US" sz="1100" dirty="0"/>
           </a:p>
@@ -4718,7 +4807,7 @@
                 <a:ea typeface="Georgia" pitchFamily="34" charset="-122"/>
                 <a:cs typeface="Georgia" pitchFamily="34" charset="-120"/>
               </a:rPr>
-              <a:t>Why every claim can be explained and defended</a:t>
+              <a:t>Five payment models, one engine — each deterministic and audited</a:t>
             </a:r>
             <a:endParaRPr lang="en-US" sz="2300" dirty="0"/>
           </a:p>
@@ -4726,18 +4815,60 @@
       </p:sp>
       <p:sp>
         <p:nvSpPr>
-          <p:cNvPr id="7" name="Shape 5"/>
-          <p:cNvSpPr/>
-          <p:nvPr/>
-        </p:nvSpPr>
-        <p:spPr>
-          <a:xfrm>
-            <a:off x="457200" y="1417320"/>
-            <a:ext cx="5541264" cy="1371600"/>
+          <p:cNvPr id="7" name="Text 5"/>
+          <p:cNvSpPr/>
+          <p:nvPr/>
+        </p:nvSpPr>
+        <p:spPr>
+          <a:xfrm>
+            <a:off x="457200" y="1188720"/>
+            <a:ext cx="11274552" cy="411480"/>
+          </a:xfrm>
+          <a:prstGeom prst="rect">
+            <a:avLst/>
+          </a:prstGeom>
+          <a:noFill/>
+          <a:ln/>
+        </p:spPr>
+        <p:txBody>
+          <a:bodyPr wrap="square" lIns="0" tIns="0" rIns="0" bIns="0" rtlCol="0" anchor="ctr"/>
+          <a:lstStyle/>
+          <a:p>
+            <a:pPr indent="0" marL="0">
+              <a:lnSpc>
+                <a:spcPct val="100000"/>
+              </a:lnSpc>
+              <a:buNone/>
+            </a:pPr>
+            <a:r>
+              <a:rPr lang="en-US" sz="1150" dirty="0">
+                <a:solidFill>
+                  <a:srgbClr val="6B7A8D"/>
+                </a:solidFill>
+                <a:latin typeface="Calibri" pitchFamily="34" charset="0"/>
+                <a:ea typeface="Calibri" pitchFamily="34" charset="-122"/>
+                <a:cs typeface="Calibri" pitchFamily="34" charset="-120"/>
+              </a:rPr>
+              <a:t>Coding isn't one game. The same agentic spine now prices the five ways American healthcare actually pays — each with its own rule engine, a result card on the chart, and a step-by-step trace.</a:t>
+            </a:r>
+            <a:endParaRPr lang="en-US" sz="1150" dirty="0"/>
+          </a:p>
+        </p:txBody>
+      </p:sp>
+      <p:sp>
+        <p:nvSpPr>
+          <p:cNvPr id="8" name="Shape 6"/>
+          <p:cNvSpPr/>
+          <p:nvPr/>
+        </p:nvSpPr>
+        <p:spPr>
+          <a:xfrm>
+            <a:off x="457200" y="1783080"/>
+            <a:ext cx="2194560" cy="3017520"/>
           </a:xfrm>
           <a:prstGeom prst="roundRect">
             <a:avLst>
-              <a:gd name="adj" fmla="val 4667"/>
+              <a:gd name="adj" fmla="val 2917"/>
             </a:avLst>
           </a:prstGeom>
           <a:solidFill>
@@ -4760,50 +4891,92 @@
       </p:sp>
       <p:sp>
         <p:nvSpPr>
-          <p:cNvPr id="8" name="Shape 6"/>
-          <p:cNvSpPr/>
-          <p:nvPr/>
-        </p:nvSpPr>
-        <p:spPr>
-          <a:xfrm>
-            <a:off x="457200" y="1417320"/>
-            <a:ext cx="118872" cy="1371600"/>
-          </a:xfrm>
-          <a:prstGeom prst="rect">
-            <a:avLst/>
-          </a:prstGeom>
-          <a:solidFill>
-            <a:srgbClr val="13B5A6"/>
-          </a:solidFill>
-          <a:ln/>
-        </p:spPr>
-      </p:sp>
-      <p:sp>
-        <p:nvSpPr>
-          <p:cNvPr id="9" name="Text 7"/>
-          <p:cNvSpPr/>
-          <p:nvPr/>
-        </p:nvSpPr>
-        <p:spPr>
-          <a:xfrm>
-            <a:off x="777240" y="1600200"/>
-            <a:ext cx="4992624" cy="365760"/>
-          </a:xfrm>
-          <a:prstGeom prst="rect">
-            <a:avLst/>
-          </a:prstGeom>
-          <a:noFill/>
-          <a:ln/>
-        </p:spPr>
-        <p:txBody>
-          <a:bodyPr wrap="square" lIns="0" tIns="0" rIns="0" bIns="0" rtlCol="0" anchor="ctr"/>
-          <a:lstStyle/>
-          <a:p>
-            <a:pPr indent="0" marL="0">
-              <a:buNone/>
-            </a:pPr>
-            <a:r>
-              <a:rPr lang="en-US" sz="1400" b="1" dirty="0">
+          <p:cNvPr id="9" name="Shape 7"/>
+          <p:cNvSpPr/>
+          <p:nvPr/>
+        </p:nvSpPr>
+        <p:spPr>
+          <a:xfrm>
+            <a:off x="457200" y="1783080"/>
+            <a:ext cx="2194560" cy="109728"/>
+          </a:xfrm>
+          <a:prstGeom prst="rect">
+            <a:avLst/>
+          </a:prstGeom>
+          <a:solidFill>
+            <a:srgbClr val="0E8C81"/>
+          </a:solidFill>
+          <a:ln/>
+        </p:spPr>
+      </p:sp>
+      <p:sp>
+        <p:nvSpPr>
+          <p:cNvPr id="10" name="Text 8"/>
+          <p:cNvSpPr/>
+          <p:nvPr/>
+        </p:nvSpPr>
+        <p:spPr>
+          <a:xfrm>
+            <a:off x="621792" y="2057400"/>
+            <a:ext cx="640080" cy="502920"/>
+          </a:xfrm>
+          <a:prstGeom prst="rect">
+            <a:avLst/>
+          </a:prstGeom>
+          <a:noFill/>
+          <a:ln/>
+        </p:spPr>
+        <p:txBody>
+          <a:bodyPr wrap="square" lIns="0" tIns="0" rIns="0" bIns="0" rtlCol="0" anchor="ctr"/>
+          <a:lstStyle/>
+          <a:p>
+            <a:pPr indent="0" marL="0">
+              <a:buNone/>
+            </a:pPr>
+            <a:r>
+              <a:rPr lang="en-US" sz="2100" b="1" dirty="0">
+                <a:solidFill>
+                  <a:srgbClr val="0E8C81"/>
+                </a:solidFill>
+                <a:latin typeface="Georgia" pitchFamily="34" charset="0"/>
+                <a:ea typeface="Georgia" pitchFamily="34" charset="-122"/>
+                <a:cs typeface="Georgia" pitchFamily="34" charset="-120"/>
+              </a:rPr>
+              <a:t>1</a:t>
+            </a:r>
+            <a:endParaRPr lang="en-US" sz="2100" dirty="0"/>
+          </a:p>
+        </p:txBody>
+      </p:sp>
+      <p:sp>
+        <p:nvSpPr>
+          <p:cNvPr id="11" name="Text 9"/>
+          <p:cNvSpPr/>
+          <p:nvPr/>
+        </p:nvSpPr>
+        <p:spPr>
+          <a:xfrm>
+            <a:off x="621792" y="2560320"/>
+            <a:ext cx="1865376" cy="594360"/>
+          </a:xfrm>
+          <a:prstGeom prst="rect">
+            <a:avLst/>
+          </a:prstGeom>
+          <a:noFill/>
+          <a:ln/>
+        </p:spPr>
+        <p:txBody>
+          <a:bodyPr wrap="square" lIns="0" tIns="0" rIns="0" bIns="0" rtlCol="0" anchor="ctr"/>
+          <a:lstStyle/>
+          <a:p>
+            <a:pPr indent="0" marL="0">
+              <a:lnSpc>
+                <a:spcPct val="95000"/>
+              </a:lnSpc>
+              <a:buNone/>
+            </a:pPr>
+            <a:r>
+              <a:rPr lang="en-US" sz="1250" b="1" dirty="0">
                 <a:solidFill>
                   <a:srgbClr val="1B2A4A"/>
                 </a:solidFill>
@@ -4811,22 +4984,22 @@
                 <a:ea typeface="Calibri" pitchFamily="34" charset="-122"/>
                 <a:cs typeface="Calibri" pitchFamily="34" charset="-120"/>
               </a:rPr>
-              <a:t>Every code is cited</a:t>
-            </a:r>
-            <a:endParaRPr lang="en-US" sz="1400" dirty="0"/>
-          </a:p>
-        </p:txBody>
-      </p:sp>
-      <p:sp>
-        <p:nvSpPr>
-          <p:cNvPr id="10" name="Text 8"/>
-          <p:cNvSpPr/>
-          <p:nvPr/>
-        </p:nvSpPr>
-        <p:spPr>
-          <a:xfrm>
-            <a:off x="777240" y="1984248"/>
-            <a:ext cx="4992624" cy="731520"/>
+              <a:t>Outpatient pro-fee</a:t>
+            </a:r>
+            <a:endParaRPr lang="en-US" sz="1250" dirty="0"/>
+          </a:p>
+        </p:txBody>
+      </p:sp>
+      <p:sp>
+        <p:nvSpPr>
+          <p:cNvPr id="12" name="Text 10"/>
+          <p:cNvSpPr/>
+          <p:nvPr/>
+        </p:nvSpPr>
+        <p:spPr>
+          <a:xfrm>
+            <a:off x="621792" y="3154680"/>
+            <a:ext cx="1865376" cy="1554480"/>
           </a:xfrm>
           <a:prstGeom prst="rect">
             <a:avLst/>
@@ -4845,7 +5018,7 @@
               <a:buNone/>
             </a:pPr>
             <a:r>
-              <a:rPr lang="en-US" sz="1150" dirty="0">
+              <a:rPr lang="en-US" sz="980" dirty="0">
                 <a:solidFill>
                   <a:srgbClr val="6B7A8D"/>
                 </a:solidFill>
@@ -4853,26 +5026,26 @@
                 <a:ea typeface="Calibri" pitchFamily="34" charset="-122"/>
                 <a:cs typeface="Calibri" pitchFamily="34" charset="-120"/>
               </a:rPr>
-              <a:t>Each accepted code links back to the chart line and the guideline that justify it — coders see the why.</a:t>
-            </a:r>
-            <a:endParaRPr lang="en-US" sz="1150" dirty="0"/>
-          </a:p>
-        </p:txBody>
-      </p:sp>
-      <p:sp>
-        <p:nvSpPr>
-          <p:cNvPr id="11" name="Shape 9"/>
-          <p:cNvSpPr/>
-          <p:nvPr/>
-        </p:nvSpPr>
-        <p:spPr>
-          <a:xfrm>
-            <a:off x="6190488" y="1417320"/>
-            <a:ext cx="5541264" cy="1371600"/>
+              <a:t>Fourteen specialties — ICD-10 + CPT/HCPCS line-items with the NCCI, MUE, modifier and necessity checks.</a:t>
+            </a:r>
+            <a:endParaRPr lang="en-US" sz="980" dirty="0"/>
+          </a:p>
+        </p:txBody>
+      </p:sp>
+      <p:sp>
+        <p:nvSpPr>
+          <p:cNvPr id="13" name="Shape 11"/>
+          <p:cNvSpPr/>
+          <p:nvPr/>
+        </p:nvSpPr>
+        <p:spPr>
+          <a:xfrm>
+            <a:off x="2729484" y="1783080"/>
+            <a:ext cx="2194560" cy="3017520"/>
           </a:xfrm>
           <a:prstGeom prst="roundRect">
             <a:avLst>
-              <a:gd name="adj" fmla="val 4667"/>
+              <a:gd name="adj" fmla="val 2917"/>
             </a:avLst>
           </a:prstGeom>
           <a:solidFill>
@@ -4895,73 +5068,115 @@
       </p:sp>
       <p:sp>
         <p:nvSpPr>
-          <p:cNvPr id="12" name="Shape 10"/>
-          <p:cNvSpPr/>
-          <p:nvPr/>
-        </p:nvSpPr>
-        <p:spPr>
-          <a:xfrm>
-            <a:off x="6190488" y="1417320"/>
-            <a:ext cx="118872" cy="1371600"/>
-          </a:xfrm>
-          <a:prstGeom prst="rect">
-            <a:avLst/>
-          </a:prstGeom>
-          <a:solidFill>
-            <a:srgbClr val="13B5A6"/>
-          </a:solidFill>
-          <a:ln/>
-        </p:spPr>
-      </p:sp>
-      <p:sp>
-        <p:nvSpPr>
-          <p:cNvPr id="13" name="Text 11"/>
-          <p:cNvSpPr/>
-          <p:nvPr/>
-        </p:nvSpPr>
-        <p:spPr>
-          <a:xfrm>
-            <a:off x="6510528" y="1600200"/>
-            <a:ext cx="4992624" cy="365760"/>
-          </a:xfrm>
-          <a:prstGeom prst="rect">
-            <a:avLst/>
-          </a:prstGeom>
-          <a:noFill/>
-          <a:ln/>
-        </p:spPr>
-        <p:txBody>
-          <a:bodyPr wrap="square" lIns="0" tIns="0" rIns="0" bIns="0" rtlCol="0" anchor="ctr"/>
-          <a:lstStyle/>
-          <a:p>
-            <a:pPr indent="0" marL="0">
-              <a:buNone/>
-            </a:pPr>
-            <a:r>
-              <a:rPr lang="en-US" sz="1400" b="1" dirty="0">
+          <p:cNvPr id="14" name="Shape 12"/>
+          <p:cNvSpPr/>
+          <p:nvPr/>
+        </p:nvSpPr>
+        <p:spPr>
+          <a:xfrm>
+            <a:off x="2729484" y="1783080"/>
+            <a:ext cx="2194560" cy="109728"/>
+          </a:xfrm>
+          <a:prstGeom prst="rect">
+            <a:avLst/>
+          </a:prstGeom>
+          <a:solidFill>
+            <a:srgbClr val="1B2A4A"/>
+          </a:solidFill>
+          <a:ln/>
+        </p:spPr>
+      </p:sp>
+      <p:sp>
+        <p:nvSpPr>
+          <p:cNvPr id="15" name="Text 13"/>
+          <p:cNvSpPr/>
+          <p:nvPr/>
+        </p:nvSpPr>
+        <p:spPr>
+          <a:xfrm>
+            <a:off x="2894076" y="2057400"/>
+            <a:ext cx="640080" cy="502920"/>
+          </a:xfrm>
+          <a:prstGeom prst="rect">
+            <a:avLst/>
+          </a:prstGeom>
+          <a:noFill/>
+          <a:ln/>
+        </p:spPr>
+        <p:txBody>
+          <a:bodyPr wrap="square" lIns="0" tIns="0" rIns="0" bIns="0" rtlCol="0" anchor="ctr"/>
+          <a:lstStyle/>
+          <a:p>
+            <a:pPr indent="0" marL="0">
+              <a:buNone/>
+            </a:pPr>
+            <a:r>
+              <a:rPr lang="en-US" sz="2100" b="1" dirty="0">
                 <a:solidFill>
                   <a:srgbClr val="1B2A4A"/>
                 </a:solidFill>
-                <a:latin typeface="Calibri" pitchFamily="34" charset="0"/>
-                <a:ea typeface="Calibri" pitchFamily="34" charset="-122"/>
-                <a:cs typeface="Calibri" pitchFamily="34" charset="-120"/>
-              </a:rPr>
-              <a:t>A complete audit trail</a:t>
-            </a:r>
-            <a:endParaRPr lang="en-US" sz="1400" dirty="0"/>
-          </a:p>
-        </p:txBody>
-      </p:sp>
-      <p:sp>
-        <p:nvSpPr>
-          <p:cNvPr id="14" name="Text 12"/>
-          <p:cNvSpPr/>
-          <p:nvPr/>
-        </p:nvSpPr>
-        <p:spPr>
-          <a:xfrm>
-            <a:off x="6510528" y="1984248"/>
-            <a:ext cx="4992624" cy="731520"/>
+                <a:latin typeface="Georgia" pitchFamily="34" charset="0"/>
+                <a:ea typeface="Georgia" pitchFamily="34" charset="-122"/>
+                <a:cs typeface="Georgia" pitchFamily="34" charset="-120"/>
+              </a:rPr>
+              <a:t>2</a:t>
+            </a:r>
+            <a:endParaRPr lang="en-US" sz="2100" dirty="0"/>
+          </a:p>
+        </p:txBody>
+      </p:sp>
+      <p:sp>
+        <p:nvSpPr>
+          <p:cNvPr id="16" name="Text 14"/>
+          <p:cNvSpPr/>
+          <p:nvPr/>
+        </p:nvSpPr>
+        <p:spPr>
+          <a:xfrm>
+            <a:off x="2894076" y="2560320"/>
+            <a:ext cx="1865376" cy="594360"/>
+          </a:xfrm>
+          <a:prstGeom prst="rect">
+            <a:avLst/>
+          </a:prstGeom>
+          <a:noFill/>
+          <a:ln/>
+        </p:spPr>
+        <p:txBody>
+          <a:bodyPr wrap="square" lIns="0" tIns="0" rIns="0" bIns="0" rtlCol="0" anchor="ctr"/>
+          <a:lstStyle/>
+          <a:p>
+            <a:pPr indent="0" marL="0">
+              <a:lnSpc>
+                <a:spcPct val="95000"/>
+              </a:lnSpc>
+              <a:buNone/>
+            </a:pPr>
+            <a:r>
+              <a:rPr lang="en-US" sz="1250" b="1" dirty="0">
+                <a:solidFill>
+                  <a:srgbClr val="1B2A4A"/>
+                </a:solidFill>
+                <a:latin typeface="Calibri" pitchFamily="34" charset="0"/>
+                <a:ea typeface="Calibri" pitchFamily="34" charset="-122"/>
+                <a:cs typeface="Calibri" pitchFamily="34" charset="-120"/>
+              </a:rPr>
+              <a:t>Inpatient MS-DRG</a:t>
+            </a:r>
+            <a:endParaRPr lang="en-US" sz="1250" dirty="0"/>
+          </a:p>
+        </p:txBody>
+      </p:sp>
+      <p:sp>
+        <p:nvSpPr>
+          <p:cNvPr id="17" name="Text 15"/>
+          <p:cNvSpPr/>
+          <p:nvPr/>
+        </p:nvSpPr>
+        <p:spPr>
+          <a:xfrm>
+            <a:off x="2894076" y="3154680"/>
+            <a:ext cx="1865376" cy="1554480"/>
           </a:xfrm>
           <a:prstGeom prst="rect">
             <a:avLst/>
@@ -4980,7 +5195,7 @@
               <a:buNone/>
             </a:pPr>
             <a:r>
-              <a:rPr lang="en-US" sz="1150" dirty="0">
+              <a:rPr lang="en-US" sz="980" dirty="0">
                 <a:solidFill>
                   <a:srgbClr val="6B7A8D"/>
                 </a:solidFill>
@@ -4988,26 +5203,26 @@
                 <a:ea typeface="Calibri" pitchFamily="34" charset="-122"/>
                 <a:cs typeface="Calibri" pitchFamily="34" charset="-120"/>
               </a:rPr>
-              <a:t>Each step, who did it, which model and when — the record you'd hand to a RAC auditor, written automatically.</a:t>
-            </a:r>
-            <a:endParaRPr lang="en-US" sz="1150" dirty="0"/>
-          </a:p>
-        </p:txBody>
-      </p:sp>
-      <p:sp>
-        <p:nvSpPr>
-          <p:cNvPr id="15" name="Shape 13"/>
-          <p:cNvSpPr/>
-          <p:nvPr/>
-        </p:nvSpPr>
-        <p:spPr>
-          <a:xfrm>
-            <a:off x="457200" y="2953512"/>
-            <a:ext cx="5541264" cy="1371600"/>
+              <a:t>ICD-10-PCS procedures and a real grouper: principal dx → MDC → surgical or medical → CC/MCC severity → DRG and weight.</a:t>
+            </a:r>
+            <a:endParaRPr lang="en-US" sz="980" dirty="0"/>
+          </a:p>
+        </p:txBody>
+      </p:sp>
+      <p:sp>
+        <p:nvSpPr>
+          <p:cNvPr id="18" name="Shape 16"/>
+          <p:cNvSpPr/>
+          <p:nvPr/>
+        </p:nvSpPr>
+        <p:spPr>
+          <a:xfrm>
+            <a:off x="5001768" y="1783080"/>
+            <a:ext cx="2194560" cy="3017520"/>
           </a:xfrm>
           <a:prstGeom prst="roundRect">
             <a:avLst>
-              <a:gd name="adj" fmla="val 4667"/>
+              <a:gd name="adj" fmla="val 2917"/>
             </a:avLst>
           </a:prstGeom>
           <a:solidFill>
@@ -5030,14 +5245,14 @@
       </p:sp>
       <p:sp>
         <p:nvSpPr>
-          <p:cNvPr id="16" name="Shape 14"/>
-          <p:cNvSpPr/>
-          <p:nvPr/>
-        </p:nvSpPr>
-        <p:spPr>
-          <a:xfrm>
-            <a:off x="457200" y="2953512"/>
-            <a:ext cx="118872" cy="1371600"/>
+          <p:cNvPr id="19" name="Shape 17"/>
+          <p:cNvSpPr/>
+          <p:nvPr/>
+        </p:nvSpPr>
+        <p:spPr>
+          <a:xfrm>
+            <a:off x="5001768" y="1783080"/>
+            <a:ext cx="2194560" cy="109728"/>
           </a:xfrm>
           <a:prstGeom prst="rect">
             <a:avLst/>
@@ -5050,30 +5265,72 @@
       </p:sp>
       <p:sp>
         <p:nvSpPr>
-          <p:cNvPr id="17" name="Text 15"/>
-          <p:cNvSpPr/>
-          <p:nvPr/>
-        </p:nvSpPr>
-        <p:spPr>
-          <a:xfrm>
-            <a:off x="777240" y="3136392"/>
-            <a:ext cx="4992624" cy="365760"/>
-          </a:xfrm>
-          <a:prstGeom prst="rect">
-            <a:avLst/>
-          </a:prstGeom>
-          <a:noFill/>
-          <a:ln/>
-        </p:spPr>
-        <p:txBody>
-          <a:bodyPr wrap="square" lIns="0" tIns="0" rIns="0" bIns="0" rtlCol="0" anchor="ctr"/>
-          <a:lstStyle/>
-          <a:p>
-            <a:pPr indent="0" marL="0">
-              <a:buNone/>
-            </a:pPr>
-            <a:r>
-              <a:rPr lang="en-US" sz="1400" b="1" dirty="0">
+          <p:cNvPr id="20" name="Text 18"/>
+          <p:cNvSpPr/>
+          <p:nvPr/>
+        </p:nvSpPr>
+        <p:spPr>
+          <a:xfrm>
+            <a:off x="5166360" y="2057400"/>
+            <a:ext cx="640080" cy="502920"/>
+          </a:xfrm>
+          <a:prstGeom prst="rect">
+            <a:avLst/>
+          </a:prstGeom>
+          <a:noFill/>
+          <a:ln/>
+        </p:spPr>
+        <p:txBody>
+          <a:bodyPr wrap="square" lIns="0" tIns="0" rIns="0" bIns="0" rtlCol="0" anchor="ctr"/>
+          <a:lstStyle/>
+          <a:p>
+            <a:pPr indent="0" marL="0">
+              <a:buNone/>
+            </a:pPr>
+            <a:r>
+              <a:rPr lang="en-US" sz="2100" b="1" dirty="0">
+                <a:solidFill>
+                  <a:srgbClr val="13B5A6"/>
+                </a:solidFill>
+                <a:latin typeface="Georgia" pitchFamily="34" charset="0"/>
+                <a:ea typeface="Georgia" pitchFamily="34" charset="-122"/>
+                <a:cs typeface="Georgia" pitchFamily="34" charset="-120"/>
+              </a:rPr>
+              <a:t>3</a:t>
+            </a:r>
+            <a:endParaRPr lang="en-US" sz="2100" dirty="0"/>
+          </a:p>
+        </p:txBody>
+      </p:sp>
+      <p:sp>
+        <p:nvSpPr>
+          <p:cNvPr id="21" name="Text 19"/>
+          <p:cNvSpPr/>
+          <p:nvPr/>
+        </p:nvSpPr>
+        <p:spPr>
+          <a:xfrm>
+            <a:off x="5166360" y="2560320"/>
+            <a:ext cx="1865376" cy="594360"/>
+          </a:xfrm>
+          <a:prstGeom prst="rect">
+            <a:avLst/>
+          </a:prstGeom>
+          <a:noFill/>
+          <a:ln/>
+        </p:spPr>
+        <p:txBody>
+          <a:bodyPr wrap="square" lIns="0" tIns="0" rIns="0" bIns="0" rtlCol="0" anchor="ctr"/>
+          <a:lstStyle/>
+          <a:p>
+            <a:pPr indent="0" marL="0">
+              <a:lnSpc>
+                <a:spcPct val="95000"/>
+              </a:lnSpc>
+              <a:buNone/>
+            </a:pPr>
+            <a:r>
+              <a:rPr lang="en-US" sz="1250" b="1" dirty="0">
                 <a:solidFill>
                   <a:srgbClr val="1B2A4A"/>
                 </a:solidFill>
@@ -5081,22 +5338,22 @@
                 <a:ea typeface="Calibri" pitchFamily="34" charset="-122"/>
                 <a:cs typeface="Calibri" pitchFamily="34" charset="-120"/>
               </a:rPr>
-              <a:t>Every admin change is logged</a:t>
-            </a:r>
-            <a:endParaRPr lang="en-US" sz="1400" dirty="0"/>
-          </a:p>
-        </p:txBody>
-      </p:sp>
-      <p:sp>
-        <p:nvSpPr>
-          <p:cNvPr id="18" name="Text 16"/>
-          <p:cNvSpPr/>
-          <p:nvPr/>
-        </p:nvSpPr>
-        <p:spPr>
-          <a:xfrm>
-            <a:off x="777240" y="3520440"/>
-            <a:ext cx="4992624" cy="731520"/>
+              <a:t>HCC risk adjustment</a:t>
+            </a:r>
+            <a:endParaRPr lang="en-US" sz="1250" dirty="0"/>
+          </a:p>
+        </p:txBody>
+      </p:sp>
+      <p:sp>
+        <p:nvSpPr>
+          <p:cNvPr id="22" name="Text 20"/>
+          <p:cNvSpPr/>
+          <p:nvPr/>
+        </p:nvSpPr>
+        <p:spPr>
+          <a:xfrm>
+            <a:off x="5166360" y="3154680"/>
+            <a:ext cx="1865376" cy="1554480"/>
           </a:xfrm>
           <a:prstGeom prst="rect">
             <a:avLst/>
@@ -5115,7 +5372,7 @@
               <a:buNone/>
             </a:pPr>
             <a:r>
-              <a:rPr lang="en-US" sz="1150" dirty="0">
+              <a:rPr lang="en-US" sz="980" dirty="0">
                 <a:solidFill>
                   <a:srgbClr val="6B7A8D"/>
                 </a:solidFill>
@@ -5123,26 +5380,26 @@
                 <a:ea typeface="Calibri" pitchFamily="34" charset="-122"/>
                 <a:cs typeface="Calibri" pitchFamily="34" charset="-120"/>
               </a:rPr>
-              <a:t>Config, policy, knowledge-graph, reference-data and gold-set edits — all recorded with who changed what, and when.</a:t>
-            </a:r>
-            <a:endParaRPr lang="en-US" sz="1150" dirty="0"/>
-          </a:p>
-        </p:txBody>
-      </p:sp>
-      <p:sp>
-        <p:nvSpPr>
-          <p:cNvPr id="19" name="Shape 17"/>
-          <p:cNvSpPr/>
-          <p:nvPr/>
-        </p:nvSpPr>
-        <p:spPr>
-          <a:xfrm>
-            <a:off x="6190488" y="2953512"/>
-            <a:ext cx="5541264" cy="1371600"/>
+              <a:t>Diagnoses map to HCCs, hierarchies resolve, RAF = demographics + coefficients. A natural extension of RevCap.</a:t>
+            </a:r>
+            <a:endParaRPr lang="en-US" sz="980" dirty="0"/>
+          </a:p>
+        </p:txBody>
+      </p:sp>
+      <p:sp>
+        <p:nvSpPr>
+          <p:cNvPr id="23" name="Shape 21"/>
+          <p:cNvSpPr/>
+          <p:nvPr/>
+        </p:nvSpPr>
+        <p:spPr>
+          <a:xfrm>
+            <a:off x="7274052" y="1783080"/>
+            <a:ext cx="2194560" cy="3017520"/>
           </a:xfrm>
           <a:prstGeom prst="roundRect">
             <a:avLst>
-              <a:gd name="adj" fmla="val 4667"/>
+              <a:gd name="adj" fmla="val 2917"/>
             </a:avLst>
           </a:prstGeom>
           <a:solidFill>
@@ -5165,50 +5422,92 @@
       </p:sp>
       <p:sp>
         <p:nvSpPr>
-          <p:cNvPr id="20" name="Shape 18"/>
-          <p:cNvSpPr/>
-          <p:nvPr/>
-        </p:nvSpPr>
-        <p:spPr>
-          <a:xfrm>
-            <a:off x="6190488" y="2953512"/>
-            <a:ext cx="118872" cy="1371600"/>
-          </a:xfrm>
-          <a:prstGeom prst="rect">
-            <a:avLst/>
-          </a:prstGeom>
-          <a:solidFill>
-            <a:srgbClr val="13B5A6"/>
-          </a:solidFill>
-          <a:ln/>
-        </p:spPr>
-      </p:sp>
-      <p:sp>
-        <p:nvSpPr>
-          <p:cNvPr id="21" name="Text 19"/>
-          <p:cNvSpPr/>
-          <p:nvPr/>
-        </p:nvSpPr>
-        <p:spPr>
-          <a:xfrm>
-            <a:off x="6510528" y="3136392"/>
-            <a:ext cx="4992624" cy="365760"/>
-          </a:xfrm>
-          <a:prstGeom prst="rect">
-            <a:avLst/>
-          </a:prstGeom>
-          <a:noFill/>
-          <a:ln/>
-        </p:spPr>
-        <p:txBody>
-          <a:bodyPr wrap="square" lIns="0" tIns="0" rIns="0" bIns="0" rtlCol="0" anchor="ctr"/>
-          <a:lstStyle/>
-          <a:p>
-            <a:pPr indent="0" marL="0">
-              <a:buNone/>
-            </a:pPr>
-            <a:r>
-              <a:rPr lang="en-US" sz="1400" b="1" dirty="0">
+          <p:cNvPr id="24" name="Shape 22"/>
+          <p:cNvSpPr/>
+          <p:nvPr/>
+        </p:nvSpPr>
+        <p:spPr>
+          <a:xfrm>
+            <a:off x="7274052" y="1783080"/>
+            <a:ext cx="2194560" cy="109728"/>
+          </a:xfrm>
+          <a:prstGeom prst="rect">
+            <a:avLst/>
+          </a:prstGeom>
+          <a:solidFill>
+            <a:srgbClr val="24365C"/>
+          </a:solidFill>
+          <a:ln/>
+        </p:spPr>
+      </p:sp>
+      <p:sp>
+        <p:nvSpPr>
+          <p:cNvPr id="25" name="Text 23"/>
+          <p:cNvSpPr/>
+          <p:nvPr/>
+        </p:nvSpPr>
+        <p:spPr>
+          <a:xfrm>
+            <a:off x="7438644" y="2057400"/>
+            <a:ext cx="640080" cy="502920"/>
+          </a:xfrm>
+          <a:prstGeom prst="rect">
+            <a:avLst/>
+          </a:prstGeom>
+          <a:noFill/>
+          <a:ln/>
+        </p:spPr>
+        <p:txBody>
+          <a:bodyPr wrap="square" lIns="0" tIns="0" rIns="0" bIns="0" rtlCol="0" anchor="ctr"/>
+          <a:lstStyle/>
+          <a:p>
+            <a:pPr indent="0" marL="0">
+              <a:buNone/>
+            </a:pPr>
+            <a:r>
+              <a:rPr lang="en-US" sz="2100" b="1" dirty="0">
+                <a:solidFill>
+                  <a:srgbClr val="24365C"/>
+                </a:solidFill>
+                <a:latin typeface="Georgia" pitchFamily="34" charset="0"/>
+                <a:ea typeface="Georgia" pitchFamily="34" charset="-122"/>
+                <a:cs typeface="Georgia" pitchFamily="34" charset="-120"/>
+              </a:rPr>
+              <a:t>4</a:t>
+            </a:r>
+            <a:endParaRPr lang="en-US" sz="2100" dirty="0"/>
+          </a:p>
+        </p:txBody>
+      </p:sp>
+      <p:sp>
+        <p:nvSpPr>
+          <p:cNvPr id="26" name="Text 24"/>
+          <p:cNvSpPr/>
+          <p:nvPr/>
+        </p:nvSpPr>
+        <p:spPr>
+          <a:xfrm>
+            <a:off x="7438644" y="2560320"/>
+            <a:ext cx="1865376" cy="594360"/>
+          </a:xfrm>
+          <a:prstGeom prst="rect">
+            <a:avLst/>
+          </a:prstGeom>
+          <a:noFill/>
+          <a:ln/>
+        </p:spPr>
+        <p:txBody>
+          <a:bodyPr wrap="square" lIns="0" tIns="0" rIns="0" bIns="0" rtlCol="0" anchor="ctr"/>
+          <a:lstStyle/>
+          <a:p>
+            <a:pPr indent="0" marL="0">
+              <a:lnSpc>
+                <a:spcPct val="95000"/>
+              </a:lnSpc>
+              <a:buNone/>
+            </a:pPr>
+            <a:r>
+              <a:rPr lang="en-US" sz="1250" b="1" dirty="0">
                 <a:solidFill>
                   <a:srgbClr val="1B2A4A"/>
                 </a:solidFill>
@@ -5216,22 +5515,22 @@
                 <a:ea typeface="Calibri" pitchFamily="34" charset="-122"/>
                 <a:cs typeface="Calibri" pitchFamily="34" charset="-120"/>
               </a:rPr>
-              <a:t>Honest accuracy numbers</a:t>
-            </a:r>
-            <a:endParaRPr lang="en-US" sz="1400" dirty="0"/>
-          </a:p>
-        </p:txBody>
-      </p:sp>
-      <p:sp>
-        <p:nvSpPr>
-          <p:cNvPr id="22" name="Text 20"/>
-          <p:cNvSpPr/>
-          <p:nvPr/>
-        </p:nvSpPr>
-        <p:spPr>
-          <a:xfrm>
-            <a:off x="6510528" y="3520440"/>
-            <a:ext cx="4992624" cy="731520"/>
+              <a:t>Anesthesia units</a:t>
+            </a:r>
+            <a:endParaRPr lang="en-US" sz="1250" dirty="0"/>
+          </a:p>
+        </p:txBody>
+      </p:sp>
+      <p:sp>
+        <p:nvSpPr>
+          <p:cNvPr id="27" name="Text 25"/>
+          <p:cNvSpPr/>
+          <p:nvPr/>
+        </p:nvSpPr>
+        <p:spPr>
+          <a:xfrm>
+            <a:off x="7438644" y="3154680"/>
+            <a:ext cx="1865376" cy="1554480"/>
           </a:xfrm>
           <a:prstGeom prst="rect">
             <a:avLst/>
@@ -5250,7 +5549,7 @@
               <a:buNone/>
             </a:pPr>
             <a:r>
-              <a:rPr lang="en-US" sz="1150" dirty="0">
+              <a:rPr lang="en-US" sz="980" dirty="0">
                 <a:solidFill>
                   <a:srgbClr val="6B7A8D"/>
                 </a:solidFill>
@@ -5258,26 +5557,26 @@
                 <a:ea typeface="Calibri" pitchFamily="34" charset="-122"/>
                 <a:cs typeface="Calibri" pitchFamily="34" charset="-120"/>
               </a:rPr>
-              <a:t>Measured against adjudicated consensus, with the limit of where coders themselves disagree — no inflated claims.</a:t>
-            </a:r>
-            <a:endParaRPr lang="en-US" sz="1150" dirty="0"/>
-          </a:p>
-        </p:txBody>
-      </p:sp>
-      <p:sp>
-        <p:nvSpPr>
-          <p:cNvPr id="23" name="Shape 21"/>
-          <p:cNvSpPr/>
-          <p:nvPr/>
-        </p:nvSpPr>
-        <p:spPr>
-          <a:xfrm>
-            <a:off x="457200" y="4489704"/>
-            <a:ext cx="5541264" cy="1371600"/>
+              <a:t>(Base + time + modifying units) × conversion factor — time read from the documented start and stop, never estimated.</a:t>
+            </a:r>
+            <a:endParaRPr lang="en-US" sz="980" dirty="0"/>
+          </a:p>
+        </p:txBody>
+      </p:sp>
+      <p:sp>
+        <p:nvSpPr>
+          <p:cNvPr id="28" name="Shape 26"/>
+          <p:cNvSpPr/>
+          <p:nvPr/>
+        </p:nvSpPr>
+        <p:spPr>
+          <a:xfrm>
+            <a:off x="9546336" y="1783080"/>
+            <a:ext cx="2194560" cy="3017520"/>
           </a:xfrm>
           <a:prstGeom prst="roundRect">
             <a:avLst>
-              <a:gd name="adj" fmla="val 4667"/>
+              <a:gd name="adj" fmla="val 2917"/>
             </a:avLst>
           </a:prstGeom>
           <a:solidFill>
@@ -5300,50 +5599,92 @@
       </p:sp>
       <p:sp>
         <p:nvSpPr>
-          <p:cNvPr id="24" name="Shape 22"/>
-          <p:cNvSpPr/>
-          <p:nvPr/>
-        </p:nvSpPr>
-        <p:spPr>
-          <a:xfrm>
-            <a:off x="457200" y="4489704"/>
-            <a:ext cx="118872" cy="1371600"/>
-          </a:xfrm>
-          <a:prstGeom prst="rect">
-            <a:avLst/>
-          </a:prstGeom>
-          <a:solidFill>
-            <a:srgbClr val="13B5A6"/>
-          </a:solidFill>
-          <a:ln/>
-        </p:spPr>
-      </p:sp>
-      <p:sp>
-        <p:nvSpPr>
-          <p:cNvPr id="25" name="Text 23"/>
-          <p:cNvSpPr/>
-          <p:nvPr/>
-        </p:nvSpPr>
-        <p:spPr>
-          <a:xfrm>
-            <a:off x="777240" y="4672584"/>
-            <a:ext cx="4992624" cy="365760"/>
-          </a:xfrm>
-          <a:prstGeom prst="rect">
-            <a:avLst/>
-          </a:prstGeom>
-          <a:noFill/>
-          <a:ln/>
-        </p:spPr>
-        <p:txBody>
-          <a:bodyPr wrap="square" lIns="0" tIns="0" rIns="0" bIns="0" rtlCol="0" anchor="ctr"/>
-          <a:lstStyle/>
-          <a:p>
-            <a:pPr indent="0" marL="0">
-              <a:buNone/>
-            </a:pPr>
-            <a:r>
-              <a:rPr lang="en-US" sz="1400" b="1" dirty="0">
+          <p:cNvPr id="29" name="Shape 27"/>
+          <p:cNvSpPr/>
+          <p:nvPr/>
+        </p:nvSpPr>
+        <p:spPr>
+          <a:xfrm>
+            <a:off x="9546336" y="1783080"/>
+            <a:ext cx="2194560" cy="109728"/>
+          </a:xfrm>
+          <a:prstGeom prst="rect">
+            <a:avLst/>
+          </a:prstGeom>
+          <a:solidFill>
+            <a:srgbClr val="64748B"/>
+          </a:solidFill>
+          <a:ln/>
+        </p:spPr>
+      </p:sp>
+      <p:sp>
+        <p:nvSpPr>
+          <p:cNvPr id="30" name="Text 28"/>
+          <p:cNvSpPr/>
+          <p:nvPr/>
+        </p:nvSpPr>
+        <p:spPr>
+          <a:xfrm>
+            <a:off x="9710928" y="2057400"/>
+            <a:ext cx="640080" cy="502920"/>
+          </a:xfrm>
+          <a:prstGeom prst="rect">
+            <a:avLst/>
+          </a:prstGeom>
+          <a:noFill/>
+          <a:ln/>
+        </p:spPr>
+        <p:txBody>
+          <a:bodyPr wrap="square" lIns="0" tIns="0" rIns="0" bIns="0" rtlCol="0" anchor="ctr"/>
+          <a:lstStyle/>
+          <a:p>
+            <a:pPr indent="0" marL="0">
+              <a:buNone/>
+            </a:pPr>
+            <a:r>
+              <a:rPr lang="en-US" sz="2100" b="1" dirty="0">
+                <a:solidFill>
+                  <a:srgbClr val="64748B"/>
+                </a:solidFill>
+                <a:latin typeface="Georgia" pitchFamily="34" charset="0"/>
+                <a:ea typeface="Georgia" pitchFamily="34" charset="-122"/>
+                <a:cs typeface="Georgia" pitchFamily="34" charset="-120"/>
+              </a:rPr>
+              <a:t>5</a:t>
+            </a:r>
+            <a:endParaRPr lang="en-US" sz="2100" dirty="0"/>
+          </a:p>
+        </p:txBody>
+      </p:sp>
+      <p:sp>
+        <p:nvSpPr>
+          <p:cNvPr id="31" name="Text 29"/>
+          <p:cNvSpPr/>
+          <p:nvPr/>
+        </p:nvSpPr>
+        <p:spPr>
+          <a:xfrm>
+            <a:off x="9710928" y="2560320"/>
+            <a:ext cx="1865376" cy="594360"/>
+          </a:xfrm>
+          <a:prstGeom prst="rect">
+            <a:avLst/>
+          </a:prstGeom>
+          <a:noFill/>
+          <a:ln/>
+        </p:spPr>
+        <p:txBody>
+          <a:bodyPr wrap="square" lIns="0" tIns="0" rIns="0" bIns="0" rtlCol="0" anchor="ctr"/>
+          <a:lstStyle/>
+          <a:p>
+            <a:pPr indent="0" marL="0">
+              <a:lnSpc>
+                <a:spcPct val="95000"/>
+              </a:lnSpc>
+              <a:buNone/>
+            </a:pPr>
+            <a:r>
+              <a:rPr lang="en-US" sz="1250" b="1" dirty="0">
                 <a:solidFill>
                   <a:srgbClr val="1B2A4A"/>
                 </a:solidFill>
@@ -5351,22 +5692,22 @@
                 <a:ea typeface="Calibri" pitchFamily="34" charset="-122"/>
                 <a:cs typeface="Calibri" pitchFamily="34" charset="-120"/>
               </a:rPr>
-              <a:t>Overrides keep the reason</a:t>
-            </a:r>
-            <a:endParaRPr lang="en-US" sz="1400" dirty="0"/>
-          </a:p>
-        </p:txBody>
-      </p:sp>
-      <p:sp>
-        <p:nvSpPr>
-          <p:cNvPr id="26" name="Text 24"/>
-          <p:cNvSpPr/>
-          <p:nvPr/>
-        </p:nvSpPr>
-        <p:spPr>
-          <a:xfrm>
-            <a:off x="777240" y="5056632"/>
-            <a:ext cx="4992624" cy="731520"/>
+              <a:t>Facility APC / OPPS</a:t>
+            </a:r>
+            <a:endParaRPr lang="en-US" sz="1250" dirty="0"/>
+          </a:p>
+        </p:txBody>
+      </p:sp>
+      <p:sp>
+        <p:nvSpPr>
+          <p:cNvPr id="32" name="Text 30"/>
+          <p:cNvSpPr/>
+          <p:nvPr/>
+        </p:nvSpPr>
+        <p:spPr>
+          <a:xfrm>
+            <a:off x="9710928" y="3154680"/>
+            <a:ext cx="1865376" cy="1554480"/>
           </a:xfrm>
           <a:prstGeom prst="rect">
             <a:avLst/>
@@ -5385,7 +5726,7 @@
               <a:buNone/>
             </a:pPr>
             <a:r>
-              <a:rPr lang="en-US" sz="1150" dirty="0">
+              <a:rPr lang="en-US" sz="980" dirty="0">
                 <a:solidFill>
                   <a:srgbClr val="6B7A8D"/>
                 </a:solidFill>
@@ -5393,142 +5734,88 @@
                 <a:ea typeface="Calibri" pitchFamily="34" charset="-122"/>
                 <a:cs typeface="Calibri" pitchFamily="34" charset="-120"/>
               </a:rPr>
-              <a:t>When a coder changes a code, the rationale is captured — feeding both the audit trail and the learning loop.</a:t>
-            </a:r>
-            <a:endParaRPr lang="en-US" sz="1150" dirty="0"/>
-          </a:p>
-        </p:txBody>
-      </p:sp>
-      <p:sp>
-        <p:nvSpPr>
-          <p:cNvPr id="27" name="Shape 25"/>
-          <p:cNvSpPr/>
-          <p:nvPr/>
-        </p:nvSpPr>
-        <p:spPr>
-          <a:xfrm>
-            <a:off x="6190488" y="4489704"/>
-            <a:ext cx="5541264" cy="1371600"/>
+              <a:t>The same chart, two claims: the physician's fee and the facility fee — status indicators, packaging, comprehensive APCs.</a:t>
+            </a:r>
+            <a:endParaRPr lang="en-US" sz="980" dirty="0"/>
+          </a:p>
+        </p:txBody>
+      </p:sp>
+      <p:sp>
+        <p:nvSpPr>
+          <p:cNvPr id="33" name="Shape 31"/>
+          <p:cNvSpPr/>
+          <p:nvPr/>
+        </p:nvSpPr>
+        <p:spPr>
+          <a:xfrm>
+            <a:off x="457200" y="5029200"/>
+            <a:ext cx="11274552" cy="1188720"/>
           </a:xfrm>
           <a:prstGeom prst="roundRect">
             <a:avLst>
-              <a:gd name="adj" fmla="val 4667"/>
+              <a:gd name="adj" fmla="val 4615"/>
             </a:avLst>
           </a:prstGeom>
           <a:solidFill>
-            <a:srgbClr val="FFFFFF"/>
-          </a:solidFill>
-          <a:ln w="12700">
-            <a:solidFill>
-              <a:srgbClr val="D8E1EC"/>
-            </a:solidFill>
-            <a:prstDash val="solid"/>
-          </a:ln>
-          <a:effectLst>
-            <a:outerShdw sx="100000" sy="100000" kx="0" ky="0" algn="bl" rotWithShape="0" blurRad="88900" dist="38100" dir="8100000">
-              <a:srgbClr val="1B2A4A">
-                <a:alpha val="12000"/>
-              </a:srgbClr>
-            </a:outerShdw>
-          </a:effectLst>
-        </p:spPr>
-      </p:sp>
-      <p:sp>
-        <p:nvSpPr>
-          <p:cNvPr id="28" name="Shape 26"/>
-          <p:cNvSpPr/>
-          <p:nvPr/>
-        </p:nvSpPr>
-        <p:spPr>
-          <a:xfrm>
-            <a:off x="6190488" y="4489704"/>
-            <a:ext cx="118872" cy="1371600"/>
-          </a:xfrm>
-          <a:prstGeom prst="rect">
-            <a:avLst/>
-          </a:prstGeom>
-          <a:solidFill>
-            <a:srgbClr val="13B5A6"/>
-          </a:solidFill>
-          <a:ln/>
-        </p:spPr>
-      </p:sp>
-      <p:sp>
-        <p:nvSpPr>
-          <p:cNvPr id="29" name="Text 27"/>
-          <p:cNvSpPr/>
-          <p:nvPr/>
-        </p:nvSpPr>
-        <p:spPr>
-          <a:xfrm>
-            <a:off x="6510528" y="4672584"/>
-            <a:ext cx="4992624" cy="365760"/>
-          </a:xfrm>
-          <a:prstGeom prst="rect">
-            <a:avLst/>
-          </a:prstGeom>
-          <a:noFill/>
-          <a:ln/>
-        </p:spPr>
-        <p:txBody>
-          <a:bodyPr wrap="square" lIns="0" tIns="0" rIns="0" bIns="0" rtlCol="0" anchor="ctr"/>
-          <a:lstStyle/>
-          <a:p>
-            <a:pPr indent="0" marL="0">
-              <a:buNone/>
-            </a:pPr>
-            <a:r>
-              <a:rPr lang="en-US" sz="1400" b="1" dirty="0">
-                <a:solidFill>
-                  <a:srgbClr val="1B2A4A"/>
-                </a:solidFill>
-                <a:latin typeface="Calibri" pitchFamily="34" charset="0"/>
-                <a:ea typeface="Calibri" pitchFamily="34" charset="-122"/>
-                <a:cs typeface="Calibri" pitchFamily="34" charset="-120"/>
-              </a:rPr>
-              <a:t>Roles control who can do what</a:t>
-            </a:r>
-            <a:endParaRPr lang="en-US" sz="1400" dirty="0"/>
-          </a:p>
-        </p:txBody>
-      </p:sp>
-      <p:sp>
-        <p:nvSpPr>
-          <p:cNvPr id="30" name="Text 28"/>
-          <p:cNvSpPr/>
-          <p:nvPr/>
-        </p:nvSpPr>
-        <p:spPr>
-          <a:xfrm>
-            <a:off x="6510528" y="5056632"/>
-            <a:ext cx="4992624" cy="731520"/>
-          </a:xfrm>
-          <a:prstGeom prst="rect">
-            <a:avLst/>
-          </a:prstGeom>
-          <a:noFill/>
-          <a:ln/>
-        </p:spPr>
-        <p:txBody>
-          <a:bodyPr wrap="square" lIns="0" tIns="0" rIns="0" bIns="0" rtlCol="0" anchor="t"/>
+            <a:srgbClr val="1B2A4A"/>
+          </a:solidFill>
+          <a:ln/>
+        </p:spPr>
+      </p:sp>
+      <p:sp>
+        <p:nvSpPr>
+          <p:cNvPr id="34" name="Text 32"/>
+          <p:cNvSpPr/>
+          <p:nvPr/>
+        </p:nvSpPr>
+        <p:spPr>
+          <a:xfrm>
+            <a:off x="713232" y="5029200"/>
+            <a:ext cx="10789920" cy="1188720"/>
+          </a:xfrm>
+          <a:prstGeom prst="rect">
+            <a:avLst/>
+          </a:prstGeom>
+          <a:noFill/>
+          <a:ln/>
+        </p:spPr>
+        <p:txBody>
+          <a:bodyPr wrap="square" lIns="0" tIns="0" rIns="0" bIns="0" rtlCol="0" anchor="ctr"/>
           <a:lstStyle/>
           <a:p>
             <a:pPr indent="0" marL="0">
               <a:lnSpc>
-                <a:spcPct val="100000"/>
+                <a:spcPct val="102000"/>
               </a:lnSpc>
               <a:buNone/>
             </a:pPr>
             <a:r>
+              <a:rPr lang="en-US" sz="1150" b="1" dirty="0">
+                <a:solidFill>
+                  <a:srgbClr val="FFFFFF"/>
+                </a:solidFill>
+                <a:latin typeface="Calibri" pitchFamily="34" charset="0"/>
+                <a:ea typeface="Calibri" pitchFamily="34" charset="-122"/>
+                <a:cs typeface="Calibri" pitchFamily="34" charset="-120"/>
+              </a:rPr>
+              <a:t>All on public CMS artifacts.  </a:t>
+            </a:r>
+            <a:pPr indent="0" marL="0">
+              <a:lnSpc>
+                <a:spcPct val="102000"/>
+              </a:lnSpc>
+              <a:buNone/>
+            </a:pPr>
+            <a:r>
               <a:rPr lang="en-US" sz="1150" dirty="0">
                 <a:solidFill>
-                  <a:srgbClr val="6B7A8D"/>
-                </a:solidFill>
-                <a:latin typeface="Calibri" pitchFamily="34" charset="0"/>
-                <a:ea typeface="Calibri" pitchFamily="34" charset="-122"/>
-                <a:cs typeface="Calibri" pitchFamily="34" charset="-120"/>
-              </a:rPr>
-              <a:t>Admin, coder, QA, CDI, supervisor — both the menus and the buttons; maps to your SSO in production.</a:t>
+                  <a:srgbClr val="CADCFC"/>
+                </a:solidFill>
+                <a:latin typeface="Calibri" pitchFamily="34" charset="0"/>
+                <a:ea typeface="Calibri" pitchFamily="34" charset="-122"/>
+                <a:cs typeface="Calibri" pitchFamily="34" charset="-120"/>
+              </a:rPr>
+              <a:t>DRG weights, the HCC model, anesthesia base units and Addendum B are published by CMS — so the inpatient and payment engines are even easier to defend than CPT. The evaluation harness scores DRG, RAF, unit and facility accuracy alongside code accuracy. And when an engine can't resolve a payment, the chart goes to a person — it never guesses.</a:t>
             </a:r>
             <a:endParaRPr lang="en-US" sz="1150" dirty="0"/>
           </a:p>
@@ -5536,7 +5823,7 @@
       </p:sp>
       <p:sp>
         <p:nvSpPr>
-          <p:cNvPr id="31" name="Shape 29"/>
+          <p:cNvPr id="35" name="Shape 33"/>
           <p:cNvSpPr/>
           <p:nvPr/>
         </p:nvSpPr>
@@ -5556,7 +5843,7 @@
       </p:sp>
       <p:sp>
         <p:nvSpPr>
-          <p:cNvPr id="32" name="Text 30"/>
+          <p:cNvPr id="36" name="Text 34"/>
           <p:cNvSpPr/>
           <p:nvPr/>
         </p:nvSpPr>
@@ -5595,7 +5882,7 @@
       </p:sp>
       <p:sp>
         <p:nvSpPr>
-          <p:cNvPr id="33" name="Text 31"/>
+          <p:cNvPr id="37" name="Text 35"/>
           <p:cNvSpPr/>
           <p:nvPr/>
         </p:nvSpPr>
@@ -5634,7 +5921,7 @@
       </p:sp>
       <p:sp>
         <p:nvSpPr>
-          <p:cNvPr id="34" name="Text 32"/>
+          <p:cNvPr id="38" name="Text 36"/>
           <p:cNvSpPr/>
           <p:nvPr/>
         </p:nvSpPr>
@@ -5796,7 +6083,7 @@
                 <a:ea typeface="Calibri" pitchFamily="34" charset="-122"/>
                 <a:cs typeface="Calibri" pitchFamily="34" charset="-120"/>
               </a:rPr>
-              <a:t>DESIGN RATIONALE</a:t>
+              <a:t>TRUST BY DESIGN</a:t>
             </a:r>
             <a:endParaRPr lang="en-US" sz="1100" dirty="0"/>
           </a:p>
@@ -5835,7 +6122,7 @@
                 <a:ea typeface="Georgia" pitchFamily="34" charset="-122"/>
                 <a:cs typeface="Georgia" pitchFamily="34" charset="-120"/>
               </a:rPr>
-              <a:t>The big choices — what we weighed, and why we landed where we did</a:t>
+              <a:t>Why every claim can be explained and defended</a:t>
             </a:r>
             <a:endParaRPr lang="en-US" sz="2300" dirty="0"/>
           </a:p>
@@ -5849,186 +6136,78 @@
         </p:nvSpPr>
         <p:spPr>
           <a:xfrm>
-            <a:off x="457200" y="1325880"/>
-            <a:ext cx="11274552" cy="384048"/>
-          </a:xfrm>
-          <a:prstGeom prst="rect">
-            <a:avLst/>
-          </a:prstGeom>
-          <a:solidFill>
-            <a:srgbClr val="1B2A4A"/>
-          </a:solidFill>
-          <a:ln/>
-        </p:spPr>
-      </p:sp>
-      <p:sp>
-        <p:nvSpPr>
-          <p:cNvPr id="8" name="Text 6"/>
-          <p:cNvSpPr/>
-          <p:nvPr/>
-        </p:nvSpPr>
-        <p:spPr>
-          <a:xfrm>
-            <a:off x="594360" y="1325880"/>
-            <a:ext cx="2194560" cy="384048"/>
-          </a:xfrm>
-          <a:prstGeom prst="rect">
-            <a:avLst/>
-          </a:prstGeom>
-          <a:noFill/>
-          <a:ln/>
-        </p:spPr>
-        <p:txBody>
-          <a:bodyPr wrap="square" lIns="0" tIns="0" rIns="0" bIns="0" rtlCol="0" anchor="ctr"/>
-          <a:lstStyle/>
-          <a:p>
-            <a:pPr indent="0" marL="0">
-              <a:buNone/>
-            </a:pPr>
-            <a:r>
-              <a:rPr lang="en-US" sz="1150" b="1" dirty="0">
-                <a:solidFill>
-                  <a:srgbClr val="FFFFFF"/>
-                </a:solidFill>
-                <a:latin typeface="Calibri" pitchFamily="34" charset="0"/>
-                <a:ea typeface="Calibri" pitchFamily="34" charset="-122"/>
-                <a:cs typeface="Calibri" pitchFamily="34" charset="-120"/>
-              </a:rPr>
-              <a:t>The decision</a:t>
-            </a:r>
-            <a:endParaRPr lang="en-US" sz="1150" dirty="0"/>
-          </a:p>
-        </p:txBody>
-      </p:sp>
-      <p:sp>
-        <p:nvSpPr>
-          <p:cNvPr id="9" name="Text 7"/>
-          <p:cNvSpPr/>
-          <p:nvPr/>
-        </p:nvSpPr>
-        <p:spPr>
-          <a:xfrm>
-            <a:off x="2971800" y="1325880"/>
-            <a:ext cx="3840480" cy="384048"/>
-          </a:xfrm>
-          <a:prstGeom prst="rect">
-            <a:avLst/>
-          </a:prstGeom>
-          <a:noFill/>
-          <a:ln/>
-        </p:spPr>
-        <p:txBody>
-          <a:bodyPr wrap="square" lIns="0" tIns="0" rIns="0" bIns="0" rtlCol="0" anchor="ctr"/>
-          <a:lstStyle/>
-          <a:p>
-            <a:pPr indent="0" marL="0">
-              <a:buNone/>
-            </a:pPr>
-            <a:r>
-              <a:rPr lang="en-US" sz="1150" b="1" dirty="0">
-                <a:solidFill>
-                  <a:srgbClr val="FFFFFF"/>
-                </a:solidFill>
-                <a:latin typeface="Calibri" pitchFamily="34" charset="0"/>
-                <a:ea typeface="Calibri" pitchFamily="34" charset="-122"/>
-                <a:cs typeface="Calibri" pitchFamily="34" charset="-120"/>
-              </a:rPr>
-              <a:t>What we considered</a:t>
-            </a:r>
-            <a:endParaRPr lang="en-US" sz="1150" dirty="0"/>
-          </a:p>
-        </p:txBody>
-      </p:sp>
-      <p:sp>
-        <p:nvSpPr>
-          <p:cNvPr id="10" name="Text 8"/>
-          <p:cNvSpPr/>
-          <p:nvPr/>
-        </p:nvSpPr>
-        <p:spPr>
-          <a:xfrm>
-            <a:off x="6995160" y="1325880"/>
-            <a:ext cx="4690872" cy="384048"/>
-          </a:xfrm>
-          <a:prstGeom prst="rect">
-            <a:avLst/>
-          </a:prstGeom>
-          <a:noFill/>
-          <a:ln/>
-        </p:spPr>
-        <p:txBody>
-          <a:bodyPr wrap="square" lIns="0" tIns="0" rIns="0" bIns="0" rtlCol="0" anchor="ctr"/>
-          <a:lstStyle/>
-          <a:p>
-            <a:pPr indent="0" marL="0">
-              <a:buNone/>
-            </a:pPr>
-            <a:r>
-              <a:rPr lang="en-US" sz="1150" b="1" dirty="0">
-                <a:solidFill>
-                  <a:srgbClr val="FFFFFF"/>
-                </a:solidFill>
-                <a:latin typeface="Calibri" pitchFamily="34" charset="0"/>
-                <a:ea typeface="Calibri" pitchFamily="34" charset="-122"/>
-                <a:cs typeface="Calibri" pitchFamily="34" charset="-120"/>
-              </a:rPr>
-              <a:t>Where we landed — and why</a:t>
-            </a:r>
-            <a:endParaRPr lang="en-US" sz="1150" dirty="0"/>
-          </a:p>
-        </p:txBody>
-      </p:sp>
-      <p:sp>
-        <p:nvSpPr>
-          <p:cNvPr id="11" name="Shape 9"/>
-          <p:cNvSpPr/>
-          <p:nvPr/>
-        </p:nvSpPr>
-        <p:spPr>
-          <a:xfrm>
-            <a:off x="457200" y="1709928"/>
-            <a:ext cx="11274552" cy="548640"/>
-          </a:xfrm>
-          <a:prstGeom prst="rect">
-            <a:avLst/>
-          </a:prstGeom>
-          <a:solidFill>
-            <a:srgbClr val="EFF4FA"/>
-          </a:solidFill>
-          <a:ln w="9525">
+            <a:off x="457200" y="1417320"/>
+            <a:ext cx="5541264" cy="1371600"/>
+          </a:xfrm>
+          <a:prstGeom prst="roundRect">
+            <a:avLst>
+              <a:gd name="adj" fmla="val 4667"/>
+            </a:avLst>
+          </a:prstGeom>
+          <a:solidFill>
+            <a:srgbClr val="FFFFFF"/>
+          </a:solidFill>
+          <a:ln w="12700">
             <a:solidFill>
               <a:srgbClr val="D8E1EC"/>
             </a:solidFill>
             <a:prstDash val="solid"/>
           </a:ln>
-        </p:spPr>
-      </p:sp>
-      <p:sp>
-        <p:nvSpPr>
-          <p:cNvPr id="12" name="Text 10"/>
-          <p:cNvSpPr/>
-          <p:nvPr/>
-        </p:nvSpPr>
-        <p:spPr>
-          <a:xfrm>
-            <a:off x="594360" y="1709928"/>
-            <a:ext cx="2194560" cy="548640"/>
-          </a:xfrm>
-          <a:prstGeom prst="rect">
-            <a:avLst/>
-          </a:prstGeom>
-          <a:noFill/>
-          <a:ln/>
-        </p:spPr>
-        <p:txBody>
-          <a:bodyPr wrap="square" lIns="0" tIns="0" rIns="0" bIns="0" rtlCol="0" anchor="ctr"/>
-          <a:lstStyle/>
-          <a:p>
-            <a:pPr indent="0" marL="0">
-              <a:buNone/>
-            </a:pPr>
-            <a:r>
-              <a:rPr lang="en-US" sz="1100" b="1" dirty="0">
+          <a:effectLst>
+            <a:outerShdw sx="100000" sy="100000" kx="0" ky="0" algn="bl" rotWithShape="0" blurRad="88900" dist="38100" dir="8100000">
+              <a:srgbClr val="1B2A4A">
+                <a:alpha val="12000"/>
+              </a:srgbClr>
+            </a:outerShdw>
+          </a:effectLst>
+        </p:spPr>
+      </p:sp>
+      <p:sp>
+        <p:nvSpPr>
+          <p:cNvPr id="8" name="Shape 6"/>
+          <p:cNvSpPr/>
+          <p:nvPr/>
+        </p:nvSpPr>
+        <p:spPr>
+          <a:xfrm>
+            <a:off x="457200" y="1417320"/>
+            <a:ext cx="118872" cy="1371600"/>
+          </a:xfrm>
+          <a:prstGeom prst="rect">
+            <a:avLst/>
+          </a:prstGeom>
+          <a:solidFill>
+            <a:srgbClr val="13B5A6"/>
+          </a:solidFill>
+          <a:ln/>
+        </p:spPr>
+      </p:sp>
+      <p:sp>
+        <p:nvSpPr>
+          <p:cNvPr id="9" name="Text 7"/>
+          <p:cNvSpPr/>
+          <p:nvPr/>
+        </p:nvSpPr>
+        <p:spPr>
+          <a:xfrm>
+            <a:off x="777240" y="1600200"/>
+            <a:ext cx="4992624" cy="365760"/>
+          </a:xfrm>
+          <a:prstGeom prst="rect">
+            <a:avLst/>
+          </a:prstGeom>
+          <a:noFill/>
+          <a:ln/>
+        </p:spPr>
+        <p:txBody>
+          <a:bodyPr wrap="square" lIns="0" tIns="0" rIns="0" bIns="0" rtlCol="0" anchor="ctr"/>
+          <a:lstStyle/>
+          <a:p>
+            <a:pPr indent="0" marL="0">
+              <a:buNone/>
+            </a:pPr>
+            <a:r>
+              <a:rPr lang="en-US" sz="1400" b="1" dirty="0">
                 <a:solidFill>
                   <a:srgbClr val="1B2A4A"/>
                 </a:solidFill>
@@ -6036,147 +6215,134 @@
                 <a:ea typeface="Calibri" pitchFamily="34" charset="-122"/>
                 <a:cs typeface="Calibri" pitchFamily="34" charset="-120"/>
               </a:rPr>
-              <a:t>The reasoning engine</a:t>
-            </a:r>
-            <a:endParaRPr lang="en-US" sz="1100" dirty="0"/>
-          </a:p>
-        </p:txBody>
-      </p:sp>
-      <p:sp>
-        <p:nvSpPr>
-          <p:cNvPr id="13" name="Text 11"/>
-          <p:cNvSpPr/>
-          <p:nvPr/>
-        </p:nvSpPr>
-        <p:spPr>
-          <a:xfrm>
-            <a:off x="2971800" y="1709928"/>
-            <a:ext cx="3794760" cy="548640"/>
-          </a:xfrm>
-          <a:prstGeom prst="rect">
-            <a:avLst/>
-          </a:prstGeom>
-          <a:noFill/>
-          <a:ln/>
-        </p:spPr>
-        <p:txBody>
-          <a:bodyPr wrap="square" lIns="0" tIns="0" rIns="0" bIns="0" rtlCol="0" anchor="ctr"/>
+              <a:t>Every code is cited</a:t>
+            </a:r>
+            <a:endParaRPr lang="en-US" sz="1400" dirty="0"/>
+          </a:p>
+        </p:txBody>
+      </p:sp>
+      <p:sp>
+        <p:nvSpPr>
+          <p:cNvPr id="10" name="Text 8"/>
+          <p:cNvSpPr/>
+          <p:nvPr/>
+        </p:nvSpPr>
+        <p:spPr>
+          <a:xfrm>
+            <a:off x="777240" y="1984248"/>
+            <a:ext cx="4992624" cy="731520"/>
+          </a:xfrm>
+          <a:prstGeom prst="rect">
+            <a:avLst/>
+          </a:prstGeom>
+          <a:noFill/>
+          <a:ln/>
+        </p:spPr>
+        <p:txBody>
+          <a:bodyPr wrap="square" lIns="0" tIns="0" rIns="0" bIns="0" rtlCol="0" anchor="t"/>
           <a:lstStyle/>
           <a:p>
             <a:pPr indent="0" marL="0">
               <a:lnSpc>
-                <a:spcPct val="92000"/>
+                <a:spcPct val="100000"/>
               </a:lnSpc>
               <a:buNone/>
             </a:pPr>
             <a:r>
-              <a:rPr lang="en-US" sz="1000" dirty="0">
-                <a:solidFill>
-                  <a:srgbClr val="475569"/>
-                </a:solidFill>
-                <a:latin typeface="Calibri" pitchFamily="34" charset="0"/>
-                <a:ea typeface="Calibri" pitchFamily="34" charset="-122"/>
-                <a:cs typeface="Calibri" pitchFamily="34" charset="-120"/>
-              </a:rPr>
-              <a:t>in-house NLP / small models  ·  a frontier LLM  ·  a mix</a:t>
-            </a:r>
-            <a:endParaRPr lang="en-US" sz="1000" dirty="0"/>
-          </a:p>
-        </p:txBody>
-      </p:sp>
-      <p:sp>
-        <p:nvSpPr>
-          <p:cNvPr id="14" name="Text 12"/>
-          <p:cNvSpPr/>
-          <p:nvPr/>
-        </p:nvSpPr>
-        <p:spPr>
-          <a:xfrm>
-            <a:off x="6995160" y="1709928"/>
-            <a:ext cx="4645152" cy="548640"/>
-          </a:xfrm>
-          <a:prstGeom prst="rect">
-            <a:avLst/>
-          </a:prstGeom>
-          <a:noFill/>
-          <a:ln/>
-        </p:spPr>
-        <p:txBody>
-          <a:bodyPr wrap="square" lIns="0" tIns="0" rIns="0" bIns="0" rtlCol="0" anchor="ctr"/>
-          <a:lstStyle/>
-          <a:p>
-            <a:pPr indent="0" marL="0">
-              <a:lnSpc>
-                <a:spcPct val="92000"/>
-              </a:lnSpc>
-              <a:buNone/>
-            </a:pPr>
-            <a:r>
-              <a:rPr lang="en-US" sz="1000" dirty="0">
-                <a:solidFill>
-                  <a:srgbClr val="27313F"/>
-                </a:solidFill>
-                <a:latin typeface="Calibri" pitchFamily="34" charset="0"/>
-                <a:ea typeface="Calibri" pitchFamily="34" charset="-122"/>
-                <a:cs typeface="Calibri" pitchFamily="34" charset="-120"/>
-              </a:rPr>
-              <a:t>Frontier Claude now, for accuracy and clean citations — with a clear path to smaller US-region models for cost and latency.</a:t>
-            </a:r>
-            <a:endParaRPr lang="en-US" sz="1000" dirty="0"/>
-          </a:p>
-        </p:txBody>
-      </p:sp>
-      <p:sp>
-        <p:nvSpPr>
-          <p:cNvPr id="15" name="Shape 13"/>
-          <p:cNvSpPr/>
-          <p:nvPr/>
-        </p:nvSpPr>
-        <p:spPr>
-          <a:xfrm>
-            <a:off x="457200" y="2258568"/>
-            <a:ext cx="11274552" cy="548640"/>
-          </a:xfrm>
-          <a:prstGeom prst="rect">
-            <a:avLst/>
+              <a:rPr lang="en-US" sz="1150" dirty="0">
+                <a:solidFill>
+                  <a:srgbClr val="6B7A8D"/>
+                </a:solidFill>
+                <a:latin typeface="Calibri" pitchFamily="34" charset="0"/>
+                <a:ea typeface="Calibri" pitchFamily="34" charset="-122"/>
+                <a:cs typeface="Calibri" pitchFamily="34" charset="-120"/>
+              </a:rPr>
+              <a:t>Each accepted code links back to the chart line and the guideline that justify it — coders see the why.</a:t>
+            </a:r>
+            <a:endParaRPr lang="en-US" sz="1150" dirty="0"/>
+          </a:p>
+        </p:txBody>
+      </p:sp>
+      <p:sp>
+        <p:nvSpPr>
+          <p:cNvPr id="11" name="Shape 9"/>
+          <p:cNvSpPr/>
+          <p:nvPr/>
+        </p:nvSpPr>
+        <p:spPr>
+          <a:xfrm>
+            <a:off x="6190488" y="1417320"/>
+            <a:ext cx="5541264" cy="1371600"/>
+          </a:xfrm>
+          <a:prstGeom prst="roundRect">
+            <a:avLst>
+              <a:gd name="adj" fmla="val 4667"/>
+            </a:avLst>
           </a:prstGeom>
           <a:solidFill>
             <a:srgbClr val="FFFFFF"/>
           </a:solidFill>
-          <a:ln w="9525">
+          <a:ln w="12700">
             <a:solidFill>
               <a:srgbClr val="D8E1EC"/>
             </a:solidFill>
             <a:prstDash val="solid"/>
           </a:ln>
-        </p:spPr>
-      </p:sp>
-      <p:sp>
-        <p:nvSpPr>
-          <p:cNvPr id="16" name="Text 14"/>
-          <p:cNvSpPr/>
-          <p:nvPr/>
-        </p:nvSpPr>
-        <p:spPr>
-          <a:xfrm>
-            <a:off x="594360" y="2258568"/>
-            <a:ext cx="2194560" cy="548640"/>
-          </a:xfrm>
-          <a:prstGeom prst="rect">
-            <a:avLst/>
-          </a:prstGeom>
-          <a:noFill/>
-          <a:ln/>
-        </p:spPr>
-        <p:txBody>
-          <a:bodyPr wrap="square" lIns="0" tIns="0" rIns="0" bIns="0" rtlCol="0" anchor="ctr"/>
-          <a:lstStyle/>
-          <a:p>
-            <a:pPr indent="0" marL="0">
-              <a:buNone/>
-            </a:pPr>
-            <a:r>
-              <a:rPr lang="en-US" sz="1100" b="1" dirty="0">
+          <a:effectLst>
+            <a:outerShdw sx="100000" sy="100000" kx="0" ky="0" algn="bl" rotWithShape="0" blurRad="88900" dist="38100" dir="8100000">
+              <a:srgbClr val="1B2A4A">
+                <a:alpha val="12000"/>
+              </a:srgbClr>
+            </a:outerShdw>
+          </a:effectLst>
+        </p:spPr>
+      </p:sp>
+      <p:sp>
+        <p:nvSpPr>
+          <p:cNvPr id="12" name="Shape 10"/>
+          <p:cNvSpPr/>
+          <p:nvPr/>
+        </p:nvSpPr>
+        <p:spPr>
+          <a:xfrm>
+            <a:off x="6190488" y="1417320"/>
+            <a:ext cx="118872" cy="1371600"/>
+          </a:xfrm>
+          <a:prstGeom prst="rect">
+            <a:avLst/>
+          </a:prstGeom>
+          <a:solidFill>
+            <a:srgbClr val="13B5A6"/>
+          </a:solidFill>
+          <a:ln/>
+        </p:spPr>
+      </p:sp>
+      <p:sp>
+        <p:nvSpPr>
+          <p:cNvPr id="13" name="Text 11"/>
+          <p:cNvSpPr/>
+          <p:nvPr/>
+        </p:nvSpPr>
+        <p:spPr>
+          <a:xfrm>
+            <a:off x="6510528" y="1600200"/>
+            <a:ext cx="4992624" cy="365760"/>
+          </a:xfrm>
+          <a:prstGeom prst="rect">
+            <a:avLst/>
+          </a:prstGeom>
+          <a:noFill/>
+          <a:ln/>
+        </p:spPr>
+        <p:txBody>
+          <a:bodyPr wrap="square" lIns="0" tIns="0" rIns="0" bIns="0" rtlCol="0" anchor="ctr"/>
+          <a:lstStyle/>
+          <a:p>
+            <a:pPr indent="0" marL="0">
+              <a:buNone/>
+            </a:pPr>
+            <a:r>
+              <a:rPr lang="en-US" sz="1400" b="1" dirty="0">
                 <a:solidFill>
                   <a:srgbClr val="1B2A4A"/>
                 </a:solidFill>
@@ -6184,147 +6350,134 @@
                 <a:ea typeface="Calibri" pitchFamily="34" charset="-122"/>
                 <a:cs typeface="Calibri" pitchFamily="34" charset="-120"/>
               </a:rPr>
-              <a:t>Stopping hallucination</a:t>
-            </a:r>
-            <a:endParaRPr lang="en-US" sz="1100" dirty="0"/>
-          </a:p>
-        </p:txBody>
-      </p:sp>
-      <p:sp>
-        <p:nvSpPr>
-          <p:cNvPr id="17" name="Text 15"/>
-          <p:cNvSpPr/>
-          <p:nvPr/>
-        </p:nvSpPr>
-        <p:spPr>
-          <a:xfrm>
-            <a:off x="2971800" y="2258568"/>
-            <a:ext cx="3794760" cy="548640"/>
-          </a:xfrm>
-          <a:prstGeom prst="rect">
-            <a:avLst/>
-          </a:prstGeom>
-          <a:noFill/>
-          <a:ln/>
-        </p:spPr>
-        <p:txBody>
-          <a:bodyPr wrap="square" lIns="0" tIns="0" rIns="0" bIns="0" rtlCol="0" anchor="ctr"/>
+              <a:t>A complete audit trail</a:t>
+            </a:r>
+            <a:endParaRPr lang="en-US" sz="1400" dirty="0"/>
+          </a:p>
+        </p:txBody>
+      </p:sp>
+      <p:sp>
+        <p:nvSpPr>
+          <p:cNvPr id="14" name="Text 12"/>
+          <p:cNvSpPr/>
+          <p:nvPr/>
+        </p:nvSpPr>
+        <p:spPr>
+          <a:xfrm>
+            <a:off x="6510528" y="1984248"/>
+            <a:ext cx="4992624" cy="731520"/>
+          </a:xfrm>
+          <a:prstGeom prst="rect">
+            <a:avLst/>
+          </a:prstGeom>
+          <a:noFill/>
+          <a:ln/>
+        </p:spPr>
+        <p:txBody>
+          <a:bodyPr wrap="square" lIns="0" tIns="0" rIns="0" bIns="0" rtlCol="0" anchor="t"/>
           <a:lstStyle/>
           <a:p>
             <a:pPr indent="0" marL="0">
               <a:lnSpc>
-                <a:spcPct val="92000"/>
+                <a:spcPct val="100000"/>
               </a:lnSpc>
               <a:buNone/>
             </a:pPr>
             <a:r>
-              <a:rPr lang="en-US" sz="1000" dirty="0">
-                <a:solidFill>
-                  <a:srgbClr val="475569"/>
-                </a:solidFill>
-                <a:latin typeface="Calibri" pitchFamily="34" charset="0"/>
-                <a:ea typeface="Calibri" pitchFamily="34" charset="-122"/>
-                <a:cs typeface="Calibri" pitchFamily="34" charset="-120"/>
-              </a:rPr>
-              <a:t>careful prompting  ·  plain RAG  ·  Graph-RAG + rule checks</a:t>
-            </a:r>
-            <a:endParaRPr lang="en-US" sz="1000" dirty="0"/>
-          </a:p>
-        </p:txBody>
-      </p:sp>
-      <p:sp>
-        <p:nvSpPr>
-          <p:cNvPr id="18" name="Text 16"/>
-          <p:cNvSpPr/>
-          <p:nvPr/>
-        </p:nvSpPr>
-        <p:spPr>
-          <a:xfrm>
-            <a:off x="6995160" y="2258568"/>
-            <a:ext cx="4645152" cy="548640"/>
-          </a:xfrm>
-          <a:prstGeom prst="rect">
-            <a:avLst/>
-          </a:prstGeom>
-          <a:noFill/>
-          <a:ln/>
-        </p:spPr>
-        <p:txBody>
-          <a:bodyPr wrap="square" lIns="0" tIns="0" rIns="0" bIns="0" rtlCol="0" anchor="ctr"/>
-          <a:lstStyle/>
-          <a:p>
-            <a:pPr indent="0" marL="0">
-              <a:lnSpc>
-                <a:spcPct val="92000"/>
-              </a:lnSpc>
-              <a:buNone/>
-            </a:pPr>
-            <a:r>
-              <a:rPr lang="en-US" sz="1000" dirty="0">
-                <a:solidFill>
-                  <a:srgbClr val="27313F"/>
-                </a:solidFill>
-                <a:latin typeface="Calibri" pitchFamily="34" charset="0"/>
-                <a:ea typeface="Calibri" pitchFamily="34" charset="-122"/>
-                <a:cs typeface="Calibri" pitchFamily="34" charset="-120"/>
-              </a:rPr>
-              <a:t>Ground it in retrieval and check it with rules. The agent can only use codes it was given — not a prompt we hope holds.</a:t>
-            </a:r>
-            <a:endParaRPr lang="en-US" sz="1000" dirty="0"/>
-          </a:p>
-        </p:txBody>
-      </p:sp>
-      <p:sp>
-        <p:nvSpPr>
-          <p:cNvPr id="19" name="Shape 17"/>
-          <p:cNvSpPr/>
-          <p:nvPr/>
-        </p:nvSpPr>
-        <p:spPr>
-          <a:xfrm>
-            <a:off x="457200" y="2807208"/>
-            <a:ext cx="11274552" cy="548640"/>
-          </a:xfrm>
-          <a:prstGeom prst="rect">
-            <a:avLst/>
-          </a:prstGeom>
-          <a:solidFill>
-            <a:srgbClr val="EFF4FA"/>
-          </a:solidFill>
-          <a:ln w="9525">
+              <a:rPr lang="en-US" sz="1150" dirty="0">
+                <a:solidFill>
+                  <a:srgbClr val="6B7A8D"/>
+                </a:solidFill>
+                <a:latin typeface="Calibri" pitchFamily="34" charset="0"/>
+                <a:ea typeface="Calibri" pitchFamily="34" charset="-122"/>
+                <a:cs typeface="Calibri" pitchFamily="34" charset="-120"/>
+              </a:rPr>
+              <a:t>Each step, who did it, which model and when — and one Audit Log screen that merges coding and governance events into a single, filterable timeline.</a:t>
+            </a:r>
+            <a:endParaRPr lang="en-US" sz="1150" dirty="0"/>
+          </a:p>
+        </p:txBody>
+      </p:sp>
+      <p:sp>
+        <p:nvSpPr>
+          <p:cNvPr id="15" name="Shape 13"/>
+          <p:cNvSpPr/>
+          <p:nvPr/>
+        </p:nvSpPr>
+        <p:spPr>
+          <a:xfrm>
+            <a:off x="457200" y="2953512"/>
+            <a:ext cx="5541264" cy="1371600"/>
+          </a:xfrm>
+          <a:prstGeom prst="roundRect">
+            <a:avLst>
+              <a:gd name="adj" fmla="val 4667"/>
+            </a:avLst>
+          </a:prstGeom>
+          <a:solidFill>
+            <a:srgbClr val="FFFFFF"/>
+          </a:solidFill>
+          <a:ln w="12700">
             <a:solidFill>
               <a:srgbClr val="D8E1EC"/>
             </a:solidFill>
             <a:prstDash val="solid"/>
           </a:ln>
-        </p:spPr>
-      </p:sp>
-      <p:sp>
-        <p:nvSpPr>
-          <p:cNvPr id="20" name="Text 18"/>
-          <p:cNvSpPr/>
-          <p:nvPr/>
-        </p:nvSpPr>
-        <p:spPr>
-          <a:xfrm>
-            <a:off x="594360" y="2807208"/>
-            <a:ext cx="2194560" cy="548640"/>
-          </a:xfrm>
-          <a:prstGeom prst="rect">
-            <a:avLst/>
-          </a:prstGeom>
-          <a:noFill/>
-          <a:ln/>
-        </p:spPr>
-        <p:txBody>
-          <a:bodyPr wrap="square" lIns="0" tIns="0" rIns="0" bIns="0" rtlCol="0" anchor="ctr"/>
-          <a:lstStyle/>
-          <a:p>
-            <a:pPr indent="0" marL="0">
-              <a:buNone/>
-            </a:pPr>
-            <a:r>
-              <a:rPr lang="en-US" sz="1100" b="1" dirty="0">
+          <a:effectLst>
+            <a:outerShdw sx="100000" sy="100000" kx="0" ky="0" algn="bl" rotWithShape="0" blurRad="88900" dist="38100" dir="8100000">
+              <a:srgbClr val="1B2A4A">
+                <a:alpha val="12000"/>
+              </a:srgbClr>
+            </a:outerShdw>
+          </a:effectLst>
+        </p:spPr>
+      </p:sp>
+      <p:sp>
+        <p:nvSpPr>
+          <p:cNvPr id="16" name="Shape 14"/>
+          <p:cNvSpPr/>
+          <p:nvPr/>
+        </p:nvSpPr>
+        <p:spPr>
+          <a:xfrm>
+            <a:off x="457200" y="2953512"/>
+            <a:ext cx="118872" cy="1371600"/>
+          </a:xfrm>
+          <a:prstGeom prst="rect">
+            <a:avLst/>
+          </a:prstGeom>
+          <a:solidFill>
+            <a:srgbClr val="13B5A6"/>
+          </a:solidFill>
+          <a:ln/>
+        </p:spPr>
+      </p:sp>
+      <p:sp>
+        <p:nvSpPr>
+          <p:cNvPr id="17" name="Text 15"/>
+          <p:cNvSpPr/>
+          <p:nvPr/>
+        </p:nvSpPr>
+        <p:spPr>
+          <a:xfrm>
+            <a:off x="777240" y="3136392"/>
+            <a:ext cx="4992624" cy="365760"/>
+          </a:xfrm>
+          <a:prstGeom prst="rect">
+            <a:avLst/>
+          </a:prstGeom>
+          <a:noFill/>
+          <a:ln/>
+        </p:spPr>
+        <p:txBody>
+          <a:bodyPr wrap="square" lIns="0" tIns="0" rIns="0" bIns="0" rtlCol="0" anchor="ctr"/>
+          <a:lstStyle/>
+          <a:p>
+            <a:pPr indent="0" marL="0">
+              <a:buNone/>
+            </a:pPr>
+            <a:r>
+              <a:rPr lang="en-US" sz="1400" b="1" dirty="0">
                 <a:solidFill>
                   <a:srgbClr val="1B2A4A"/>
                 </a:solidFill>
@@ -6332,147 +6485,134 @@
                 <a:ea typeface="Calibri" pitchFamily="34" charset="-122"/>
                 <a:cs typeface="Calibri" pitchFamily="34" charset="-120"/>
               </a:rPr>
-              <a:t>Deciding what to auto-bill</a:t>
-            </a:r>
-            <a:endParaRPr lang="en-US" sz="1100" dirty="0"/>
-          </a:p>
-        </p:txBody>
-      </p:sp>
-      <p:sp>
-        <p:nvSpPr>
-          <p:cNvPr id="21" name="Text 19"/>
-          <p:cNvSpPr/>
-          <p:nvPr/>
-        </p:nvSpPr>
-        <p:spPr>
-          <a:xfrm>
-            <a:off x="2971800" y="2807208"/>
-            <a:ext cx="3794760" cy="548640"/>
-          </a:xfrm>
-          <a:prstGeom prst="rect">
-            <a:avLst/>
-          </a:prstGeom>
-          <a:noFill/>
-          <a:ln/>
-        </p:spPr>
-        <p:txBody>
-          <a:bodyPr wrap="square" lIns="0" tIns="0" rIns="0" bIns="0" rtlCol="0" anchor="ctr"/>
+              <a:t>Every admin change is logged</a:t>
+            </a:r>
+            <a:endParaRPr lang="en-US" sz="1400" dirty="0"/>
+          </a:p>
+        </p:txBody>
+      </p:sp>
+      <p:sp>
+        <p:nvSpPr>
+          <p:cNvPr id="18" name="Text 16"/>
+          <p:cNvSpPr/>
+          <p:nvPr/>
+        </p:nvSpPr>
+        <p:spPr>
+          <a:xfrm>
+            <a:off x="777240" y="3520440"/>
+            <a:ext cx="4992624" cy="731520"/>
+          </a:xfrm>
+          <a:prstGeom prst="rect">
+            <a:avLst/>
+          </a:prstGeom>
+          <a:noFill/>
+          <a:ln/>
+        </p:spPr>
+        <p:txBody>
+          <a:bodyPr wrap="square" lIns="0" tIns="0" rIns="0" bIns="0" rtlCol="0" anchor="t"/>
           <a:lstStyle/>
           <a:p>
             <a:pPr indent="0" marL="0">
               <a:lnSpc>
-                <a:spcPct val="92000"/>
+                <a:spcPct val="100000"/>
               </a:lnSpc>
               <a:buNone/>
             </a:pPr>
             <a:r>
-              <a:rPr lang="en-US" sz="1000" dirty="0">
-                <a:solidFill>
-                  <a:srgbClr val="475569"/>
-                </a:solidFill>
-                <a:latin typeface="Calibri" pitchFamily="34" charset="0"/>
-                <a:ea typeface="Calibri" pitchFamily="34" charset="-122"/>
-                <a:cs typeface="Calibri" pitchFamily="34" charset="-120"/>
-              </a:rPr>
-              <a:t>the model's raw % ·  a blended, calibrated score</a:t>
-            </a:r>
-            <a:endParaRPr lang="en-US" sz="1000" dirty="0"/>
-          </a:p>
-        </p:txBody>
-      </p:sp>
-      <p:sp>
-        <p:nvSpPr>
-          <p:cNvPr id="22" name="Text 20"/>
-          <p:cNvSpPr/>
-          <p:nvPr/>
-        </p:nvSpPr>
-        <p:spPr>
-          <a:xfrm>
-            <a:off x="6995160" y="2807208"/>
-            <a:ext cx="4645152" cy="548640"/>
-          </a:xfrm>
-          <a:prstGeom prst="rect">
-            <a:avLst/>
-          </a:prstGeom>
-          <a:noFill/>
-          <a:ln/>
-        </p:spPr>
-        <p:txBody>
-          <a:bodyPr wrap="square" lIns="0" tIns="0" rIns="0" bIns="0" rtlCol="0" anchor="ctr"/>
-          <a:lstStyle/>
-          <a:p>
-            <a:pPr indent="0" marL="0">
-              <a:lnSpc>
-                <a:spcPct val="92000"/>
-              </a:lnSpc>
-              <a:buNone/>
-            </a:pPr>
-            <a:r>
-              <a:rPr lang="en-US" sz="1000" dirty="0">
-                <a:solidFill>
-                  <a:srgbClr val="27313F"/>
-                </a:solidFill>
-                <a:latin typeface="Calibri" pitchFamily="34" charset="0"/>
-                <a:ea typeface="Calibri" pitchFamily="34" charset="-122"/>
-                <a:cs typeface="Calibri" pitchFamily="34" charset="-120"/>
-              </a:rPr>
-              <a:t>A blended score you can trust, so the auto-bill / QA / coder line is one the business actually sets.</a:t>
-            </a:r>
-            <a:endParaRPr lang="en-US" sz="1000" dirty="0"/>
-          </a:p>
-        </p:txBody>
-      </p:sp>
-      <p:sp>
-        <p:nvSpPr>
-          <p:cNvPr id="23" name="Shape 21"/>
-          <p:cNvSpPr/>
-          <p:nvPr/>
-        </p:nvSpPr>
-        <p:spPr>
-          <a:xfrm>
-            <a:off x="457200" y="3355848"/>
-            <a:ext cx="11274552" cy="548640"/>
-          </a:xfrm>
-          <a:prstGeom prst="rect">
-            <a:avLst/>
+              <a:rPr lang="en-US" sz="1150" dirty="0">
+                <a:solidFill>
+                  <a:srgbClr val="6B7A8D"/>
+                </a:solidFill>
+                <a:latin typeface="Calibri" pitchFamily="34" charset="0"/>
+                <a:ea typeface="Calibri" pitchFamily="34" charset="-122"/>
+                <a:cs typeface="Calibri" pitchFamily="34" charset="-120"/>
+              </a:rPr>
+              <a:t>Config, policy, knowledge-graph, reference-data and gold-set edits — all recorded with who changed what, and when.</a:t>
+            </a:r>
+            <a:endParaRPr lang="en-US" sz="1150" dirty="0"/>
+          </a:p>
+        </p:txBody>
+      </p:sp>
+      <p:sp>
+        <p:nvSpPr>
+          <p:cNvPr id="19" name="Shape 17"/>
+          <p:cNvSpPr/>
+          <p:nvPr/>
+        </p:nvSpPr>
+        <p:spPr>
+          <a:xfrm>
+            <a:off x="6190488" y="2953512"/>
+            <a:ext cx="5541264" cy="1371600"/>
+          </a:xfrm>
+          <a:prstGeom prst="roundRect">
+            <a:avLst>
+              <a:gd name="adj" fmla="val 4667"/>
+            </a:avLst>
           </a:prstGeom>
           <a:solidFill>
             <a:srgbClr val="FFFFFF"/>
           </a:solidFill>
-          <a:ln w="9525">
+          <a:ln w="12700">
             <a:solidFill>
               <a:srgbClr val="D8E1EC"/>
             </a:solidFill>
             <a:prstDash val="solid"/>
           </a:ln>
-        </p:spPr>
-      </p:sp>
-      <p:sp>
-        <p:nvSpPr>
-          <p:cNvPr id="24" name="Text 22"/>
-          <p:cNvSpPr/>
-          <p:nvPr/>
-        </p:nvSpPr>
-        <p:spPr>
-          <a:xfrm>
-            <a:off x="594360" y="3355848"/>
-            <a:ext cx="2194560" cy="548640"/>
-          </a:xfrm>
-          <a:prstGeom prst="rect">
-            <a:avLst/>
-          </a:prstGeom>
-          <a:noFill/>
-          <a:ln/>
-        </p:spPr>
-        <p:txBody>
-          <a:bodyPr wrap="square" lIns="0" tIns="0" rIns="0" bIns="0" rtlCol="0" anchor="ctr"/>
-          <a:lstStyle/>
-          <a:p>
-            <a:pPr indent="0" marL="0">
-              <a:buNone/>
-            </a:pPr>
-            <a:r>
-              <a:rPr lang="en-US" sz="1100" b="1" dirty="0">
+          <a:effectLst>
+            <a:outerShdw sx="100000" sy="100000" kx="0" ky="0" algn="bl" rotWithShape="0" blurRad="88900" dist="38100" dir="8100000">
+              <a:srgbClr val="1B2A4A">
+                <a:alpha val="12000"/>
+              </a:srgbClr>
+            </a:outerShdw>
+          </a:effectLst>
+        </p:spPr>
+      </p:sp>
+      <p:sp>
+        <p:nvSpPr>
+          <p:cNvPr id="20" name="Shape 18"/>
+          <p:cNvSpPr/>
+          <p:nvPr/>
+        </p:nvSpPr>
+        <p:spPr>
+          <a:xfrm>
+            <a:off x="6190488" y="2953512"/>
+            <a:ext cx="118872" cy="1371600"/>
+          </a:xfrm>
+          <a:prstGeom prst="rect">
+            <a:avLst/>
+          </a:prstGeom>
+          <a:solidFill>
+            <a:srgbClr val="13B5A6"/>
+          </a:solidFill>
+          <a:ln/>
+        </p:spPr>
+      </p:sp>
+      <p:sp>
+        <p:nvSpPr>
+          <p:cNvPr id="21" name="Text 19"/>
+          <p:cNvSpPr/>
+          <p:nvPr/>
+        </p:nvSpPr>
+        <p:spPr>
+          <a:xfrm>
+            <a:off x="6510528" y="3136392"/>
+            <a:ext cx="4992624" cy="365760"/>
+          </a:xfrm>
+          <a:prstGeom prst="rect">
+            <a:avLst/>
+          </a:prstGeom>
+          <a:noFill/>
+          <a:ln/>
+        </p:spPr>
+        <p:txBody>
+          <a:bodyPr wrap="square" lIns="0" tIns="0" rIns="0" bIns="0" rtlCol="0" anchor="ctr"/>
+          <a:lstStyle/>
+          <a:p>
+            <a:pPr indent="0" marL="0">
+              <a:buNone/>
+            </a:pPr>
+            <a:r>
+              <a:rPr lang="en-US" sz="1400" b="1" dirty="0">
                 <a:solidFill>
                   <a:srgbClr val="1B2A4A"/>
                 </a:solidFill>
@@ -6480,147 +6620,134 @@
                 <a:ea typeface="Calibri" pitchFamily="34" charset="-122"/>
                 <a:cs typeface="Calibri" pitchFamily="34" charset="-120"/>
               </a:rPr>
-              <a:t>Checking the codes</a:t>
-            </a:r>
-            <a:endParaRPr lang="en-US" sz="1100" dirty="0"/>
-          </a:p>
-        </p:txBody>
-      </p:sp>
-      <p:sp>
-        <p:nvSpPr>
-          <p:cNvPr id="25" name="Text 23"/>
-          <p:cNvSpPr/>
-          <p:nvPr/>
-        </p:nvSpPr>
-        <p:spPr>
-          <a:xfrm>
-            <a:off x="2971800" y="3355848"/>
-            <a:ext cx="3794760" cy="548640"/>
-          </a:xfrm>
-          <a:prstGeom prst="rect">
-            <a:avLst/>
-          </a:prstGeom>
-          <a:noFill/>
-          <a:ln/>
-        </p:spPr>
-        <p:txBody>
-          <a:bodyPr wrap="square" lIns="0" tIns="0" rIns="0" bIns="0" rtlCol="0" anchor="ctr"/>
+              <a:t>Honest accuracy numbers</a:t>
+            </a:r>
+            <a:endParaRPr lang="en-US" sz="1400" dirty="0"/>
+          </a:p>
+        </p:txBody>
+      </p:sp>
+      <p:sp>
+        <p:nvSpPr>
+          <p:cNvPr id="22" name="Text 20"/>
+          <p:cNvSpPr/>
+          <p:nvPr/>
+        </p:nvSpPr>
+        <p:spPr>
+          <a:xfrm>
+            <a:off x="6510528" y="3520440"/>
+            <a:ext cx="4992624" cy="731520"/>
+          </a:xfrm>
+          <a:prstGeom prst="rect">
+            <a:avLst/>
+          </a:prstGeom>
+          <a:noFill/>
+          <a:ln/>
+        </p:spPr>
+        <p:txBody>
+          <a:bodyPr wrap="square" lIns="0" tIns="0" rIns="0" bIns="0" rtlCol="0" anchor="t"/>
           <a:lstStyle/>
           <a:p>
             <a:pPr indent="0" marL="0">
               <a:lnSpc>
-                <a:spcPct val="92000"/>
+                <a:spcPct val="100000"/>
               </a:lnSpc>
               <a:buNone/>
             </a:pPr>
             <a:r>
-              <a:rPr lang="en-US" sz="1000" dirty="0">
-                <a:solidFill>
-                  <a:srgbClr val="475569"/>
-                </a:solidFill>
-                <a:latin typeface="Calibri" pitchFamily="34" charset="0"/>
-                <a:ea typeface="Calibri" pitchFamily="34" charset="-122"/>
-                <a:cs typeface="Calibri" pitchFamily="34" charset="-120"/>
-              </a:rPr>
-              <a:t>let the model check itself  ·  a real rule engine</a:t>
-            </a:r>
-            <a:endParaRPr lang="en-US" sz="1000" dirty="0"/>
-          </a:p>
-        </p:txBody>
-      </p:sp>
-      <p:sp>
-        <p:nvSpPr>
-          <p:cNvPr id="26" name="Text 24"/>
-          <p:cNvSpPr/>
-          <p:nvPr/>
-        </p:nvSpPr>
-        <p:spPr>
-          <a:xfrm>
-            <a:off x="6995160" y="3355848"/>
-            <a:ext cx="4645152" cy="548640"/>
-          </a:xfrm>
-          <a:prstGeom prst="rect">
-            <a:avLst/>
-          </a:prstGeom>
-          <a:noFill/>
-          <a:ln/>
-        </p:spPr>
-        <p:txBody>
-          <a:bodyPr wrap="square" lIns="0" tIns="0" rIns="0" bIns="0" rtlCol="0" anchor="ctr"/>
-          <a:lstStyle/>
-          <a:p>
-            <a:pPr indent="0" marL="0">
-              <a:lnSpc>
-                <a:spcPct val="92000"/>
-              </a:lnSpc>
-              <a:buNone/>
-            </a:pPr>
-            <a:r>
-              <a:rPr lang="en-US" sz="1000" dirty="0">
-                <a:solidFill>
-                  <a:srgbClr val="27313F"/>
-                </a:solidFill>
-                <a:latin typeface="Calibri" pitchFamily="34" charset="0"/>
-                <a:ea typeface="Calibri" pitchFamily="34" charset="-122"/>
-                <a:cs typeface="Calibri" pitchFamily="34" charset="-120"/>
-              </a:rPr>
-              <a:t>Plain, deterministic rules — NCCI, MUE, modifiers, payer — so every check can be inspected and defended.</a:t>
-            </a:r>
-            <a:endParaRPr lang="en-US" sz="1000" dirty="0"/>
-          </a:p>
-        </p:txBody>
-      </p:sp>
-      <p:sp>
-        <p:nvSpPr>
-          <p:cNvPr id="27" name="Shape 25"/>
-          <p:cNvSpPr/>
-          <p:nvPr/>
-        </p:nvSpPr>
-        <p:spPr>
-          <a:xfrm>
-            <a:off x="457200" y="3904488"/>
-            <a:ext cx="11274552" cy="548640"/>
-          </a:xfrm>
-          <a:prstGeom prst="rect">
-            <a:avLst/>
-          </a:prstGeom>
-          <a:solidFill>
-            <a:srgbClr val="EFF4FA"/>
-          </a:solidFill>
-          <a:ln w="9525">
+              <a:rPr lang="en-US" sz="1150" dirty="0">
+                <a:solidFill>
+                  <a:srgbClr val="6B7A8D"/>
+                </a:solidFill>
+                <a:latin typeface="Calibri" pitchFamily="34" charset="0"/>
+                <a:ea typeface="Calibri" pitchFamily="34" charset="-122"/>
+                <a:cs typeface="Calibri" pitchFamily="34" charset="-120"/>
+              </a:rPr>
+              <a:t>Measured against adjudicated consensus — plus live per-model metrics (tokens, latency, override rate), so drift shows up when you switch models.</a:t>
+            </a:r>
+            <a:endParaRPr lang="en-US" sz="1150" dirty="0"/>
+          </a:p>
+        </p:txBody>
+      </p:sp>
+      <p:sp>
+        <p:nvSpPr>
+          <p:cNvPr id="23" name="Shape 21"/>
+          <p:cNvSpPr/>
+          <p:nvPr/>
+        </p:nvSpPr>
+        <p:spPr>
+          <a:xfrm>
+            <a:off x="457200" y="4489704"/>
+            <a:ext cx="5541264" cy="1371600"/>
+          </a:xfrm>
+          <a:prstGeom prst="roundRect">
+            <a:avLst>
+              <a:gd name="adj" fmla="val 4667"/>
+            </a:avLst>
+          </a:prstGeom>
+          <a:solidFill>
+            <a:srgbClr val="FFFFFF"/>
+          </a:solidFill>
+          <a:ln w="12700">
             <a:solidFill>
               <a:srgbClr val="D8E1EC"/>
             </a:solidFill>
             <a:prstDash val="solid"/>
           </a:ln>
-        </p:spPr>
-      </p:sp>
-      <p:sp>
-        <p:nvSpPr>
-          <p:cNvPr id="28" name="Text 26"/>
-          <p:cNvSpPr/>
-          <p:nvPr/>
-        </p:nvSpPr>
-        <p:spPr>
-          <a:xfrm>
-            <a:off x="594360" y="3904488"/>
-            <a:ext cx="2194560" cy="548640"/>
-          </a:xfrm>
-          <a:prstGeom prst="rect">
-            <a:avLst/>
-          </a:prstGeom>
-          <a:noFill/>
-          <a:ln/>
-        </p:spPr>
-        <p:txBody>
-          <a:bodyPr wrap="square" lIns="0" tIns="0" rIns="0" bIns="0" rtlCol="0" anchor="ctr"/>
-          <a:lstStyle/>
-          <a:p>
-            <a:pPr indent="0" marL="0">
-              <a:buNone/>
-            </a:pPr>
-            <a:r>
-              <a:rPr lang="en-US" sz="1100" b="1" dirty="0">
+          <a:effectLst>
+            <a:outerShdw sx="100000" sy="100000" kx="0" ky="0" algn="bl" rotWithShape="0" blurRad="88900" dist="38100" dir="8100000">
+              <a:srgbClr val="1B2A4A">
+                <a:alpha val="12000"/>
+              </a:srgbClr>
+            </a:outerShdw>
+          </a:effectLst>
+        </p:spPr>
+      </p:sp>
+      <p:sp>
+        <p:nvSpPr>
+          <p:cNvPr id="24" name="Shape 22"/>
+          <p:cNvSpPr/>
+          <p:nvPr/>
+        </p:nvSpPr>
+        <p:spPr>
+          <a:xfrm>
+            <a:off x="457200" y="4489704"/>
+            <a:ext cx="118872" cy="1371600"/>
+          </a:xfrm>
+          <a:prstGeom prst="rect">
+            <a:avLst/>
+          </a:prstGeom>
+          <a:solidFill>
+            <a:srgbClr val="13B5A6"/>
+          </a:solidFill>
+          <a:ln/>
+        </p:spPr>
+      </p:sp>
+      <p:sp>
+        <p:nvSpPr>
+          <p:cNvPr id="25" name="Text 23"/>
+          <p:cNvSpPr/>
+          <p:nvPr/>
+        </p:nvSpPr>
+        <p:spPr>
+          <a:xfrm>
+            <a:off x="777240" y="4672584"/>
+            <a:ext cx="4992624" cy="365760"/>
+          </a:xfrm>
+          <a:prstGeom prst="rect">
+            <a:avLst/>
+          </a:prstGeom>
+          <a:noFill/>
+          <a:ln/>
+        </p:spPr>
+        <p:txBody>
+          <a:bodyPr wrap="square" lIns="0" tIns="0" rIns="0" bIns="0" rtlCol="0" anchor="ctr"/>
+          <a:lstStyle/>
+          <a:p>
+            <a:pPr indent="0" marL="0">
+              <a:buNone/>
+            </a:pPr>
+            <a:r>
+              <a:rPr lang="en-US" sz="1400" b="1" dirty="0">
                 <a:solidFill>
                   <a:srgbClr val="1B2A4A"/>
                 </a:solidFill>
@@ -6628,147 +6755,134 @@
                 <a:ea typeface="Calibri" pitchFamily="34" charset="-122"/>
                 <a:cs typeface="Calibri" pitchFamily="34" charset="-120"/>
               </a:rPr>
-              <a:t>Where knowledge lives</a:t>
-            </a:r>
-            <a:endParaRPr lang="en-US" sz="1100" dirty="0"/>
-          </a:p>
-        </p:txBody>
-      </p:sp>
-      <p:sp>
-        <p:nvSpPr>
-          <p:cNvPr id="29" name="Text 27"/>
-          <p:cNvSpPr/>
-          <p:nvPr/>
-        </p:nvSpPr>
-        <p:spPr>
-          <a:xfrm>
-            <a:off x="2971800" y="3904488"/>
-            <a:ext cx="3794760" cy="548640"/>
-          </a:xfrm>
-          <a:prstGeom prst="rect">
-            <a:avLst/>
-          </a:prstGeom>
-          <a:noFill/>
-          <a:ln/>
-        </p:spPr>
-        <p:txBody>
-          <a:bodyPr wrap="square" lIns="0" tIns="0" rIns="0" bIns="0" rtlCol="0" anchor="ctr"/>
+              <a:t>Overrides keep the reason</a:t>
+            </a:r>
+            <a:endParaRPr lang="en-US" sz="1400" dirty="0"/>
+          </a:p>
+        </p:txBody>
+      </p:sp>
+      <p:sp>
+        <p:nvSpPr>
+          <p:cNvPr id="26" name="Text 24"/>
+          <p:cNvSpPr/>
+          <p:nvPr/>
+        </p:nvSpPr>
+        <p:spPr>
+          <a:xfrm>
+            <a:off x="777240" y="5056632"/>
+            <a:ext cx="4992624" cy="731520"/>
+          </a:xfrm>
+          <a:prstGeom prst="rect">
+            <a:avLst/>
+          </a:prstGeom>
+          <a:noFill/>
+          <a:ln/>
+        </p:spPr>
+        <p:txBody>
+          <a:bodyPr wrap="square" lIns="0" tIns="0" rIns="0" bIns="0" rtlCol="0" anchor="t"/>
           <a:lstStyle/>
           <a:p>
             <a:pPr indent="0" marL="0">
               <a:lnSpc>
-                <a:spcPct val="92000"/>
+                <a:spcPct val="100000"/>
               </a:lnSpc>
               <a:buNone/>
             </a:pPr>
             <a:r>
-              <a:rPr lang="en-US" sz="1000" dirty="0">
-                <a:solidFill>
-                  <a:srgbClr val="475569"/>
-                </a:solidFill>
-                <a:latin typeface="Calibri" pitchFamily="34" charset="0"/>
-                <a:ea typeface="Calibri" pitchFamily="34" charset="-122"/>
-                <a:cs typeface="Calibri" pitchFamily="34" charset="-120"/>
-              </a:rPr>
-              <a:t>a separate vector database  ·  Postgres + pgvector</a:t>
-            </a:r>
-            <a:endParaRPr lang="en-US" sz="1000" dirty="0"/>
-          </a:p>
-        </p:txBody>
-      </p:sp>
-      <p:sp>
-        <p:nvSpPr>
-          <p:cNvPr id="30" name="Text 28"/>
-          <p:cNvSpPr/>
-          <p:nvPr/>
-        </p:nvSpPr>
-        <p:spPr>
-          <a:xfrm>
-            <a:off x="6995160" y="3904488"/>
-            <a:ext cx="4645152" cy="548640"/>
-          </a:xfrm>
-          <a:prstGeom prst="rect">
-            <a:avLst/>
-          </a:prstGeom>
-          <a:noFill/>
-          <a:ln/>
-        </p:spPr>
-        <p:txBody>
-          <a:bodyPr wrap="square" lIns="0" tIns="0" rIns="0" bIns="0" rtlCol="0" anchor="ctr"/>
-          <a:lstStyle/>
-          <a:p>
-            <a:pPr indent="0" marL="0">
-              <a:lnSpc>
-                <a:spcPct val="92000"/>
-              </a:lnSpc>
-              <a:buNone/>
-            </a:pPr>
-            <a:r>
-              <a:rPr lang="en-US" sz="1000" dirty="0">
-                <a:solidFill>
-                  <a:srgbClr val="27313F"/>
-                </a:solidFill>
-                <a:latin typeface="Calibri" pitchFamily="34" charset="0"/>
-                <a:ea typeface="Calibri" pitchFamily="34" charset="-122"/>
-                <a:cs typeface="Calibri" pitchFamily="34" charset="-120"/>
-              </a:rPr>
-              <a:t>One database, fewer moving parts, easier to run — and pgvector is there when we turn on embedding search.</a:t>
-            </a:r>
-            <a:endParaRPr lang="en-US" sz="1000" dirty="0"/>
-          </a:p>
-        </p:txBody>
-      </p:sp>
-      <p:sp>
-        <p:nvSpPr>
-          <p:cNvPr id="31" name="Shape 29"/>
-          <p:cNvSpPr/>
-          <p:nvPr/>
-        </p:nvSpPr>
-        <p:spPr>
-          <a:xfrm>
-            <a:off x="457200" y="4453128"/>
-            <a:ext cx="11274552" cy="548640"/>
-          </a:xfrm>
-          <a:prstGeom prst="rect">
-            <a:avLst/>
+              <a:rPr lang="en-US" sz="1150" dirty="0">
+                <a:solidFill>
+                  <a:srgbClr val="6B7A8D"/>
+                </a:solidFill>
+                <a:latin typeface="Calibri" pitchFamily="34" charset="0"/>
+                <a:ea typeface="Calibri" pitchFamily="34" charset="-122"/>
+                <a:cs typeface="Calibri" pitchFamily="34" charset="-120"/>
+              </a:rPr>
+              <a:t>When a coder changes a code, the rationale is captured — feeding both the audit trail and the learning loop.</a:t>
+            </a:r>
+            <a:endParaRPr lang="en-US" sz="1150" dirty="0"/>
+          </a:p>
+        </p:txBody>
+      </p:sp>
+      <p:sp>
+        <p:nvSpPr>
+          <p:cNvPr id="27" name="Shape 25"/>
+          <p:cNvSpPr/>
+          <p:nvPr/>
+        </p:nvSpPr>
+        <p:spPr>
+          <a:xfrm>
+            <a:off x="6190488" y="4489704"/>
+            <a:ext cx="5541264" cy="1371600"/>
+          </a:xfrm>
+          <a:prstGeom prst="roundRect">
+            <a:avLst>
+              <a:gd name="adj" fmla="val 4667"/>
+            </a:avLst>
           </a:prstGeom>
           <a:solidFill>
             <a:srgbClr val="FFFFFF"/>
           </a:solidFill>
-          <a:ln w="9525">
+          <a:ln w="12700">
             <a:solidFill>
               <a:srgbClr val="D8E1EC"/>
             </a:solidFill>
             <a:prstDash val="solid"/>
           </a:ln>
-        </p:spPr>
-      </p:sp>
-      <p:sp>
-        <p:nvSpPr>
-          <p:cNvPr id="32" name="Text 30"/>
-          <p:cNvSpPr/>
-          <p:nvPr/>
-        </p:nvSpPr>
-        <p:spPr>
-          <a:xfrm>
-            <a:off x="594360" y="4453128"/>
-            <a:ext cx="2194560" cy="548640"/>
-          </a:xfrm>
-          <a:prstGeom prst="rect">
-            <a:avLst/>
-          </a:prstGeom>
-          <a:noFill/>
-          <a:ln/>
-        </p:spPr>
-        <p:txBody>
-          <a:bodyPr wrap="square" lIns="0" tIns="0" rIns="0" bIns="0" rtlCol="0" anchor="ctr"/>
-          <a:lstStyle/>
-          <a:p>
-            <a:pPr indent="0" marL="0">
-              <a:buNone/>
-            </a:pPr>
-            <a:r>
-              <a:rPr lang="en-US" sz="1100" b="1" dirty="0">
+          <a:effectLst>
+            <a:outerShdw sx="100000" sy="100000" kx="0" ky="0" algn="bl" rotWithShape="0" blurRad="88900" dist="38100" dir="8100000">
+              <a:srgbClr val="1B2A4A">
+                <a:alpha val="12000"/>
+              </a:srgbClr>
+            </a:outerShdw>
+          </a:effectLst>
+        </p:spPr>
+      </p:sp>
+      <p:sp>
+        <p:nvSpPr>
+          <p:cNvPr id="28" name="Shape 26"/>
+          <p:cNvSpPr/>
+          <p:nvPr/>
+        </p:nvSpPr>
+        <p:spPr>
+          <a:xfrm>
+            <a:off x="6190488" y="4489704"/>
+            <a:ext cx="118872" cy="1371600"/>
+          </a:xfrm>
+          <a:prstGeom prst="rect">
+            <a:avLst/>
+          </a:prstGeom>
+          <a:solidFill>
+            <a:srgbClr val="13B5A6"/>
+          </a:solidFill>
+          <a:ln/>
+        </p:spPr>
+      </p:sp>
+      <p:sp>
+        <p:nvSpPr>
+          <p:cNvPr id="29" name="Text 27"/>
+          <p:cNvSpPr/>
+          <p:nvPr/>
+        </p:nvSpPr>
+        <p:spPr>
+          <a:xfrm>
+            <a:off x="6510528" y="4672584"/>
+            <a:ext cx="4992624" cy="365760"/>
+          </a:xfrm>
+          <a:prstGeom prst="rect">
+            <a:avLst/>
+          </a:prstGeom>
+          <a:noFill/>
+          <a:ln/>
+        </p:spPr>
+        <p:txBody>
+          <a:bodyPr wrap="square" lIns="0" tIns="0" rIns="0" bIns="0" rtlCol="0" anchor="ctr"/>
+          <a:lstStyle/>
+          <a:p>
+            <a:pPr indent="0" marL="0">
+              <a:buNone/>
+            </a:pPr>
+            <a:r>
+              <a:rPr lang="en-US" sz="1400" b="1" dirty="0">
                 <a:solidFill>
                   <a:srgbClr val="1B2A4A"/>
                 </a:solidFill>
@@ -6776,395 +6890,57 @@
                 <a:ea typeface="Calibri" pitchFamily="34" charset="-122"/>
                 <a:cs typeface="Calibri" pitchFamily="34" charset="-120"/>
               </a:rPr>
-              <a:t>How much to automate</a:t>
-            </a:r>
-            <a:endParaRPr lang="en-US" sz="1100" dirty="0"/>
-          </a:p>
-        </p:txBody>
-      </p:sp>
-      <p:sp>
-        <p:nvSpPr>
-          <p:cNvPr id="33" name="Text 31"/>
-          <p:cNvSpPr/>
-          <p:nvPr/>
-        </p:nvSpPr>
-        <p:spPr>
-          <a:xfrm>
-            <a:off x="2971800" y="4453128"/>
-            <a:ext cx="3794760" cy="548640"/>
-          </a:xfrm>
-          <a:prstGeom prst="rect">
-            <a:avLst/>
-          </a:prstGeom>
-          <a:noFill/>
-          <a:ln/>
-        </p:spPr>
-        <p:txBody>
-          <a:bodyPr wrap="square" lIns="0" tIns="0" rIns="0" bIns="0" rtlCol="0" anchor="ctr"/>
+              <a:t>Roles control who can do what</a:t>
+            </a:r>
+            <a:endParaRPr lang="en-US" sz="1400" dirty="0"/>
+          </a:p>
+        </p:txBody>
+      </p:sp>
+      <p:sp>
+        <p:nvSpPr>
+          <p:cNvPr id="30" name="Text 28"/>
+          <p:cNvSpPr/>
+          <p:nvPr/>
+        </p:nvSpPr>
+        <p:spPr>
+          <a:xfrm>
+            <a:off x="6510528" y="5056632"/>
+            <a:ext cx="4992624" cy="731520"/>
+          </a:xfrm>
+          <a:prstGeom prst="rect">
+            <a:avLst/>
+          </a:prstGeom>
+          <a:noFill/>
+          <a:ln/>
+        </p:spPr>
+        <p:txBody>
+          <a:bodyPr wrap="square" lIns="0" tIns="0" rIns="0" bIns="0" rtlCol="0" anchor="t"/>
           <a:lstStyle/>
           <a:p>
             <a:pPr indent="0" marL="0">
               <a:lnSpc>
-                <a:spcPct val="92000"/>
+                <a:spcPct val="100000"/>
               </a:lnSpc>
               <a:buNone/>
             </a:pPr>
             <a:r>
-              <a:rPr lang="en-US" sz="1000" dirty="0">
-                <a:solidFill>
-                  <a:srgbClr val="475569"/>
-                </a:solidFill>
-                <a:latin typeface="Calibri" pitchFamily="34" charset="0"/>
-                <a:ea typeface="Calibri" pitchFamily="34" charset="-122"/>
-                <a:cs typeface="Calibri" pitchFamily="34" charset="-120"/>
-              </a:rPr>
-              <a:t>full auto  ·  human-in-the-loop  ·  bounded autonomy</a:t>
-            </a:r>
-            <a:endParaRPr lang="en-US" sz="1000" dirty="0"/>
-          </a:p>
-        </p:txBody>
-      </p:sp>
-      <p:sp>
-        <p:nvSpPr>
-          <p:cNvPr id="34" name="Text 32"/>
-          <p:cNvSpPr/>
-          <p:nvPr/>
-        </p:nvSpPr>
-        <p:spPr>
-          <a:xfrm>
-            <a:off x="6995160" y="4453128"/>
-            <a:ext cx="4645152" cy="548640"/>
-          </a:xfrm>
-          <a:prstGeom prst="rect">
-            <a:avLst/>
-          </a:prstGeom>
-          <a:noFill/>
-          <a:ln/>
-        </p:spPr>
-        <p:txBody>
-          <a:bodyPr wrap="square" lIns="0" tIns="0" rIns="0" bIns="0" rtlCol="0" anchor="ctr"/>
-          <a:lstStyle/>
-          <a:p>
-            <a:pPr indent="0" marL="0">
-              <a:lnSpc>
-                <a:spcPct val="92000"/>
-              </a:lnSpc>
-              <a:buNone/>
-            </a:pPr>
-            <a:r>
-              <a:rPr lang="en-US" sz="1000" dirty="0">
-                <a:solidFill>
-                  <a:srgbClr val="27313F"/>
-                </a:solidFill>
-                <a:latin typeface="Calibri" pitchFamily="34" charset="0"/>
-                <a:ea typeface="Calibri" pitchFamily="34" charset="-122"/>
-                <a:cs typeface="Calibri" pitchFamily="34" charset="-120"/>
-              </a:rPr>
-              <a:t>Automate the easy calls, but keep hard limits that always route the risky ones to a person.</a:t>
-            </a:r>
-            <a:endParaRPr lang="en-US" sz="1000" dirty="0"/>
-          </a:p>
-        </p:txBody>
-      </p:sp>
-      <p:sp>
-        <p:nvSpPr>
-          <p:cNvPr id="35" name="Shape 33"/>
-          <p:cNvSpPr/>
-          <p:nvPr/>
-        </p:nvSpPr>
-        <p:spPr>
-          <a:xfrm>
-            <a:off x="457200" y="5001768"/>
-            <a:ext cx="11274552" cy="548640"/>
-          </a:xfrm>
-          <a:prstGeom prst="rect">
-            <a:avLst/>
-          </a:prstGeom>
-          <a:solidFill>
-            <a:srgbClr val="EFF4FA"/>
-          </a:solidFill>
-          <a:ln w="9525">
-            <a:solidFill>
-              <a:srgbClr val="D8E1EC"/>
-            </a:solidFill>
-            <a:prstDash val="solid"/>
-          </a:ln>
-        </p:spPr>
-      </p:sp>
-      <p:sp>
-        <p:nvSpPr>
-          <p:cNvPr id="36" name="Text 34"/>
-          <p:cNvSpPr/>
-          <p:nvPr/>
-        </p:nvSpPr>
-        <p:spPr>
-          <a:xfrm>
-            <a:off x="594360" y="5001768"/>
-            <a:ext cx="2194560" cy="548640"/>
-          </a:xfrm>
-          <a:prstGeom prst="rect">
-            <a:avLst/>
-          </a:prstGeom>
-          <a:noFill/>
-          <a:ln/>
-        </p:spPr>
-        <p:txBody>
-          <a:bodyPr wrap="square" lIns="0" tIns="0" rIns="0" bIns="0" rtlCol="0" anchor="ctr"/>
-          <a:lstStyle/>
-          <a:p>
-            <a:pPr indent="0" marL="0">
-              <a:buNone/>
-            </a:pPr>
-            <a:r>
-              <a:rPr lang="en-US" sz="1100" b="1" dirty="0">
-                <a:solidFill>
-                  <a:srgbClr val="1B2A4A"/>
-                </a:solidFill>
-                <a:latin typeface="Calibri" pitchFamily="34" charset="0"/>
-                <a:ea typeface="Calibri" pitchFamily="34" charset="-122"/>
-                <a:cs typeface="Calibri" pitchFamily="34" charset="-120"/>
-              </a:rPr>
-              <a:t>Keeping it configurable</a:t>
-            </a:r>
-            <a:endParaRPr lang="en-US" sz="1100" dirty="0"/>
-          </a:p>
-        </p:txBody>
-      </p:sp>
-      <p:sp>
-        <p:nvSpPr>
-          <p:cNvPr id="37" name="Text 35"/>
-          <p:cNvSpPr/>
-          <p:nvPr/>
-        </p:nvSpPr>
-        <p:spPr>
-          <a:xfrm>
-            <a:off x="2971800" y="5001768"/>
-            <a:ext cx="3794760" cy="548640"/>
-          </a:xfrm>
-          <a:prstGeom prst="rect">
-            <a:avLst/>
-          </a:prstGeom>
-          <a:noFill/>
-          <a:ln/>
-        </p:spPr>
-        <p:txBody>
-          <a:bodyPr wrap="square" lIns="0" tIns="0" rIns="0" bIns="0" rtlCol="0" anchor="ctr"/>
-          <a:lstStyle/>
-          <a:p>
-            <a:pPr indent="0" marL="0">
-              <a:lnSpc>
-                <a:spcPct val="92000"/>
-              </a:lnSpc>
-              <a:buNone/>
-            </a:pPr>
-            <a:r>
-              <a:rPr lang="en-US" sz="1000" dirty="0">
-                <a:solidFill>
-                  <a:srgbClr val="475569"/>
-                </a:solidFill>
-                <a:latin typeface="Calibri" pitchFamily="34" charset="0"/>
-                <a:ea typeface="Calibri" pitchFamily="34" charset="-122"/>
-                <a:cs typeface="Calibri" pitchFamily="34" charset="-120"/>
-              </a:rPr>
-              <a:t>settings baked into code  ·  settings in the database</a:t>
-            </a:r>
-            <a:endParaRPr lang="en-US" sz="1000" dirty="0"/>
-          </a:p>
-        </p:txBody>
-      </p:sp>
-      <p:sp>
-        <p:nvSpPr>
-          <p:cNvPr id="38" name="Text 36"/>
-          <p:cNvSpPr/>
-          <p:nvPr/>
-        </p:nvSpPr>
-        <p:spPr>
-          <a:xfrm>
-            <a:off x="6995160" y="5001768"/>
-            <a:ext cx="4645152" cy="548640"/>
-          </a:xfrm>
-          <a:prstGeom prst="rect">
-            <a:avLst/>
-          </a:prstGeom>
-          <a:noFill/>
-          <a:ln/>
-        </p:spPr>
-        <p:txBody>
-          <a:bodyPr wrap="square" lIns="0" tIns="0" rIns="0" bIns="0" rtlCol="0" anchor="ctr"/>
-          <a:lstStyle/>
-          <a:p>
-            <a:pPr indent="0" marL="0">
-              <a:lnSpc>
-                <a:spcPct val="92000"/>
-              </a:lnSpc>
-              <a:buNone/>
-            </a:pPr>
-            <a:r>
-              <a:rPr lang="en-US" sz="1000" dirty="0">
-                <a:solidFill>
-                  <a:srgbClr val="27313F"/>
-                </a:solidFill>
-                <a:latin typeface="Calibri" pitchFamily="34" charset="0"/>
-                <a:ea typeface="Calibri" pitchFamily="34" charset="-122"/>
-                <a:cs typeface="Calibri" pitchFamily="34" charset="-120"/>
-              </a:rPr>
-              <a:t>Thresholds, rules, SLAs, the knowledge graph and roles all change at runtime — no redeploy, no waiting on us.</a:t>
-            </a:r>
-            <a:endParaRPr lang="en-US" sz="1000" dirty="0"/>
-          </a:p>
-        </p:txBody>
-      </p:sp>
-      <p:sp>
-        <p:nvSpPr>
-          <p:cNvPr id="39" name="Shape 37"/>
-          <p:cNvSpPr/>
-          <p:nvPr/>
-        </p:nvSpPr>
-        <p:spPr>
-          <a:xfrm>
-            <a:off x="457200" y="5550408"/>
-            <a:ext cx="11274552" cy="548640"/>
-          </a:xfrm>
-          <a:prstGeom prst="rect">
-            <a:avLst/>
-          </a:prstGeom>
-          <a:solidFill>
-            <a:srgbClr val="FFFFFF"/>
-          </a:solidFill>
-          <a:ln w="9525">
-            <a:solidFill>
-              <a:srgbClr val="D8E1EC"/>
-            </a:solidFill>
-            <a:prstDash val="solid"/>
-          </a:ln>
-        </p:spPr>
-      </p:sp>
-      <p:sp>
-        <p:nvSpPr>
-          <p:cNvPr id="40" name="Text 38"/>
-          <p:cNvSpPr/>
-          <p:nvPr/>
-        </p:nvSpPr>
-        <p:spPr>
-          <a:xfrm>
-            <a:off x="594360" y="5550408"/>
-            <a:ext cx="2194560" cy="548640"/>
-          </a:xfrm>
-          <a:prstGeom prst="rect">
-            <a:avLst/>
-          </a:prstGeom>
-          <a:noFill/>
-          <a:ln/>
-        </p:spPr>
-        <p:txBody>
-          <a:bodyPr wrap="square" lIns="0" tIns="0" rIns="0" bIns="0" rtlCol="0" anchor="ctr"/>
-          <a:lstStyle/>
-          <a:p>
-            <a:pPr indent="0" marL="0">
-              <a:buNone/>
-            </a:pPr>
-            <a:r>
-              <a:rPr lang="en-US" sz="1100" b="1" dirty="0">
-                <a:solidFill>
-                  <a:srgbClr val="1B2A4A"/>
-                </a:solidFill>
-                <a:latin typeface="Calibri" pitchFamily="34" charset="0"/>
-                <a:ea typeface="Calibri" pitchFamily="34" charset="-122"/>
-                <a:cs typeface="Calibri" pitchFamily="34" charset="-120"/>
-              </a:rPr>
-              <a:t>Spending on the hard charts</a:t>
-            </a:r>
-            <a:endParaRPr lang="en-US" sz="1100" dirty="0"/>
-          </a:p>
-        </p:txBody>
-      </p:sp>
-      <p:sp>
-        <p:nvSpPr>
-          <p:cNvPr id="41" name="Text 39"/>
-          <p:cNvSpPr/>
-          <p:nvPr/>
-        </p:nvSpPr>
-        <p:spPr>
-          <a:xfrm>
-            <a:off x="2971800" y="5550408"/>
-            <a:ext cx="3794760" cy="548640"/>
-          </a:xfrm>
-          <a:prstGeom prst="rect">
-            <a:avLst/>
-          </a:prstGeom>
-          <a:noFill/>
-          <a:ln/>
-        </p:spPr>
-        <p:txBody>
-          <a:bodyPr wrap="square" lIns="0" tIns="0" rIns="0" bIns="0" rtlCol="0" anchor="ctr"/>
-          <a:lstStyle/>
-          <a:p>
-            <a:pPr indent="0" marL="0">
-              <a:lnSpc>
-                <a:spcPct val="92000"/>
-              </a:lnSpc>
-              <a:buNone/>
-            </a:pPr>
-            <a:r>
-              <a:rPr lang="en-US" sz="1000" dirty="0">
-                <a:solidFill>
-                  <a:srgbClr val="475569"/>
-                </a:solidFill>
-                <a:latin typeface="Calibri" pitchFamily="34" charset="0"/>
-                <a:ea typeface="Calibri" pitchFamily="34" charset="-122"/>
-                <a:cs typeface="Calibri" pitchFamily="34" charset="-120"/>
-              </a:rPr>
-              <a:t>double-check everything  ·  never  ·  only when it's hard</a:t>
-            </a:r>
-            <a:endParaRPr lang="en-US" sz="1000" dirty="0"/>
-          </a:p>
-        </p:txBody>
-      </p:sp>
-      <p:sp>
-        <p:nvSpPr>
-          <p:cNvPr id="42" name="Text 40"/>
-          <p:cNvSpPr/>
-          <p:nvPr/>
-        </p:nvSpPr>
-        <p:spPr>
-          <a:xfrm>
-            <a:off x="6995160" y="5550408"/>
-            <a:ext cx="4645152" cy="548640"/>
-          </a:xfrm>
-          <a:prstGeom prst="rect">
-            <a:avLst/>
-          </a:prstGeom>
-          <a:noFill/>
-          <a:ln/>
-        </p:spPr>
-        <p:txBody>
-          <a:bodyPr wrap="square" lIns="0" tIns="0" rIns="0" bIns="0" rtlCol="0" anchor="ctr"/>
-          <a:lstStyle/>
-          <a:p>
-            <a:pPr indent="0" marL="0">
-              <a:lnSpc>
-                <a:spcPct val="92000"/>
-              </a:lnSpc>
-              <a:buNone/>
-            </a:pPr>
-            <a:r>
-              <a:rPr lang="en-US" sz="1000" dirty="0">
-                <a:solidFill>
-                  <a:srgbClr val="27313F"/>
-                </a:solidFill>
-                <a:latin typeface="Calibri" pitchFamily="34" charset="0"/>
-                <a:ea typeface="Calibri" pitchFamily="34" charset="-122"/>
-                <a:cs typeface="Calibri" pitchFamily="34" charset="-120"/>
-              </a:rPr>
-              <a:t>Spend the extra effort only where it pays off — the ambiguous and multi-procedure charts.</a:t>
-            </a:r>
-            <a:endParaRPr lang="en-US" sz="1000" dirty="0"/>
-          </a:p>
-        </p:txBody>
-      </p:sp>
-      <p:sp>
-        <p:nvSpPr>
-          <p:cNvPr id="43" name="Shape 41"/>
+              <a:rPr lang="en-US" sz="1150" dirty="0">
+                <a:solidFill>
+                  <a:srgbClr val="6B7A8D"/>
+                </a:solidFill>
+                <a:latin typeface="Calibri" pitchFamily="34" charset="0"/>
+                <a:ea typeface="Calibri" pitchFamily="34" charset="-122"/>
+                <a:cs typeface="Calibri" pitchFamily="34" charset="-120"/>
+              </a:rPr>
+              <a:t>Admin, coder, QA, CDI, supervisor — both the menus and the buttons; maps to your SSO in production.</a:t>
+            </a:r>
+            <a:endParaRPr lang="en-US" sz="1150" dirty="0"/>
+          </a:p>
+        </p:txBody>
+      </p:sp>
+      <p:sp>
+        <p:nvSpPr>
+          <p:cNvPr id="31" name="Shape 29"/>
           <p:cNvSpPr/>
           <p:nvPr/>
         </p:nvSpPr>
@@ -7184,7 +6960,7 @@
       </p:sp>
       <p:sp>
         <p:nvSpPr>
-          <p:cNvPr id="44" name="Text 42"/>
+          <p:cNvPr id="32" name="Text 30"/>
           <p:cNvSpPr/>
           <p:nvPr/>
         </p:nvSpPr>
@@ -7223,7 +6999,7 @@
       </p:sp>
       <p:sp>
         <p:nvSpPr>
-          <p:cNvPr id="45" name="Text 43"/>
+          <p:cNvPr id="33" name="Text 31"/>
           <p:cNvSpPr/>
           <p:nvPr/>
         </p:nvSpPr>
@@ -7262,7 +7038,7 @@
       </p:sp>
       <p:sp>
         <p:nvSpPr>
-          <p:cNvPr id="46" name="Text 44"/>
+          <p:cNvPr id="34" name="Text 32"/>
           <p:cNvSpPr/>
           <p:nvPr/>
         </p:nvSpPr>
@@ -7424,7 +7200,7 @@
                 <a:ea typeface="Calibri" pitchFamily="34" charset="-122"/>
                 <a:cs typeface="Calibri" pitchFamily="34" charset="-120"/>
               </a:rPr>
-              <a:t>SECURITY, DEPLOYMENT &amp; DATA</a:t>
+              <a:t>DESIGN RATIONALE</a:t>
             </a:r>
             <a:endParaRPr lang="en-US" sz="1100" dirty="0"/>
           </a:p>
@@ -7463,7 +7239,7 @@
                 <a:ea typeface="Georgia" pitchFamily="34" charset="-122"/>
                 <a:cs typeface="Georgia" pitchFamily="34" charset="-120"/>
               </a:rPr>
-              <a:t>Where it runs, what it protects, and the licensing reality</a:t>
+              <a:t>The big choices — what we weighed, and why we landed where we did</a:t>
             </a:r>
             <a:endParaRPr lang="en-US" sz="2300" dirty="0"/>
           </a:p>
@@ -7477,372 +7253,430 @@
         </p:nvSpPr>
         <p:spPr>
           <a:xfrm>
-            <a:off x="457200" y="1463040"/>
-            <a:ext cx="3630168" cy="4023360"/>
-          </a:xfrm>
-          <a:prstGeom prst="roundRect">
-            <a:avLst>
-              <a:gd name="adj" fmla="val 1763"/>
-            </a:avLst>
-          </a:prstGeom>
-          <a:solidFill>
-            <a:srgbClr val="FFFFFF"/>
-          </a:solidFill>
-          <a:ln w="12700">
+            <a:off x="457200" y="1325880"/>
+            <a:ext cx="11274552" cy="384048"/>
+          </a:xfrm>
+          <a:prstGeom prst="rect">
+            <a:avLst/>
+          </a:prstGeom>
+          <a:solidFill>
+            <a:srgbClr val="1B2A4A"/>
+          </a:solidFill>
+          <a:ln/>
+        </p:spPr>
+      </p:sp>
+      <p:sp>
+        <p:nvSpPr>
+          <p:cNvPr id="8" name="Text 6"/>
+          <p:cNvSpPr/>
+          <p:nvPr/>
+        </p:nvSpPr>
+        <p:spPr>
+          <a:xfrm>
+            <a:off x="594360" y="1325880"/>
+            <a:ext cx="2194560" cy="384048"/>
+          </a:xfrm>
+          <a:prstGeom prst="rect">
+            <a:avLst/>
+          </a:prstGeom>
+          <a:noFill/>
+          <a:ln/>
+        </p:spPr>
+        <p:txBody>
+          <a:bodyPr wrap="square" lIns="0" tIns="0" rIns="0" bIns="0" rtlCol="0" anchor="ctr"/>
+          <a:lstStyle/>
+          <a:p>
+            <a:pPr indent="0" marL="0">
+              <a:buNone/>
+            </a:pPr>
+            <a:r>
+              <a:rPr lang="en-US" sz="1150" b="1" dirty="0">
+                <a:solidFill>
+                  <a:srgbClr val="FFFFFF"/>
+                </a:solidFill>
+                <a:latin typeface="Calibri" pitchFamily="34" charset="0"/>
+                <a:ea typeface="Calibri" pitchFamily="34" charset="-122"/>
+                <a:cs typeface="Calibri" pitchFamily="34" charset="-120"/>
+              </a:rPr>
+              <a:t>The decision</a:t>
+            </a:r>
+            <a:endParaRPr lang="en-US" sz="1150" dirty="0"/>
+          </a:p>
+        </p:txBody>
+      </p:sp>
+      <p:sp>
+        <p:nvSpPr>
+          <p:cNvPr id="9" name="Text 7"/>
+          <p:cNvSpPr/>
+          <p:nvPr/>
+        </p:nvSpPr>
+        <p:spPr>
+          <a:xfrm>
+            <a:off x="2971800" y="1325880"/>
+            <a:ext cx="3840480" cy="384048"/>
+          </a:xfrm>
+          <a:prstGeom prst="rect">
+            <a:avLst/>
+          </a:prstGeom>
+          <a:noFill/>
+          <a:ln/>
+        </p:spPr>
+        <p:txBody>
+          <a:bodyPr wrap="square" lIns="0" tIns="0" rIns="0" bIns="0" rtlCol="0" anchor="ctr"/>
+          <a:lstStyle/>
+          <a:p>
+            <a:pPr indent="0" marL="0">
+              <a:buNone/>
+            </a:pPr>
+            <a:r>
+              <a:rPr lang="en-US" sz="1150" b="1" dirty="0">
+                <a:solidFill>
+                  <a:srgbClr val="FFFFFF"/>
+                </a:solidFill>
+                <a:latin typeface="Calibri" pitchFamily="34" charset="0"/>
+                <a:ea typeface="Calibri" pitchFamily="34" charset="-122"/>
+                <a:cs typeface="Calibri" pitchFamily="34" charset="-120"/>
+              </a:rPr>
+              <a:t>What we considered</a:t>
+            </a:r>
+            <a:endParaRPr lang="en-US" sz="1150" dirty="0"/>
+          </a:p>
+        </p:txBody>
+      </p:sp>
+      <p:sp>
+        <p:nvSpPr>
+          <p:cNvPr id="10" name="Text 8"/>
+          <p:cNvSpPr/>
+          <p:nvPr/>
+        </p:nvSpPr>
+        <p:spPr>
+          <a:xfrm>
+            <a:off x="6995160" y="1325880"/>
+            <a:ext cx="4690872" cy="384048"/>
+          </a:xfrm>
+          <a:prstGeom prst="rect">
+            <a:avLst/>
+          </a:prstGeom>
+          <a:noFill/>
+          <a:ln/>
+        </p:spPr>
+        <p:txBody>
+          <a:bodyPr wrap="square" lIns="0" tIns="0" rIns="0" bIns="0" rtlCol="0" anchor="ctr"/>
+          <a:lstStyle/>
+          <a:p>
+            <a:pPr indent="0" marL="0">
+              <a:buNone/>
+            </a:pPr>
+            <a:r>
+              <a:rPr lang="en-US" sz="1150" b="1" dirty="0">
+                <a:solidFill>
+                  <a:srgbClr val="FFFFFF"/>
+                </a:solidFill>
+                <a:latin typeface="Calibri" pitchFamily="34" charset="0"/>
+                <a:ea typeface="Calibri" pitchFamily="34" charset="-122"/>
+                <a:cs typeface="Calibri" pitchFamily="34" charset="-120"/>
+              </a:rPr>
+              <a:t>Where we landed — and why</a:t>
+            </a:r>
+            <a:endParaRPr lang="en-US" sz="1150" dirty="0"/>
+          </a:p>
+        </p:txBody>
+      </p:sp>
+      <p:sp>
+        <p:nvSpPr>
+          <p:cNvPr id="11" name="Shape 9"/>
+          <p:cNvSpPr/>
+          <p:nvPr/>
+        </p:nvSpPr>
+        <p:spPr>
+          <a:xfrm>
+            <a:off x="457200" y="1709928"/>
+            <a:ext cx="11274552" cy="548640"/>
+          </a:xfrm>
+          <a:prstGeom prst="rect">
+            <a:avLst/>
+          </a:prstGeom>
+          <a:solidFill>
+            <a:srgbClr val="EFF4FA"/>
+          </a:solidFill>
+          <a:ln w="9525">
             <a:solidFill>
               <a:srgbClr val="D8E1EC"/>
             </a:solidFill>
             <a:prstDash val="solid"/>
           </a:ln>
-          <a:effectLst>
-            <a:outerShdw sx="100000" sy="100000" kx="0" ky="0" algn="bl" rotWithShape="0" blurRad="88900" dist="38100" dir="8100000">
-              <a:srgbClr val="1B2A4A">
-                <a:alpha val="12000"/>
-              </a:srgbClr>
-            </a:outerShdw>
-          </a:effectLst>
-        </p:spPr>
-      </p:sp>
-      <p:sp>
-        <p:nvSpPr>
-          <p:cNvPr id="8" name="Shape 6"/>
-          <p:cNvSpPr/>
-          <p:nvPr/>
-        </p:nvSpPr>
-        <p:spPr>
-          <a:xfrm>
-            <a:off x="457200" y="1463040"/>
-            <a:ext cx="3630168" cy="566928"/>
-          </a:xfrm>
-          <a:prstGeom prst="rect">
-            <a:avLst/>
-          </a:prstGeom>
-          <a:solidFill>
-            <a:srgbClr val="1B2A4A"/>
-          </a:solidFill>
-          <a:ln/>
-        </p:spPr>
-      </p:sp>
-      <p:sp>
-        <p:nvSpPr>
-          <p:cNvPr id="9" name="Text 7"/>
-          <p:cNvSpPr/>
-          <p:nvPr/>
-        </p:nvSpPr>
-        <p:spPr>
-          <a:xfrm>
-            <a:off x="640080" y="1463040"/>
-            <a:ext cx="3264408" cy="566928"/>
-          </a:xfrm>
-          <a:prstGeom prst="rect">
-            <a:avLst/>
-          </a:prstGeom>
-          <a:noFill/>
-          <a:ln/>
-        </p:spPr>
-        <p:txBody>
-          <a:bodyPr wrap="square" lIns="0" tIns="0" rIns="0" bIns="0" rtlCol="0" anchor="ctr"/>
-          <a:lstStyle/>
-          <a:p>
-            <a:pPr indent="0" marL="0">
-              <a:buNone/>
-            </a:pPr>
-            <a:r>
-              <a:rPr lang="en-US" sz="1350" b="1" dirty="0">
-                <a:solidFill>
-                  <a:srgbClr val="FFFFFF"/>
-                </a:solidFill>
-                <a:latin typeface="Calibri" pitchFamily="34" charset="0"/>
-                <a:ea typeface="Calibri" pitchFamily="34" charset="-122"/>
-                <a:cs typeface="Calibri" pitchFamily="34" charset="-120"/>
-              </a:rPr>
-              <a:t>Where it runs</a:t>
-            </a:r>
-            <a:endParaRPr lang="en-US" sz="1350" dirty="0"/>
-          </a:p>
-        </p:txBody>
-      </p:sp>
-      <p:sp>
-        <p:nvSpPr>
-          <p:cNvPr id="10" name="Shape 8"/>
-          <p:cNvSpPr/>
-          <p:nvPr/>
-        </p:nvSpPr>
-        <p:spPr>
-          <a:xfrm>
-            <a:off x="685800" y="2304288"/>
-            <a:ext cx="118872" cy="118872"/>
-          </a:xfrm>
-          <a:prstGeom prst="ellipse">
-            <a:avLst/>
-          </a:prstGeom>
-          <a:solidFill>
-            <a:srgbClr val="1B2A4A"/>
-          </a:solidFill>
-          <a:ln/>
-        </p:spPr>
-      </p:sp>
-      <p:sp>
-        <p:nvSpPr>
-          <p:cNvPr id="11" name="Text 9"/>
-          <p:cNvSpPr/>
-          <p:nvPr/>
-        </p:nvSpPr>
-        <p:spPr>
-          <a:xfrm>
-            <a:off x="914400" y="2240280"/>
-            <a:ext cx="2971800" cy="713232"/>
-          </a:xfrm>
-          <a:prstGeom prst="rect">
-            <a:avLst/>
-          </a:prstGeom>
-          <a:noFill/>
-          <a:ln/>
-        </p:spPr>
-        <p:txBody>
-          <a:bodyPr wrap="square" lIns="0" tIns="0" rIns="0" bIns="0" rtlCol="0" anchor="t"/>
+        </p:spPr>
+      </p:sp>
+      <p:sp>
+        <p:nvSpPr>
+          <p:cNvPr id="12" name="Text 10"/>
+          <p:cNvSpPr/>
+          <p:nvPr/>
+        </p:nvSpPr>
+        <p:spPr>
+          <a:xfrm>
+            <a:off x="594360" y="1709928"/>
+            <a:ext cx="2194560" cy="548640"/>
+          </a:xfrm>
+          <a:prstGeom prst="rect">
+            <a:avLst/>
+          </a:prstGeom>
+          <a:noFill/>
+          <a:ln/>
+        </p:spPr>
+        <p:txBody>
+          <a:bodyPr wrap="square" lIns="0" tIns="0" rIns="0" bIns="0" rtlCol="0" anchor="ctr"/>
+          <a:lstStyle/>
+          <a:p>
+            <a:pPr indent="0" marL="0">
+              <a:buNone/>
+            </a:pPr>
+            <a:r>
+              <a:rPr lang="en-US" sz="1100" b="1" dirty="0">
+                <a:solidFill>
+                  <a:srgbClr val="1B2A4A"/>
+                </a:solidFill>
+                <a:latin typeface="Calibri" pitchFamily="34" charset="0"/>
+                <a:ea typeface="Calibri" pitchFamily="34" charset="-122"/>
+                <a:cs typeface="Calibri" pitchFamily="34" charset="-120"/>
+              </a:rPr>
+              <a:t>The reasoning engine</a:t>
+            </a:r>
+            <a:endParaRPr lang="en-US" sz="1100" dirty="0"/>
+          </a:p>
+        </p:txBody>
+      </p:sp>
+      <p:sp>
+        <p:nvSpPr>
+          <p:cNvPr id="13" name="Text 11"/>
+          <p:cNvSpPr/>
+          <p:nvPr/>
+        </p:nvSpPr>
+        <p:spPr>
+          <a:xfrm>
+            <a:off x="2971800" y="1709928"/>
+            <a:ext cx="3794760" cy="548640"/>
+          </a:xfrm>
+          <a:prstGeom prst="rect">
+            <a:avLst/>
+          </a:prstGeom>
+          <a:noFill/>
+          <a:ln/>
+        </p:spPr>
+        <p:txBody>
+          <a:bodyPr wrap="square" lIns="0" tIns="0" rIns="0" bIns="0" rtlCol="0" anchor="ctr"/>
           <a:lstStyle/>
           <a:p>
             <a:pPr indent="0" marL="0">
               <a:lnSpc>
-                <a:spcPct val="98000"/>
+                <a:spcPct val="92000"/>
               </a:lnSpc>
               <a:buNone/>
             </a:pPr>
             <a:r>
-              <a:rPr lang="en-US" sz="1100" dirty="0">
-                <a:solidFill>
-                  <a:srgbClr val="6B7A8D"/>
-                </a:solidFill>
-                <a:latin typeface="Calibri" pitchFamily="34" charset="0"/>
-                <a:ea typeface="Calibri" pitchFamily="34" charset="-122"/>
-                <a:cs typeface="Calibri" pitchFamily="34" charset="-120"/>
-              </a:rPr>
-              <a:t>Azure + Azure AI Foundry, US-region</a:t>
-            </a:r>
-            <a:endParaRPr lang="en-US" sz="1100" dirty="0"/>
-          </a:p>
-        </p:txBody>
-      </p:sp>
-      <p:sp>
-        <p:nvSpPr>
-          <p:cNvPr id="12" name="Shape 10"/>
-          <p:cNvSpPr/>
-          <p:nvPr/>
-        </p:nvSpPr>
-        <p:spPr>
-          <a:xfrm>
-            <a:off x="685800" y="3054096"/>
-            <a:ext cx="118872" cy="118872"/>
-          </a:xfrm>
-          <a:prstGeom prst="ellipse">
-            <a:avLst/>
-          </a:prstGeom>
-          <a:solidFill>
-            <a:srgbClr val="1B2A4A"/>
-          </a:solidFill>
-          <a:ln/>
-        </p:spPr>
-      </p:sp>
-      <p:sp>
-        <p:nvSpPr>
-          <p:cNvPr id="13" name="Text 11"/>
-          <p:cNvSpPr/>
-          <p:nvPr/>
-        </p:nvSpPr>
-        <p:spPr>
-          <a:xfrm>
-            <a:off x="914400" y="2990088"/>
-            <a:ext cx="2971800" cy="713232"/>
-          </a:xfrm>
-          <a:prstGeom prst="rect">
-            <a:avLst/>
-          </a:prstGeom>
-          <a:noFill/>
-          <a:ln/>
-        </p:spPr>
-        <p:txBody>
-          <a:bodyPr wrap="square" lIns="0" tIns="0" rIns="0" bIns="0" rtlCol="0" anchor="t"/>
+              <a:rPr lang="en-US" sz="1000" dirty="0">
+                <a:solidFill>
+                  <a:srgbClr val="475569"/>
+                </a:solidFill>
+                <a:latin typeface="Calibri" pitchFamily="34" charset="0"/>
+                <a:ea typeface="Calibri" pitchFamily="34" charset="-122"/>
+                <a:cs typeface="Calibri" pitchFamily="34" charset="-120"/>
+              </a:rPr>
+              <a:t>in-house NLP / small models  ·  a frontier LLM  ·  a mix</a:t>
+            </a:r>
+            <a:endParaRPr lang="en-US" sz="1000" dirty="0"/>
+          </a:p>
+        </p:txBody>
+      </p:sp>
+      <p:sp>
+        <p:nvSpPr>
+          <p:cNvPr id="14" name="Text 12"/>
+          <p:cNvSpPr/>
+          <p:nvPr/>
+        </p:nvSpPr>
+        <p:spPr>
+          <a:xfrm>
+            <a:off x="6995160" y="1709928"/>
+            <a:ext cx="4645152" cy="548640"/>
+          </a:xfrm>
+          <a:prstGeom prst="rect">
+            <a:avLst/>
+          </a:prstGeom>
+          <a:noFill/>
+          <a:ln/>
+        </p:spPr>
+        <p:txBody>
+          <a:bodyPr wrap="square" lIns="0" tIns="0" rIns="0" bIns="0" rtlCol="0" anchor="ctr"/>
           <a:lstStyle/>
           <a:p>
             <a:pPr indent="0" marL="0">
               <a:lnSpc>
-                <a:spcPct val="98000"/>
+                <a:spcPct val="92000"/>
               </a:lnSpc>
               <a:buNone/>
             </a:pPr>
             <a:r>
-              <a:rPr lang="en-US" sz="1100" dirty="0">
-                <a:solidFill>
-                  <a:srgbClr val="6B7A8D"/>
-                </a:solidFill>
-                <a:latin typeface="Calibri" pitchFamily="34" charset="0"/>
-                <a:ea typeface="Calibri" pitchFamily="34" charset="-122"/>
-                <a:cs typeface="Calibri" pitchFamily="34" charset="-120"/>
-              </a:rPr>
-              <a:t>Multi-tenant, with strict separation between clients</a:t>
-            </a:r>
-            <a:endParaRPr lang="en-US" sz="1100" dirty="0"/>
-          </a:p>
-        </p:txBody>
-      </p:sp>
-      <p:sp>
-        <p:nvSpPr>
-          <p:cNvPr id="14" name="Shape 12"/>
-          <p:cNvSpPr/>
-          <p:nvPr/>
-        </p:nvSpPr>
-        <p:spPr>
-          <a:xfrm>
-            <a:off x="685800" y="3803904"/>
-            <a:ext cx="118872" cy="118872"/>
-          </a:xfrm>
-          <a:prstGeom prst="ellipse">
-            <a:avLst/>
-          </a:prstGeom>
-          <a:solidFill>
-            <a:srgbClr val="1B2A4A"/>
-          </a:solidFill>
-          <a:ln/>
-        </p:spPr>
-      </p:sp>
-      <p:sp>
-        <p:nvSpPr>
-          <p:cNvPr id="15" name="Text 13"/>
-          <p:cNvSpPr/>
-          <p:nvPr/>
-        </p:nvSpPr>
-        <p:spPr>
-          <a:xfrm>
-            <a:off x="914400" y="3739896"/>
-            <a:ext cx="2971800" cy="713232"/>
-          </a:xfrm>
-          <a:prstGeom prst="rect">
-            <a:avLst/>
-          </a:prstGeom>
-          <a:noFill/>
-          <a:ln/>
-        </p:spPr>
-        <p:txBody>
-          <a:bodyPr wrap="square" lIns="0" tIns="0" rIns="0" bIns="0" rtlCol="0" anchor="t"/>
-          <a:lstStyle/>
-          <a:p>
-            <a:pPr indent="0" marL="0">
-              <a:lnSpc>
-                <a:spcPct val="98000"/>
-              </a:lnSpc>
-              <a:buNone/>
-            </a:pPr>
-            <a:r>
-              <a:rPr lang="en-US" sz="1100" dirty="0">
-                <a:solidFill>
-                  <a:srgbClr val="6B7A8D"/>
-                </a:solidFill>
-                <a:latin typeface="Calibri" pitchFamily="34" charset="0"/>
-                <a:ea typeface="Calibri" pitchFamily="34" charset="-122"/>
-                <a:cs typeface="Calibri" pitchFamily="34" charset="-120"/>
-              </a:rPr>
-              <a:t>Docker today → AKS / container apps in the cloud</a:t>
-            </a:r>
-            <a:endParaRPr lang="en-US" sz="1100" dirty="0"/>
-          </a:p>
-        </p:txBody>
-      </p:sp>
-      <p:sp>
-        <p:nvSpPr>
-          <p:cNvPr id="16" name="Shape 14"/>
-          <p:cNvSpPr/>
-          <p:nvPr/>
-        </p:nvSpPr>
-        <p:spPr>
-          <a:xfrm>
-            <a:off x="685800" y="4553712"/>
-            <a:ext cx="118872" cy="118872"/>
-          </a:xfrm>
-          <a:prstGeom prst="ellipse">
-            <a:avLst/>
-          </a:prstGeom>
-          <a:solidFill>
-            <a:srgbClr val="1B2A4A"/>
-          </a:solidFill>
-          <a:ln/>
-        </p:spPr>
-      </p:sp>
-      <p:sp>
-        <p:nvSpPr>
-          <p:cNvPr id="17" name="Text 15"/>
-          <p:cNvSpPr/>
-          <p:nvPr/>
-        </p:nvSpPr>
-        <p:spPr>
-          <a:xfrm>
-            <a:off x="914400" y="4489704"/>
-            <a:ext cx="2971800" cy="713232"/>
-          </a:xfrm>
-          <a:prstGeom prst="rect">
-            <a:avLst/>
-          </a:prstGeom>
-          <a:noFill/>
-          <a:ln/>
-        </p:spPr>
-        <p:txBody>
-          <a:bodyPr wrap="square" lIns="0" tIns="0" rIns="0" bIns="0" rtlCol="0" anchor="t"/>
-          <a:lstStyle/>
-          <a:p>
-            <a:pPr indent="0" marL="0">
-              <a:lnSpc>
-                <a:spcPct val="98000"/>
-              </a:lnSpc>
-              <a:buNone/>
-            </a:pPr>
-            <a:r>
-              <a:rPr lang="en-US" sz="1100" dirty="0">
-                <a:solidFill>
-                  <a:srgbClr val="6B7A8D"/>
-                </a:solidFill>
-                <a:latin typeface="Calibri" pitchFamily="34" charset="0"/>
-                <a:ea typeface="Calibri" pitchFamily="34" charset="-122"/>
-                <a:cs typeface="Calibri" pitchFamily="34" charset="-120"/>
-              </a:rPr>
-              <a:t>A path to smaller in-region models for cost &amp; residency</a:t>
-            </a:r>
-            <a:endParaRPr lang="en-US" sz="1100" dirty="0"/>
-          </a:p>
-        </p:txBody>
-      </p:sp>
-      <p:sp>
-        <p:nvSpPr>
-          <p:cNvPr id="18" name="Shape 16"/>
-          <p:cNvSpPr/>
-          <p:nvPr/>
-        </p:nvSpPr>
-        <p:spPr>
-          <a:xfrm>
-            <a:off x="4279392" y="1463040"/>
-            <a:ext cx="3630168" cy="4023360"/>
-          </a:xfrm>
-          <a:prstGeom prst="roundRect">
-            <a:avLst>
-              <a:gd name="adj" fmla="val 1763"/>
-            </a:avLst>
+              <a:rPr lang="en-US" sz="1000" dirty="0">
+                <a:solidFill>
+                  <a:srgbClr val="27313F"/>
+                </a:solidFill>
+                <a:latin typeface="Calibri" pitchFamily="34" charset="0"/>
+                <a:ea typeface="Calibri" pitchFamily="34" charset="-122"/>
+                <a:cs typeface="Calibri" pitchFamily="34" charset="-120"/>
+              </a:rPr>
+              <a:t>Frontier Claude now, for accuracy and clean citations — with a clear path to smaller US-region models for cost and latency.</a:t>
+            </a:r>
+            <a:endParaRPr lang="en-US" sz="1000" dirty="0"/>
+          </a:p>
+        </p:txBody>
+      </p:sp>
+      <p:sp>
+        <p:nvSpPr>
+          <p:cNvPr id="15" name="Shape 13"/>
+          <p:cNvSpPr/>
+          <p:nvPr/>
+        </p:nvSpPr>
+        <p:spPr>
+          <a:xfrm>
+            <a:off x="457200" y="2258568"/>
+            <a:ext cx="11274552" cy="548640"/>
+          </a:xfrm>
+          <a:prstGeom prst="rect">
+            <a:avLst/>
           </a:prstGeom>
           <a:solidFill>
             <a:srgbClr val="FFFFFF"/>
           </a:solidFill>
-          <a:ln w="12700">
+          <a:ln w="9525">
             <a:solidFill>
               <a:srgbClr val="D8E1EC"/>
             </a:solidFill>
             <a:prstDash val="solid"/>
           </a:ln>
-          <a:effectLst>
-            <a:outerShdw sx="100000" sy="100000" kx="0" ky="0" algn="bl" rotWithShape="0" blurRad="88900" dist="38100" dir="8100000">
-              <a:srgbClr val="1B2A4A">
-                <a:alpha val="12000"/>
-              </a:srgbClr>
-            </a:outerShdw>
-          </a:effectLst>
-        </p:spPr>
+        </p:spPr>
+      </p:sp>
+      <p:sp>
+        <p:nvSpPr>
+          <p:cNvPr id="16" name="Text 14"/>
+          <p:cNvSpPr/>
+          <p:nvPr/>
+        </p:nvSpPr>
+        <p:spPr>
+          <a:xfrm>
+            <a:off x="594360" y="2258568"/>
+            <a:ext cx="2194560" cy="548640"/>
+          </a:xfrm>
+          <a:prstGeom prst="rect">
+            <a:avLst/>
+          </a:prstGeom>
+          <a:noFill/>
+          <a:ln/>
+        </p:spPr>
+        <p:txBody>
+          <a:bodyPr wrap="square" lIns="0" tIns="0" rIns="0" bIns="0" rtlCol="0" anchor="ctr"/>
+          <a:lstStyle/>
+          <a:p>
+            <a:pPr indent="0" marL="0">
+              <a:buNone/>
+            </a:pPr>
+            <a:r>
+              <a:rPr lang="en-US" sz="1100" b="1" dirty="0">
+                <a:solidFill>
+                  <a:srgbClr val="1B2A4A"/>
+                </a:solidFill>
+                <a:latin typeface="Calibri" pitchFamily="34" charset="0"/>
+                <a:ea typeface="Calibri" pitchFamily="34" charset="-122"/>
+                <a:cs typeface="Calibri" pitchFamily="34" charset="-120"/>
+              </a:rPr>
+              <a:t>Stopping hallucination</a:t>
+            </a:r>
+            <a:endParaRPr lang="en-US" sz="1100" dirty="0"/>
+          </a:p>
+        </p:txBody>
+      </p:sp>
+      <p:sp>
+        <p:nvSpPr>
+          <p:cNvPr id="17" name="Text 15"/>
+          <p:cNvSpPr/>
+          <p:nvPr/>
+        </p:nvSpPr>
+        <p:spPr>
+          <a:xfrm>
+            <a:off x="2971800" y="2258568"/>
+            <a:ext cx="3794760" cy="548640"/>
+          </a:xfrm>
+          <a:prstGeom prst="rect">
+            <a:avLst/>
+          </a:prstGeom>
+          <a:noFill/>
+          <a:ln/>
+        </p:spPr>
+        <p:txBody>
+          <a:bodyPr wrap="square" lIns="0" tIns="0" rIns="0" bIns="0" rtlCol="0" anchor="ctr"/>
+          <a:lstStyle/>
+          <a:p>
+            <a:pPr indent="0" marL="0">
+              <a:lnSpc>
+                <a:spcPct val="92000"/>
+              </a:lnSpc>
+              <a:buNone/>
+            </a:pPr>
+            <a:r>
+              <a:rPr lang="en-US" sz="1000" dirty="0">
+                <a:solidFill>
+                  <a:srgbClr val="475569"/>
+                </a:solidFill>
+                <a:latin typeface="Calibri" pitchFamily="34" charset="0"/>
+                <a:ea typeface="Calibri" pitchFamily="34" charset="-122"/>
+                <a:cs typeface="Calibri" pitchFamily="34" charset="-120"/>
+              </a:rPr>
+              <a:t>careful prompting  ·  plain RAG  ·  Graph-RAG + rule checks</a:t>
+            </a:r>
+            <a:endParaRPr lang="en-US" sz="1000" dirty="0"/>
+          </a:p>
+        </p:txBody>
+      </p:sp>
+      <p:sp>
+        <p:nvSpPr>
+          <p:cNvPr id="18" name="Text 16"/>
+          <p:cNvSpPr/>
+          <p:nvPr/>
+        </p:nvSpPr>
+        <p:spPr>
+          <a:xfrm>
+            <a:off x="6995160" y="2258568"/>
+            <a:ext cx="4645152" cy="548640"/>
+          </a:xfrm>
+          <a:prstGeom prst="rect">
+            <a:avLst/>
+          </a:prstGeom>
+          <a:noFill/>
+          <a:ln/>
+        </p:spPr>
+        <p:txBody>
+          <a:bodyPr wrap="square" lIns="0" tIns="0" rIns="0" bIns="0" rtlCol="0" anchor="ctr"/>
+          <a:lstStyle/>
+          <a:p>
+            <a:pPr indent="0" marL="0">
+              <a:lnSpc>
+                <a:spcPct val="92000"/>
+              </a:lnSpc>
+              <a:buNone/>
+            </a:pPr>
+            <a:r>
+              <a:rPr lang="en-US" sz="1000" dirty="0">
+                <a:solidFill>
+                  <a:srgbClr val="27313F"/>
+                </a:solidFill>
+                <a:latin typeface="Calibri" pitchFamily="34" charset="0"/>
+                <a:ea typeface="Calibri" pitchFamily="34" charset="-122"/>
+                <a:cs typeface="Calibri" pitchFamily="34" charset="-120"/>
+              </a:rPr>
+              <a:t>Ground it in retrieval and check it with rules. The agent can only use codes it was given — not a prompt we hope holds.</a:t>
+            </a:r>
+            <a:endParaRPr lang="en-US" sz="1000" dirty="0"/>
+          </a:p>
+        </p:txBody>
       </p:sp>
       <p:sp>
         <p:nvSpPr>
@@ -7852,417 +7686,505 @@
         </p:nvSpPr>
         <p:spPr>
           <a:xfrm>
-            <a:off x="4279392" y="1463040"/>
-            <a:ext cx="3630168" cy="566928"/>
-          </a:xfrm>
-          <a:prstGeom prst="rect">
-            <a:avLst/>
-          </a:prstGeom>
-          <a:solidFill>
-            <a:srgbClr val="0E8C81"/>
-          </a:solidFill>
-          <a:ln/>
-        </p:spPr>
-      </p:sp>
-      <p:sp>
-        <p:nvSpPr>
-          <p:cNvPr id="20" name="Text 18"/>
-          <p:cNvSpPr/>
-          <p:nvPr/>
-        </p:nvSpPr>
-        <p:spPr>
-          <a:xfrm>
-            <a:off x="4462272" y="1463040"/>
-            <a:ext cx="3264408" cy="566928"/>
-          </a:xfrm>
-          <a:prstGeom prst="rect">
-            <a:avLst/>
-          </a:prstGeom>
-          <a:noFill/>
-          <a:ln/>
-        </p:spPr>
-        <p:txBody>
-          <a:bodyPr wrap="square" lIns="0" tIns="0" rIns="0" bIns="0" rtlCol="0" anchor="ctr"/>
-          <a:lstStyle/>
-          <a:p>
-            <a:pPr indent="0" marL="0">
-              <a:buNone/>
-            </a:pPr>
-            <a:r>
-              <a:rPr lang="en-US" sz="1350" b="1" dirty="0">
-                <a:solidFill>
-                  <a:srgbClr val="FFFFFF"/>
-                </a:solidFill>
-                <a:latin typeface="Calibri" pitchFamily="34" charset="0"/>
-                <a:ea typeface="Calibri" pitchFamily="34" charset="-122"/>
-                <a:cs typeface="Calibri" pitchFamily="34" charset="-120"/>
-              </a:rPr>
-              <a:t>What it protects</a:t>
-            </a:r>
-            <a:endParaRPr lang="en-US" sz="1350" dirty="0"/>
-          </a:p>
-        </p:txBody>
-      </p:sp>
-      <p:sp>
-        <p:nvSpPr>
-          <p:cNvPr id="21" name="Shape 19"/>
-          <p:cNvSpPr/>
-          <p:nvPr/>
-        </p:nvSpPr>
-        <p:spPr>
-          <a:xfrm>
-            <a:off x="4507992" y="2304288"/>
-            <a:ext cx="118872" cy="118872"/>
-          </a:xfrm>
-          <a:prstGeom prst="ellipse">
-            <a:avLst/>
-          </a:prstGeom>
-          <a:solidFill>
-            <a:srgbClr val="0E8C81"/>
-          </a:solidFill>
-          <a:ln/>
-        </p:spPr>
-      </p:sp>
-      <p:sp>
-        <p:nvSpPr>
-          <p:cNvPr id="22" name="Text 20"/>
-          <p:cNvSpPr/>
-          <p:nvPr/>
-        </p:nvSpPr>
-        <p:spPr>
-          <a:xfrm>
-            <a:off x="4736592" y="2240280"/>
-            <a:ext cx="2971800" cy="713232"/>
-          </a:xfrm>
-          <a:prstGeom prst="rect">
-            <a:avLst/>
-          </a:prstGeom>
-          <a:noFill/>
-          <a:ln/>
-        </p:spPr>
-        <p:txBody>
-          <a:bodyPr wrap="square" lIns="0" tIns="0" rIns="0" bIns="0" rtlCol="0" anchor="t"/>
-          <a:lstStyle/>
-          <a:p>
-            <a:pPr indent="0" marL="0">
-              <a:lnSpc>
-                <a:spcPct val="98000"/>
-              </a:lnSpc>
-              <a:buNone/>
-            </a:pPr>
-            <a:r>
-              <a:rPr lang="en-US" sz="1100" dirty="0">
-                <a:solidFill>
-                  <a:srgbClr val="6B7A8D"/>
-                </a:solidFill>
-                <a:latin typeface="Calibri" pitchFamily="34" charset="0"/>
-                <a:ea typeface="Calibri" pitchFamily="34" charset="-122"/>
-                <a:cs typeface="Calibri" pitchFamily="34" charset="-120"/>
-              </a:rPr>
-              <a:t>Demo data is synthetic — no real patient information</a:t>
-            </a:r>
-            <a:endParaRPr lang="en-US" sz="1100" dirty="0"/>
-          </a:p>
-        </p:txBody>
-      </p:sp>
-      <p:sp>
-        <p:nvSpPr>
-          <p:cNvPr id="23" name="Shape 21"/>
-          <p:cNvSpPr/>
-          <p:nvPr/>
-        </p:nvSpPr>
-        <p:spPr>
-          <a:xfrm>
-            <a:off x="4507992" y="3054096"/>
-            <a:ext cx="118872" cy="118872"/>
-          </a:xfrm>
-          <a:prstGeom prst="ellipse">
-            <a:avLst/>
-          </a:prstGeom>
-          <a:solidFill>
-            <a:srgbClr val="0E8C81"/>
-          </a:solidFill>
-          <a:ln/>
-        </p:spPr>
-      </p:sp>
-      <p:sp>
-        <p:nvSpPr>
-          <p:cNvPr id="24" name="Text 22"/>
-          <p:cNvSpPr/>
-          <p:nvPr/>
-        </p:nvSpPr>
-        <p:spPr>
-          <a:xfrm>
-            <a:off x="4736592" y="2990088"/>
-            <a:ext cx="2971800" cy="713232"/>
-          </a:xfrm>
-          <a:prstGeom prst="rect">
-            <a:avLst/>
-          </a:prstGeom>
-          <a:noFill/>
-          <a:ln/>
-        </p:spPr>
-        <p:txBody>
-          <a:bodyPr wrap="square" lIns="0" tIns="0" rIns="0" bIns="0" rtlCol="0" anchor="t"/>
-          <a:lstStyle/>
-          <a:p>
-            <a:pPr indent="0" marL="0">
-              <a:lnSpc>
-                <a:spcPct val="98000"/>
-              </a:lnSpc>
-              <a:buNone/>
-            </a:pPr>
-            <a:r>
-              <a:rPr lang="en-US" sz="1100" dirty="0">
-                <a:solidFill>
-                  <a:srgbClr val="6B7A8D"/>
-                </a:solidFill>
-                <a:latin typeface="Calibri" pitchFamily="34" charset="0"/>
-                <a:ea typeface="Calibri" pitchFamily="34" charset="-122"/>
-                <a:cs typeface="Calibri" pitchFamily="34" charset="-120"/>
-              </a:rPr>
-              <a:t>One secret (the model key), kept out of source control</a:t>
-            </a:r>
-            <a:endParaRPr lang="en-US" sz="1100" dirty="0"/>
-          </a:p>
-        </p:txBody>
-      </p:sp>
-      <p:sp>
-        <p:nvSpPr>
-          <p:cNvPr id="25" name="Shape 23"/>
-          <p:cNvSpPr/>
-          <p:nvPr/>
-        </p:nvSpPr>
-        <p:spPr>
-          <a:xfrm>
-            <a:off x="4507992" y="3803904"/>
-            <a:ext cx="118872" cy="118872"/>
-          </a:xfrm>
-          <a:prstGeom prst="ellipse">
-            <a:avLst/>
-          </a:prstGeom>
-          <a:solidFill>
-            <a:srgbClr val="0E8C81"/>
-          </a:solidFill>
-          <a:ln/>
-        </p:spPr>
-      </p:sp>
-      <p:sp>
-        <p:nvSpPr>
-          <p:cNvPr id="26" name="Text 24"/>
-          <p:cNvSpPr/>
-          <p:nvPr/>
-        </p:nvSpPr>
-        <p:spPr>
-          <a:xfrm>
-            <a:off x="4736592" y="3739896"/>
-            <a:ext cx="2971800" cy="713232"/>
-          </a:xfrm>
-          <a:prstGeom prst="rect">
-            <a:avLst/>
-          </a:prstGeom>
-          <a:noFill/>
-          <a:ln/>
-        </p:spPr>
-        <p:txBody>
-          <a:bodyPr wrap="square" lIns="0" tIns="0" rIns="0" bIns="0" rtlCol="0" anchor="t"/>
-          <a:lstStyle/>
-          <a:p>
-            <a:pPr indent="0" marL="0">
-              <a:lnSpc>
-                <a:spcPct val="98000"/>
-              </a:lnSpc>
-              <a:buNone/>
-            </a:pPr>
-            <a:r>
-              <a:rPr lang="en-US" sz="1100" dirty="0">
-                <a:solidFill>
-                  <a:srgbClr val="6B7A8D"/>
-                </a:solidFill>
-                <a:latin typeface="Calibri" pitchFamily="34" charset="0"/>
-                <a:ea typeface="Calibri" pitchFamily="34" charset="-122"/>
-                <a:cs typeface="Calibri" pitchFamily="34" charset="-120"/>
-              </a:rPr>
-              <a:t>A full audit trail and an admin change log</a:t>
-            </a:r>
-            <a:endParaRPr lang="en-US" sz="1100" dirty="0"/>
-          </a:p>
-        </p:txBody>
-      </p:sp>
-      <p:sp>
-        <p:nvSpPr>
-          <p:cNvPr id="27" name="Shape 25"/>
-          <p:cNvSpPr/>
-          <p:nvPr/>
-        </p:nvSpPr>
-        <p:spPr>
-          <a:xfrm>
-            <a:off x="4507992" y="4553712"/>
-            <a:ext cx="118872" cy="118872"/>
-          </a:xfrm>
-          <a:prstGeom prst="ellipse">
-            <a:avLst/>
-          </a:prstGeom>
-          <a:solidFill>
-            <a:srgbClr val="0E8C81"/>
-          </a:solidFill>
-          <a:ln/>
-        </p:spPr>
-      </p:sp>
-      <p:sp>
-        <p:nvSpPr>
-          <p:cNvPr id="28" name="Text 26"/>
-          <p:cNvSpPr/>
-          <p:nvPr/>
-        </p:nvSpPr>
-        <p:spPr>
-          <a:xfrm>
-            <a:off x="4736592" y="4489704"/>
-            <a:ext cx="2971800" cy="713232"/>
-          </a:xfrm>
-          <a:prstGeom prst="rect">
-            <a:avLst/>
-          </a:prstGeom>
-          <a:noFill/>
-          <a:ln/>
-        </p:spPr>
-        <p:txBody>
-          <a:bodyPr wrap="square" lIns="0" tIns="0" rIns="0" bIns="0" rtlCol="0" anchor="t"/>
-          <a:lstStyle/>
-          <a:p>
-            <a:pPr indent="0" marL="0">
-              <a:lnSpc>
-                <a:spcPct val="98000"/>
-              </a:lnSpc>
-              <a:buNone/>
-            </a:pPr>
-            <a:r>
-              <a:rPr lang="en-US" sz="1100" dirty="0">
-                <a:solidFill>
-                  <a:srgbClr val="6B7A8D"/>
-                </a:solidFill>
-                <a:latin typeface="Calibri" pitchFamily="34" charset="0"/>
-                <a:ea typeface="Calibri" pitchFamily="34" charset="-122"/>
-                <a:cs typeface="Calibri" pitchFamily="34" charset="-120"/>
-              </a:rPr>
-              <a:t>SOC 2 controls and encryption at deployment</a:t>
-            </a:r>
-            <a:endParaRPr lang="en-US" sz="1100" dirty="0"/>
-          </a:p>
-        </p:txBody>
-      </p:sp>
-      <p:sp>
-        <p:nvSpPr>
-          <p:cNvPr id="29" name="Shape 27"/>
-          <p:cNvSpPr/>
-          <p:nvPr/>
-        </p:nvSpPr>
-        <p:spPr>
-          <a:xfrm>
-            <a:off x="8101584" y="1463040"/>
-            <a:ext cx="3630168" cy="4023360"/>
-          </a:xfrm>
-          <a:prstGeom prst="roundRect">
-            <a:avLst>
-              <a:gd name="adj" fmla="val 1763"/>
-            </a:avLst>
-          </a:prstGeom>
-          <a:solidFill>
-            <a:srgbClr val="FFFFFF"/>
-          </a:solidFill>
-          <a:ln w="12700">
+            <a:off x="457200" y="2807208"/>
+            <a:ext cx="11274552" cy="548640"/>
+          </a:xfrm>
+          <a:prstGeom prst="rect">
+            <a:avLst/>
+          </a:prstGeom>
+          <a:solidFill>
+            <a:srgbClr val="EFF4FA"/>
+          </a:solidFill>
+          <a:ln w="9525">
             <a:solidFill>
               <a:srgbClr val="D8E1EC"/>
             </a:solidFill>
             <a:prstDash val="solid"/>
           </a:ln>
-          <a:effectLst>
-            <a:outerShdw sx="100000" sy="100000" kx="0" ky="0" algn="bl" rotWithShape="0" blurRad="88900" dist="38100" dir="8100000">
-              <a:srgbClr val="1B2A4A">
-                <a:alpha val="12000"/>
-              </a:srgbClr>
-            </a:outerShdw>
-          </a:effectLst>
-        </p:spPr>
-      </p:sp>
-      <p:sp>
-        <p:nvSpPr>
-          <p:cNvPr id="30" name="Shape 28"/>
-          <p:cNvSpPr/>
-          <p:nvPr/>
-        </p:nvSpPr>
-        <p:spPr>
-          <a:xfrm>
-            <a:off x="8101584" y="1463040"/>
-            <a:ext cx="3630168" cy="566928"/>
-          </a:xfrm>
-          <a:prstGeom prst="rect">
-            <a:avLst/>
-          </a:prstGeom>
-          <a:solidFill>
-            <a:srgbClr val="13B5A6"/>
-          </a:solidFill>
-          <a:ln/>
-        </p:spPr>
-      </p:sp>
-      <p:sp>
-        <p:nvSpPr>
-          <p:cNvPr id="31" name="Text 29"/>
-          <p:cNvSpPr/>
-          <p:nvPr/>
-        </p:nvSpPr>
-        <p:spPr>
-          <a:xfrm>
-            <a:off x="8284464" y="1463040"/>
-            <a:ext cx="3264408" cy="566928"/>
-          </a:xfrm>
-          <a:prstGeom prst="rect">
-            <a:avLst/>
-          </a:prstGeom>
-          <a:noFill/>
-          <a:ln/>
-        </p:spPr>
-        <p:txBody>
-          <a:bodyPr wrap="square" lIns="0" tIns="0" rIns="0" bIns="0" rtlCol="0" anchor="ctr"/>
-          <a:lstStyle/>
-          <a:p>
-            <a:pPr indent="0" marL="0">
-              <a:buNone/>
-            </a:pPr>
-            <a:r>
-              <a:rPr lang="en-US" sz="1350" b="1" dirty="0">
-                <a:solidFill>
-                  <a:srgbClr val="FFFFFF"/>
-                </a:solidFill>
-                <a:latin typeface="Calibri" pitchFamily="34" charset="0"/>
-                <a:ea typeface="Calibri" pitchFamily="34" charset="-122"/>
-                <a:cs typeface="Calibri" pitchFamily="34" charset="-120"/>
-              </a:rPr>
-              <a:t>The licensing reality</a:t>
-            </a:r>
-            <a:endParaRPr lang="en-US" sz="1350" dirty="0"/>
-          </a:p>
-        </p:txBody>
-      </p:sp>
-      <p:sp>
-        <p:nvSpPr>
-          <p:cNvPr id="32" name="Shape 30"/>
-          <p:cNvSpPr/>
-          <p:nvPr/>
-        </p:nvSpPr>
-        <p:spPr>
-          <a:xfrm>
-            <a:off x="8330184" y="2304288"/>
-            <a:ext cx="118872" cy="118872"/>
-          </a:xfrm>
-          <a:prstGeom prst="ellipse">
-            <a:avLst/>
-          </a:prstGeom>
-          <a:solidFill>
-            <a:srgbClr val="13B5A6"/>
-          </a:solidFill>
-          <a:ln/>
-        </p:spPr>
+        </p:spPr>
+      </p:sp>
+      <p:sp>
+        <p:nvSpPr>
+          <p:cNvPr id="20" name="Text 18"/>
+          <p:cNvSpPr/>
+          <p:nvPr/>
+        </p:nvSpPr>
+        <p:spPr>
+          <a:xfrm>
+            <a:off x="594360" y="2807208"/>
+            <a:ext cx="2194560" cy="548640"/>
+          </a:xfrm>
+          <a:prstGeom prst="rect">
+            <a:avLst/>
+          </a:prstGeom>
+          <a:noFill/>
+          <a:ln/>
+        </p:spPr>
+        <p:txBody>
+          <a:bodyPr wrap="square" lIns="0" tIns="0" rIns="0" bIns="0" rtlCol="0" anchor="ctr"/>
+          <a:lstStyle/>
+          <a:p>
+            <a:pPr indent="0" marL="0">
+              <a:buNone/>
+            </a:pPr>
+            <a:r>
+              <a:rPr lang="en-US" sz="1100" b="1" dirty="0">
+                <a:solidFill>
+                  <a:srgbClr val="1B2A4A"/>
+                </a:solidFill>
+                <a:latin typeface="Calibri" pitchFamily="34" charset="0"/>
+                <a:ea typeface="Calibri" pitchFamily="34" charset="-122"/>
+                <a:cs typeface="Calibri" pitchFamily="34" charset="-120"/>
+              </a:rPr>
+              <a:t>Deciding what to auto-bill</a:t>
+            </a:r>
+            <a:endParaRPr lang="en-US" sz="1100" dirty="0"/>
+          </a:p>
+        </p:txBody>
+      </p:sp>
+      <p:sp>
+        <p:nvSpPr>
+          <p:cNvPr id="21" name="Text 19"/>
+          <p:cNvSpPr/>
+          <p:nvPr/>
+        </p:nvSpPr>
+        <p:spPr>
+          <a:xfrm>
+            <a:off x="2971800" y="2807208"/>
+            <a:ext cx="3794760" cy="548640"/>
+          </a:xfrm>
+          <a:prstGeom prst="rect">
+            <a:avLst/>
+          </a:prstGeom>
+          <a:noFill/>
+          <a:ln/>
+        </p:spPr>
+        <p:txBody>
+          <a:bodyPr wrap="square" lIns="0" tIns="0" rIns="0" bIns="0" rtlCol="0" anchor="ctr"/>
+          <a:lstStyle/>
+          <a:p>
+            <a:pPr indent="0" marL="0">
+              <a:lnSpc>
+                <a:spcPct val="92000"/>
+              </a:lnSpc>
+              <a:buNone/>
+            </a:pPr>
+            <a:r>
+              <a:rPr lang="en-US" sz="1000" dirty="0">
+                <a:solidFill>
+                  <a:srgbClr val="475569"/>
+                </a:solidFill>
+                <a:latin typeface="Calibri" pitchFamily="34" charset="0"/>
+                <a:ea typeface="Calibri" pitchFamily="34" charset="-122"/>
+                <a:cs typeface="Calibri" pitchFamily="34" charset="-120"/>
+              </a:rPr>
+              <a:t>the model's raw % ·  a blended, calibrated score</a:t>
+            </a:r>
+            <a:endParaRPr lang="en-US" sz="1000" dirty="0"/>
+          </a:p>
+        </p:txBody>
+      </p:sp>
+      <p:sp>
+        <p:nvSpPr>
+          <p:cNvPr id="22" name="Text 20"/>
+          <p:cNvSpPr/>
+          <p:nvPr/>
+        </p:nvSpPr>
+        <p:spPr>
+          <a:xfrm>
+            <a:off x="6995160" y="2807208"/>
+            <a:ext cx="4645152" cy="548640"/>
+          </a:xfrm>
+          <a:prstGeom prst="rect">
+            <a:avLst/>
+          </a:prstGeom>
+          <a:noFill/>
+          <a:ln/>
+        </p:spPr>
+        <p:txBody>
+          <a:bodyPr wrap="square" lIns="0" tIns="0" rIns="0" bIns="0" rtlCol="0" anchor="ctr"/>
+          <a:lstStyle/>
+          <a:p>
+            <a:pPr indent="0" marL="0">
+              <a:lnSpc>
+                <a:spcPct val="92000"/>
+              </a:lnSpc>
+              <a:buNone/>
+            </a:pPr>
+            <a:r>
+              <a:rPr lang="en-US" sz="1000" dirty="0">
+                <a:solidFill>
+                  <a:srgbClr val="27313F"/>
+                </a:solidFill>
+                <a:latin typeface="Calibri" pitchFamily="34" charset="0"/>
+                <a:ea typeface="Calibri" pitchFamily="34" charset="-122"/>
+                <a:cs typeface="Calibri" pitchFamily="34" charset="-120"/>
+              </a:rPr>
+              <a:t>A blended score you can trust, so the auto-bill / QA / coder line is one the business actually sets.</a:t>
+            </a:r>
+            <a:endParaRPr lang="en-US" sz="1000" dirty="0"/>
+          </a:p>
+        </p:txBody>
+      </p:sp>
+      <p:sp>
+        <p:nvSpPr>
+          <p:cNvPr id="23" name="Shape 21"/>
+          <p:cNvSpPr/>
+          <p:nvPr/>
+        </p:nvSpPr>
+        <p:spPr>
+          <a:xfrm>
+            <a:off x="457200" y="3355848"/>
+            <a:ext cx="11274552" cy="548640"/>
+          </a:xfrm>
+          <a:prstGeom prst="rect">
+            <a:avLst/>
+          </a:prstGeom>
+          <a:solidFill>
+            <a:srgbClr val="FFFFFF"/>
+          </a:solidFill>
+          <a:ln w="9525">
+            <a:solidFill>
+              <a:srgbClr val="D8E1EC"/>
+            </a:solidFill>
+            <a:prstDash val="solid"/>
+          </a:ln>
+        </p:spPr>
+      </p:sp>
+      <p:sp>
+        <p:nvSpPr>
+          <p:cNvPr id="24" name="Text 22"/>
+          <p:cNvSpPr/>
+          <p:nvPr/>
+        </p:nvSpPr>
+        <p:spPr>
+          <a:xfrm>
+            <a:off x="594360" y="3355848"/>
+            <a:ext cx="2194560" cy="548640"/>
+          </a:xfrm>
+          <a:prstGeom prst="rect">
+            <a:avLst/>
+          </a:prstGeom>
+          <a:noFill/>
+          <a:ln/>
+        </p:spPr>
+        <p:txBody>
+          <a:bodyPr wrap="square" lIns="0" tIns="0" rIns="0" bIns="0" rtlCol="0" anchor="ctr"/>
+          <a:lstStyle/>
+          <a:p>
+            <a:pPr indent="0" marL="0">
+              <a:buNone/>
+            </a:pPr>
+            <a:r>
+              <a:rPr lang="en-US" sz="1100" b="1" dirty="0">
+                <a:solidFill>
+                  <a:srgbClr val="1B2A4A"/>
+                </a:solidFill>
+                <a:latin typeface="Calibri" pitchFamily="34" charset="0"/>
+                <a:ea typeface="Calibri" pitchFamily="34" charset="-122"/>
+                <a:cs typeface="Calibri" pitchFamily="34" charset="-120"/>
+              </a:rPr>
+              <a:t>Checking the codes</a:t>
+            </a:r>
+            <a:endParaRPr lang="en-US" sz="1100" dirty="0"/>
+          </a:p>
+        </p:txBody>
+      </p:sp>
+      <p:sp>
+        <p:nvSpPr>
+          <p:cNvPr id="25" name="Text 23"/>
+          <p:cNvSpPr/>
+          <p:nvPr/>
+        </p:nvSpPr>
+        <p:spPr>
+          <a:xfrm>
+            <a:off x="2971800" y="3355848"/>
+            <a:ext cx="3794760" cy="548640"/>
+          </a:xfrm>
+          <a:prstGeom prst="rect">
+            <a:avLst/>
+          </a:prstGeom>
+          <a:noFill/>
+          <a:ln/>
+        </p:spPr>
+        <p:txBody>
+          <a:bodyPr wrap="square" lIns="0" tIns="0" rIns="0" bIns="0" rtlCol="0" anchor="ctr"/>
+          <a:lstStyle/>
+          <a:p>
+            <a:pPr indent="0" marL="0">
+              <a:lnSpc>
+                <a:spcPct val="92000"/>
+              </a:lnSpc>
+              <a:buNone/>
+            </a:pPr>
+            <a:r>
+              <a:rPr lang="en-US" sz="1000" dirty="0">
+                <a:solidFill>
+                  <a:srgbClr val="475569"/>
+                </a:solidFill>
+                <a:latin typeface="Calibri" pitchFamily="34" charset="0"/>
+                <a:ea typeface="Calibri" pitchFamily="34" charset="-122"/>
+                <a:cs typeface="Calibri" pitchFamily="34" charset="-120"/>
+              </a:rPr>
+              <a:t>let the model check itself  ·  a real rule engine</a:t>
+            </a:r>
+            <a:endParaRPr lang="en-US" sz="1000" dirty="0"/>
+          </a:p>
+        </p:txBody>
+      </p:sp>
+      <p:sp>
+        <p:nvSpPr>
+          <p:cNvPr id="26" name="Text 24"/>
+          <p:cNvSpPr/>
+          <p:nvPr/>
+        </p:nvSpPr>
+        <p:spPr>
+          <a:xfrm>
+            <a:off x="6995160" y="3355848"/>
+            <a:ext cx="4645152" cy="548640"/>
+          </a:xfrm>
+          <a:prstGeom prst="rect">
+            <a:avLst/>
+          </a:prstGeom>
+          <a:noFill/>
+          <a:ln/>
+        </p:spPr>
+        <p:txBody>
+          <a:bodyPr wrap="square" lIns="0" tIns="0" rIns="0" bIns="0" rtlCol="0" anchor="ctr"/>
+          <a:lstStyle/>
+          <a:p>
+            <a:pPr indent="0" marL="0">
+              <a:lnSpc>
+                <a:spcPct val="92000"/>
+              </a:lnSpc>
+              <a:buNone/>
+            </a:pPr>
+            <a:r>
+              <a:rPr lang="en-US" sz="1000" dirty="0">
+                <a:solidFill>
+                  <a:srgbClr val="27313F"/>
+                </a:solidFill>
+                <a:latin typeface="Calibri" pitchFamily="34" charset="0"/>
+                <a:ea typeface="Calibri" pitchFamily="34" charset="-122"/>
+                <a:cs typeface="Calibri" pitchFamily="34" charset="-120"/>
+              </a:rPr>
+              <a:t>Plain, deterministic rules — NCCI, MUE, modifiers, payer — so every check can be inspected and defended.</a:t>
+            </a:r>
+            <a:endParaRPr lang="en-US" sz="1000" dirty="0"/>
+          </a:p>
+        </p:txBody>
+      </p:sp>
+      <p:sp>
+        <p:nvSpPr>
+          <p:cNvPr id="27" name="Shape 25"/>
+          <p:cNvSpPr/>
+          <p:nvPr/>
+        </p:nvSpPr>
+        <p:spPr>
+          <a:xfrm>
+            <a:off x="457200" y="3904488"/>
+            <a:ext cx="11274552" cy="548640"/>
+          </a:xfrm>
+          <a:prstGeom prst="rect">
+            <a:avLst/>
+          </a:prstGeom>
+          <a:solidFill>
+            <a:srgbClr val="EFF4FA"/>
+          </a:solidFill>
+          <a:ln w="9525">
+            <a:solidFill>
+              <a:srgbClr val="D8E1EC"/>
+            </a:solidFill>
+            <a:prstDash val="solid"/>
+          </a:ln>
+        </p:spPr>
+      </p:sp>
+      <p:sp>
+        <p:nvSpPr>
+          <p:cNvPr id="28" name="Text 26"/>
+          <p:cNvSpPr/>
+          <p:nvPr/>
+        </p:nvSpPr>
+        <p:spPr>
+          <a:xfrm>
+            <a:off x="594360" y="3904488"/>
+            <a:ext cx="2194560" cy="548640"/>
+          </a:xfrm>
+          <a:prstGeom prst="rect">
+            <a:avLst/>
+          </a:prstGeom>
+          <a:noFill/>
+          <a:ln/>
+        </p:spPr>
+        <p:txBody>
+          <a:bodyPr wrap="square" lIns="0" tIns="0" rIns="0" bIns="0" rtlCol="0" anchor="ctr"/>
+          <a:lstStyle/>
+          <a:p>
+            <a:pPr indent="0" marL="0">
+              <a:buNone/>
+            </a:pPr>
+            <a:r>
+              <a:rPr lang="en-US" sz="1100" b="1" dirty="0">
+                <a:solidFill>
+                  <a:srgbClr val="1B2A4A"/>
+                </a:solidFill>
+                <a:latin typeface="Calibri" pitchFamily="34" charset="0"/>
+                <a:ea typeface="Calibri" pitchFamily="34" charset="-122"/>
+                <a:cs typeface="Calibri" pitchFamily="34" charset="-120"/>
+              </a:rPr>
+              <a:t>Where knowledge lives</a:t>
+            </a:r>
+            <a:endParaRPr lang="en-US" sz="1100" dirty="0"/>
+          </a:p>
+        </p:txBody>
+      </p:sp>
+      <p:sp>
+        <p:nvSpPr>
+          <p:cNvPr id="29" name="Text 27"/>
+          <p:cNvSpPr/>
+          <p:nvPr/>
+        </p:nvSpPr>
+        <p:spPr>
+          <a:xfrm>
+            <a:off x="2971800" y="3904488"/>
+            <a:ext cx="3794760" cy="548640"/>
+          </a:xfrm>
+          <a:prstGeom prst="rect">
+            <a:avLst/>
+          </a:prstGeom>
+          <a:noFill/>
+          <a:ln/>
+        </p:spPr>
+        <p:txBody>
+          <a:bodyPr wrap="square" lIns="0" tIns="0" rIns="0" bIns="0" rtlCol="0" anchor="ctr"/>
+          <a:lstStyle/>
+          <a:p>
+            <a:pPr indent="0" marL="0">
+              <a:lnSpc>
+                <a:spcPct val="92000"/>
+              </a:lnSpc>
+              <a:buNone/>
+            </a:pPr>
+            <a:r>
+              <a:rPr lang="en-US" sz="1000" dirty="0">
+                <a:solidFill>
+                  <a:srgbClr val="475569"/>
+                </a:solidFill>
+                <a:latin typeface="Calibri" pitchFamily="34" charset="0"/>
+                <a:ea typeface="Calibri" pitchFamily="34" charset="-122"/>
+                <a:cs typeface="Calibri" pitchFamily="34" charset="-120"/>
+              </a:rPr>
+              <a:t>a separate vector database  ·  Postgres + pgvector</a:t>
+            </a:r>
+            <a:endParaRPr lang="en-US" sz="1000" dirty="0"/>
+          </a:p>
+        </p:txBody>
+      </p:sp>
+      <p:sp>
+        <p:nvSpPr>
+          <p:cNvPr id="30" name="Text 28"/>
+          <p:cNvSpPr/>
+          <p:nvPr/>
+        </p:nvSpPr>
+        <p:spPr>
+          <a:xfrm>
+            <a:off x="6995160" y="3904488"/>
+            <a:ext cx="4645152" cy="548640"/>
+          </a:xfrm>
+          <a:prstGeom prst="rect">
+            <a:avLst/>
+          </a:prstGeom>
+          <a:noFill/>
+          <a:ln/>
+        </p:spPr>
+        <p:txBody>
+          <a:bodyPr wrap="square" lIns="0" tIns="0" rIns="0" bIns="0" rtlCol="0" anchor="ctr"/>
+          <a:lstStyle/>
+          <a:p>
+            <a:pPr indent="0" marL="0">
+              <a:lnSpc>
+                <a:spcPct val="92000"/>
+              </a:lnSpc>
+              <a:buNone/>
+            </a:pPr>
+            <a:r>
+              <a:rPr lang="en-US" sz="1000" dirty="0">
+                <a:solidFill>
+                  <a:srgbClr val="27313F"/>
+                </a:solidFill>
+                <a:latin typeface="Calibri" pitchFamily="34" charset="0"/>
+                <a:ea typeface="Calibri" pitchFamily="34" charset="-122"/>
+                <a:cs typeface="Calibri" pitchFamily="34" charset="-120"/>
+              </a:rPr>
+              <a:t>One database, fewer moving parts, easier to run — and pgvector is there when we turn on embedding search.</a:t>
+            </a:r>
+            <a:endParaRPr lang="en-US" sz="1000" dirty="0"/>
+          </a:p>
+        </p:txBody>
+      </p:sp>
+      <p:sp>
+        <p:nvSpPr>
+          <p:cNvPr id="31" name="Shape 29"/>
+          <p:cNvSpPr/>
+          <p:nvPr/>
+        </p:nvSpPr>
+        <p:spPr>
+          <a:xfrm>
+            <a:off x="457200" y="4453128"/>
+            <a:ext cx="11274552" cy="548640"/>
+          </a:xfrm>
+          <a:prstGeom prst="rect">
+            <a:avLst/>
+          </a:prstGeom>
+          <a:solidFill>
+            <a:srgbClr val="FFFFFF"/>
+          </a:solidFill>
+          <a:ln w="9525">
+            <a:solidFill>
+              <a:srgbClr val="D8E1EC"/>
+            </a:solidFill>
+            <a:prstDash val="solid"/>
+          </a:ln>
+        </p:spPr>
+      </p:sp>
+      <p:sp>
+        <p:nvSpPr>
+          <p:cNvPr id="32" name="Text 30"/>
+          <p:cNvSpPr/>
+          <p:nvPr/>
+        </p:nvSpPr>
+        <p:spPr>
+          <a:xfrm>
+            <a:off x="594360" y="4453128"/>
+            <a:ext cx="2194560" cy="548640"/>
+          </a:xfrm>
+          <a:prstGeom prst="rect">
+            <a:avLst/>
+          </a:prstGeom>
+          <a:noFill/>
+          <a:ln/>
+        </p:spPr>
+        <p:txBody>
+          <a:bodyPr wrap="square" lIns="0" tIns="0" rIns="0" bIns="0" rtlCol="0" anchor="ctr"/>
+          <a:lstStyle/>
+          <a:p>
+            <a:pPr indent="0" marL="0">
+              <a:buNone/>
+            </a:pPr>
+            <a:r>
+              <a:rPr lang="en-US" sz="1100" b="1" dirty="0">
+                <a:solidFill>
+                  <a:srgbClr val="1B2A4A"/>
+                </a:solidFill>
+                <a:latin typeface="Calibri" pitchFamily="34" charset="0"/>
+                <a:ea typeface="Calibri" pitchFamily="34" charset="-122"/>
+                <a:cs typeface="Calibri" pitchFamily="34" charset="-120"/>
+              </a:rPr>
+              <a:t>How much to automate</a:t>
+            </a:r>
+            <a:endParaRPr lang="en-US" sz="1100" dirty="0"/>
+          </a:p>
+        </p:txBody>
       </p:sp>
       <p:sp>
         <p:nvSpPr>
@@ -8272,35 +8194,141 @@
         </p:nvSpPr>
         <p:spPr>
           <a:xfrm>
-            <a:off x="8558784" y="2240280"/>
-            <a:ext cx="2971800" cy="713232"/>
-          </a:xfrm>
-          <a:prstGeom prst="rect">
-            <a:avLst/>
-          </a:prstGeom>
-          <a:noFill/>
-          <a:ln/>
-        </p:spPr>
-        <p:txBody>
-          <a:bodyPr wrap="square" lIns="0" tIns="0" rIns="0" bIns="0" rtlCol="0" anchor="t"/>
+            <a:off x="2971800" y="4453128"/>
+            <a:ext cx="3794760" cy="548640"/>
+          </a:xfrm>
+          <a:prstGeom prst="rect">
+            <a:avLst/>
+          </a:prstGeom>
+          <a:noFill/>
+          <a:ln/>
+        </p:spPr>
+        <p:txBody>
+          <a:bodyPr wrap="square" lIns="0" tIns="0" rIns="0" bIns="0" rtlCol="0" anchor="ctr"/>
           <a:lstStyle/>
           <a:p>
             <a:pPr indent="0" marL="0">
               <a:lnSpc>
-                <a:spcPct val="98000"/>
+                <a:spcPct val="92000"/>
               </a:lnSpc>
               <a:buNone/>
             </a:pPr>
             <a:r>
-              <a:rPr lang="en-US" sz="1100" dirty="0">
-                <a:solidFill>
-                  <a:srgbClr val="6B7A8D"/>
-                </a:solidFill>
-                <a:latin typeface="Calibri" pitchFamily="34" charset="0"/>
-                <a:ea typeface="Calibri" pitchFamily="34" charset="-122"/>
-                <a:cs typeface="Calibri" pitchFamily="34" charset="-120"/>
-              </a:rPr>
-              <a:t>Public now: ICD-10-CM, HCPCS, NCCI, MUE, guidelines</a:t>
+              <a:rPr lang="en-US" sz="1000" dirty="0">
+                <a:solidFill>
+                  <a:srgbClr val="475569"/>
+                </a:solidFill>
+                <a:latin typeface="Calibri" pitchFamily="34" charset="0"/>
+                <a:ea typeface="Calibri" pitchFamily="34" charset="-122"/>
+                <a:cs typeface="Calibri" pitchFamily="34" charset="-120"/>
+              </a:rPr>
+              <a:t>full auto  ·  human-in-the-loop  ·  bounded autonomy</a:t>
+            </a:r>
+            <a:endParaRPr lang="en-US" sz="1000" dirty="0"/>
+          </a:p>
+        </p:txBody>
+      </p:sp>
+      <p:sp>
+        <p:nvSpPr>
+          <p:cNvPr id="34" name="Text 32"/>
+          <p:cNvSpPr/>
+          <p:nvPr/>
+        </p:nvSpPr>
+        <p:spPr>
+          <a:xfrm>
+            <a:off x="6995160" y="4453128"/>
+            <a:ext cx="4645152" cy="548640"/>
+          </a:xfrm>
+          <a:prstGeom prst="rect">
+            <a:avLst/>
+          </a:prstGeom>
+          <a:noFill/>
+          <a:ln/>
+        </p:spPr>
+        <p:txBody>
+          <a:bodyPr wrap="square" lIns="0" tIns="0" rIns="0" bIns="0" rtlCol="0" anchor="ctr"/>
+          <a:lstStyle/>
+          <a:p>
+            <a:pPr indent="0" marL="0">
+              <a:lnSpc>
+                <a:spcPct val="92000"/>
+              </a:lnSpc>
+              <a:buNone/>
+            </a:pPr>
+            <a:r>
+              <a:rPr lang="en-US" sz="1000" dirty="0">
+                <a:solidFill>
+                  <a:srgbClr val="27313F"/>
+                </a:solidFill>
+                <a:latin typeface="Calibri" pitchFamily="34" charset="0"/>
+                <a:ea typeface="Calibri" pitchFamily="34" charset="-122"/>
+                <a:cs typeface="Calibri" pitchFamily="34" charset="-120"/>
+              </a:rPr>
+              <a:t>Automate the easy calls, but keep hard limits that always route the risky ones to a person.</a:t>
+            </a:r>
+            <a:endParaRPr lang="en-US" sz="1000" dirty="0"/>
+          </a:p>
+        </p:txBody>
+      </p:sp>
+      <p:sp>
+        <p:nvSpPr>
+          <p:cNvPr id="35" name="Shape 33"/>
+          <p:cNvSpPr/>
+          <p:nvPr/>
+        </p:nvSpPr>
+        <p:spPr>
+          <a:xfrm>
+            <a:off x="457200" y="5001768"/>
+            <a:ext cx="11274552" cy="548640"/>
+          </a:xfrm>
+          <a:prstGeom prst="rect">
+            <a:avLst/>
+          </a:prstGeom>
+          <a:solidFill>
+            <a:srgbClr val="EFF4FA"/>
+          </a:solidFill>
+          <a:ln w="9525">
+            <a:solidFill>
+              <a:srgbClr val="D8E1EC"/>
+            </a:solidFill>
+            <a:prstDash val="solid"/>
+          </a:ln>
+        </p:spPr>
+      </p:sp>
+      <p:sp>
+        <p:nvSpPr>
+          <p:cNvPr id="36" name="Text 34"/>
+          <p:cNvSpPr/>
+          <p:nvPr/>
+        </p:nvSpPr>
+        <p:spPr>
+          <a:xfrm>
+            <a:off x="594360" y="5001768"/>
+            <a:ext cx="2194560" cy="548640"/>
+          </a:xfrm>
+          <a:prstGeom prst="rect">
+            <a:avLst/>
+          </a:prstGeom>
+          <a:noFill/>
+          <a:ln/>
+        </p:spPr>
+        <p:txBody>
+          <a:bodyPr wrap="square" lIns="0" tIns="0" rIns="0" bIns="0" rtlCol="0" anchor="ctr"/>
+          <a:lstStyle/>
+          <a:p>
+            <a:pPr indent="0" marL="0">
+              <a:buNone/>
+            </a:pPr>
+            <a:r>
+              <a:rPr lang="en-US" sz="1100" b="1" dirty="0">
+                <a:solidFill>
+                  <a:srgbClr val="1B2A4A"/>
+                </a:solidFill>
+                <a:latin typeface="Calibri" pitchFamily="34" charset="0"/>
+                <a:ea typeface="Calibri" pitchFamily="34" charset="-122"/>
+                <a:cs typeface="Calibri" pitchFamily="34" charset="-120"/>
+              </a:rPr>
+              <a:t>Keeping it configurable</a:t>
             </a:r>
             <a:endParaRPr lang="en-US" sz="1100" dirty="0"/>
           </a:p>
@@ -8308,61 +8336,147 @@
       </p:sp>
       <p:sp>
         <p:nvSpPr>
-          <p:cNvPr id="34" name="Shape 32"/>
-          <p:cNvSpPr/>
-          <p:nvPr/>
-        </p:nvSpPr>
-        <p:spPr>
-          <a:xfrm>
-            <a:off x="8330184" y="3054096"/>
-            <a:ext cx="118872" cy="118872"/>
-          </a:xfrm>
-          <a:prstGeom prst="ellipse">
-            <a:avLst/>
-          </a:prstGeom>
-          <a:solidFill>
-            <a:srgbClr val="13B5A6"/>
-          </a:solidFill>
-          <a:ln/>
-        </p:spPr>
-      </p:sp>
-      <p:sp>
-        <p:nvSpPr>
-          <p:cNvPr id="35" name="Text 33"/>
-          <p:cNvSpPr/>
-          <p:nvPr/>
-        </p:nvSpPr>
-        <p:spPr>
-          <a:xfrm>
-            <a:off x="8558784" y="2990088"/>
-            <a:ext cx="2971800" cy="713232"/>
-          </a:xfrm>
-          <a:prstGeom prst="rect">
-            <a:avLst/>
-          </a:prstGeom>
-          <a:noFill/>
-          <a:ln/>
-        </p:spPr>
-        <p:txBody>
-          <a:bodyPr wrap="square" lIns="0" tIns="0" rIns="0" bIns="0" rtlCol="0" anchor="t"/>
+          <p:cNvPr id="37" name="Text 35"/>
+          <p:cNvSpPr/>
+          <p:nvPr/>
+        </p:nvSpPr>
+        <p:spPr>
+          <a:xfrm>
+            <a:off x="2971800" y="5001768"/>
+            <a:ext cx="3794760" cy="548640"/>
+          </a:xfrm>
+          <a:prstGeom prst="rect">
+            <a:avLst/>
+          </a:prstGeom>
+          <a:noFill/>
+          <a:ln/>
+        </p:spPr>
+        <p:txBody>
+          <a:bodyPr wrap="square" lIns="0" tIns="0" rIns="0" bIns="0" rtlCol="0" anchor="ctr"/>
           <a:lstStyle/>
           <a:p>
             <a:pPr indent="0" marL="0">
               <a:lnSpc>
-                <a:spcPct val="98000"/>
+                <a:spcPct val="92000"/>
               </a:lnSpc>
               <a:buNone/>
             </a:pPr>
             <a:r>
-              <a:rPr lang="en-US" sz="1100" dirty="0">
-                <a:solidFill>
-                  <a:srgbClr val="6B7A8D"/>
-                </a:solidFill>
-                <a:latin typeface="Calibri" pitchFamily="34" charset="0"/>
-                <a:ea typeface="Calibri" pitchFamily="34" charset="-122"/>
-                <a:cs typeface="Calibri" pitchFamily="34" charset="-120"/>
-              </a:rPr>
-              <a:t>CPT (AMA) is a placeholder → your licence in production</a:t>
+              <a:rPr lang="en-US" sz="1000" dirty="0">
+                <a:solidFill>
+                  <a:srgbClr val="475569"/>
+                </a:solidFill>
+                <a:latin typeface="Calibri" pitchFamily="34" charset="0"/>
+                <a:ea typeface="Calibri" pitchFamily="34" charset="-122"/>
+                <a:cs typeface="Calibri" pitchFamily="34" charset="-120"/>
+              </a:rPr>
+              <a:t>settings baked into code  ·  settings in the database</a:t>
+            </a:r>
+            <a:endParaRPr lang="en-US" sz="1000" dirty="0"/>
+          </a:p>
+        </p:txBody>
+      </p:sp>
+      <p:sp>
+        <p:nvSpPr>
+          <p:cNvPr id="38" name="Text 36"/>
+          <p:cNvSpPr/>
+          <p:nvPr/>
+        </p:nvSpPr>
+        <p:spPr>
+          <a:xfrm>
+            <a:off x="6995160" y="5001768"/>
+            <a:ext cx="4645152" cy="548640"/>
+          </a:xfrm>
+          <a:prstGeom prst="rect">
+            <a:avLst/>
+          </a:prstGeom>
+          <a:noFill/>
+          <a:ln/>
+        </p:spPr>
+        <p:txBody>
+          <a:bodyPr wrap="square" lIns="0" tIns="0" rIns="0" bIns="0" rtlCol="0" anchor="ctr"/>
+          <a:lstStyle/>
+          <a:p>
+            <a:pPr indent="0" marL="0">
+              <a:lnSpc>
+                <a:spcPct val="92000"/>
+              </a:lnSpc>
+              <a:buNone/>
+            </a:pPr>
+            <a:r>
+              <a:rPr lang="en-US" sz="1000" dirty="0">
+                <a:solidFill>
+                  <a:srgbClr val="27313F"/>
+                </a:solidFill>
+                <a:latin typeface="Calibri" pitchFamily="34" charset="0"/>
+                <a:ea typeface="Calibri" pitchFamily="34" charset="-122"/>
+                <a:cs typeface="Calibri" pitchFamily="34" charset="-120"/>
+              </a:rPr>
+              <a:t>Thresholds, rules, SLAs, the knowledge graph and roles all change at runtime — no redeploy, no waiting on us.</a:t>
+            </a:r>
+            <a:endParaRPr lang="en-US" sz="1000" dirty="0"/>
+          </a:p>
+        </p:txBody>
+      </p:sp>
+      <p:sp>
+        <p:nvSpPr>
+          <p:cNvPr id="39" name="Shape 37"/>
+          <p:cNvSpPr/>
+          <p:nvPr/>
+        </p:nvSpPr>
+        <p:spPr>
+          <a:xfrm>
+            <a:off x="457200" y="5550408"/>
+            <a:ext cx="11274552" cy="548640"/>
+          </a:xfrm>
+          <a:prstGeom prst="rect">
+            <a:avLst/>
+          </a:prstGeom>
+          <a:solidFill>
+            <a:srgbClr val="FFFFFF"/>
+          </a:solidFill>
+          <a:ln w="9525">
+            <a:solidFill>
+              <a:srgbClr val="D8E1EC"/>
+            </a:solidFill>
+            <a:prstDash val="solid"/>
+          </a:ln>
+        </p:spPr>
+      </p:sp>
+      <p:sp>
+        <p:nvSpPr>
+          <p:cNvPr id="40" name="Text 38"/>
+          <p:cNvSpPr/>
+          <p:nvPr/>
+        </p:nvSpPr>
+        <p:spPr>
+          <a:xfrm>
+            <a:off x="594360" y="5550408"/>
+            <a:ext cx="2194560" cy="548640"/>
+          </a:xfrm>
+          <a:prstGeom prst="rect">
+            <a:avLst/>
+          </a:prstGeom>
+          <a:noFill/>
+          <a:ln/>
+        </p:spPr>
+        <p:txBody>
+          <a:bodyPr wrap="square" lIns="0" tIns="0" rIns="0" bIns="0" rtlCol="0" anchor="ctr"/>
+          <a:lstStyle/>
+          <a:p>
+            <a:pPr indent="0" marL="0">
+              <a:buNone/>
+            </a:pPr>
+            <a:r>
+              <a:rPr lang="en-US" sz="1100" b="1" dirty="0">
+                <a:solidFill>
+                  <a:srgbClr val="1B2A4A"/>
+                </a:solidFill>
+                <a:latin typeface="Calibri" pitchFamily="34" charset="0"/>
+                <a:ea typeface="Calibri" pitchFamily="34" charset="-122"/>
+                <a:cs typeface="Calibri" pitchFamily="34" charset="-120"/>
+              </a:rPr>
+              <a:t>Spending on the hard charts</a:t>
             </a:r>
             <a:endParaRPr lang="en-US" sz="1100" dirty="0"/>
           </a:p>
@@ -8370,196 +8484,75 @@
       </p:sp>
       <p:sp>
         <p:nvSpPr>
-          <p:cNvPr id="36" name="Shape 34"/>
-          <p:cNvSpPr/>
-          <p:nvPr/>
-        </p:nvSpPr>
-        <p:spPr>
-          <a:xfrm>
-            <a:off x="8330184" y="3803904"/>
-            <a:ext cx="118872" cy="118872"/>
-          </a:xfrm>
-          <a:prstGeom prst="ellipse">
-            <a:avLst/>
-          </a:prstGeom>
-          <a:solidFill>
-            <a:srgbClr val="13B5A6"/>
-          </a:solidFill>
-          <a:ln/>
-        </p:spPr>
-      </p:sp>
-      <p:sp>
-        <p:nvSpPr>
-          <p:cNvPr id="37" name="Text 35"/>
-          <p:cNvSpPr/>
-          <p:nvPr/>
-        </p:nvSpPr>
-        <p:spPr>
-          <a:xfrm>
-            <a:off x="8558784" y="3739896"/>
-            <a:ext cx="2971800" cy="713232"/>
-          </a:xfrm>
-          <a:prstGeom prst="rect">
-            <a:avLst/>
-          </a:prstGeom>
-          <a:noFill/>
-          <a:ln/>
-        </p:spPr>
-        <p:txBody>
-          <a:bodyPr wrap="square" lIns="0" tIns="0" rIns="0" bIns="0" rtlCol="0" anchor="t"/>
+          <p:cNvPr id="41" name="Text 39"/>
+          <p:cNvSpPr/>
+          <p:nvPr/>
+        </p:nvSpPr>
+        <p:spPr>
+          <a:xfrm>
+            <a:off x="2971800" y="5550408"/>
+            <a:ext cx="3794760" cy="548640"/>
+          </a:xfrm>
+          <a:prstGeom prst="rect">
+            <a:avLst/>
+          </a:prstGeom>
+          <a:noFill/>
+          <a:ln/>
+        </p:spPr>
+        <p:txBody>
+          <a:bodyPr wrap="square" lIns="0" tIns="0" rIns="0" bIns="0" rtlCol="0" anchor="ctr"/>
           <a:lstStyle/>
           <a:p>
             <a:pPr indent="0" marL="0">
               <a:lnSpc>
-                <a:spcPct val="98000"/>
+                <a:spcPct val="92000"/>
               </a:lnSpc>
               <a:buNone/>
             </a:pPr>
             <a:r>
-              <a:rPr lang="en-US" sz="1100" dirty="0">
-                <a:solidFill>
-                  <a:srgbClr val="6B7A8D"/>
-                </a:solidFill>
-                <a:latin typeface="Calibri" pitchFamily="34" charset="0"/>
-                <a:ea typeface="Calibri" pitchFamily="34" charset="-122"/>
-                <a:cs typeface="Calibri" pitchFamily="34" charset="-120"/>
-              </a:rPr>
-              <a:t>Ontology: a demo set → licensed SNOMED CT / UMLS</a:t>
-            </a:r>
-            <a:endParaRPr lang="en-US" sz="1100" dirty="0"/>
-          </a:p>
-        </p:txBody>
-      </p:sp>
-      <p:sp>
-        <p:nvSpPr>
-          <p:cNvPr id="38" name="Shape 36"/>
-          <p:cNvSpPr/>
-          <p:nvPr/>
-        </p:nvSpPr>
-        <p:spPr>
-          <a:xfrm>
-            <a:off x="8330184" y="4553712"/>
-            <a:ext cx="118872" cy="118872"/>
-          </a:xfrm>
-          <a:prstGeom prst="ellipse">
-            <a:avLst/>
-          </a:prstGeom>
-          <a:solidFill>
-            <a:srgbClr val="13B5A6"/>
-          </a:solidFill>
-          <a:ln/>
-        </p:spPr>
-      </p:sp>
-      <p:sp>
-        <p:nvSpPr>
-          <p:cNvPr id="39" name="Text 37"/>
-          <p:cNvSpPr/>
-          <p:nvPr/>
-        </p:nvSpPr>
-        <p:spPr>
-          <a:xfrm>
-            <a:off x="8558784" y="4489704"/>
-            <a:ext cx="2971800" cy="713232"/>
-          </a:xfrm>
-          <a:prstGeom prst="rect">
-            <a:avLst/>
-          </a:prstGeom>
-          <a:noFill/>
-          <a:ln/>
-        </p:spPr>
-        <p:txBody>
-          <a:bodyPr wrap="square" lIns="0" tIns="0" rIns="0" bIns="0" rtlCol="0" anchor="t"/>
+              <a:rPr lang="en-US" sz="1000" dirty="0">
+                <a:solidFill>
+                  <a:srgbClr val="475569"/>
+                </a:solidFill>
+                <a:latin typeface="Calibri" pitchFamily="34" charset="0"/>
+                <a:ea typeface="Calibri" pitchFamily="34" charset="-122"/>
+                <a:cs typeface="Calibri" pitchFamily="34" charset="-120"/>
+              </a:rPr>
+              <a:t>double-check everything  ·  never  ·  only when it's hard</a:t>
+            </a:r>
+            <a:endParaRPr lang="en-US" sz="1000" dirty="0"/>
+          </a:p>
+        </p:txBody>
+      </p:sp>
+      <p:sp>
+        <p:nvSpPr>
+          <p:cNvPr id="42" name="Text 40"/>
+          <p:cNvSpPr/>
+          <p:nvPr/>
+        </p:nvSpPr>
+        <p:spPr>
+          <a:xfrm>
+            <a:off x="6995160" y="5550408"/>
+            <a:ext cx="4645152" cy="548640"/>
+          </a:xfrm>
+          <a:prstGeom prst="rect">
+            <a:avLst/>
+          </a:prstGeom>
+          <a:noFill/>
+          <a:ln/>
+        </p:spPr>
+        <p:txBody>
+          <a:bodyPr wrap="square" lIns="0" tIns="0" rIns="0" bIns="0" rtlCol="0" anchor="ctr"/>
           <a:lstStyle/>
           <a:p>
             <a:pPr indent="0" marL="0">
               <a:lnSpc>
-                <a:spcPct val="98000"/>
+                <a:spcPct val="92000"/>
               </a:lnSpc>
               <a:buNone/>
             </a:pPr>
             <a:r>
-              <a:rPr lang="en-US" sz="1100" dirty="0">
-                <a:solidFill>
-                  <a:srgbClr val="6B7A8D"/>
-                </a:solidFill>
-                <a:latin typeface="Calibri" pitchFamily="34" charset="0"/>
-                <a:ea typeface="Calibri" pitchFamily="34" charset="-122"/>
-                <a:cs typeface="Calibri" pitchFamily="34" charset="-120"/>
-              </a:rPr>
-              <a:t>Same shapes throughout — it's a swap, not a rebuild</a:t>
-            </a:r>
-            <a:endParaRPr lang="en-US" sz="1100" dirty="0"/>
-          </a:p>
-        </p:txBody>
-      </p:sp>
-      <p:sp>
-        <p:nvSpPr>
-          <p:cNvPr id="40" name="Shape 38"/>
-          <p:cNvSpPr/>
-          <p:nvPr/>
-        </p:nvSpPr>
-        <p:spPr>
-          <a:xfrm>
-            <a:off x="457200" y="5623560"/>
-            <a:ext cx="11274552" cy="685800"/>
-          </a:xfrm>
-          <a:prstGeom prst="roundRect">
-            <a:avLst>
-              <a:gd name="adj" fmla="val 8000"/>
-            </a:avLst>
-          </a:prstGeom>
-          <a:solidFill>
-            <a:srgbClr val="EAF1F8"/>
-          </a:solidFill>
-          <a:ln/>
-        </p:spPr>
-      </p:sp>
-      <p:sp>
-        <p:nvSpPr>
-          <p:cNvPr id="41" name="Text 39"/>
-          <p:cNvSpPr/>
-          <p:nvPr/>
-        </p:nvSpPr>
-        <p:spPr>
-          <a:xfrm>
-            <a:off x="685800" y="5623560"/>
-            <a:ext cx="10881360" cy="685800"/>
-          </a:xfrm>
-          <a:prstGeom prst="rect">
-            <a:avLst/>
-          </a:prstGeom>
-          <a:noFill/>
-          <a:ln/>
-        </p:spPr>
-        <p:txBody>
-          <a:bodyPr wrap="square" lIns="0" tIns="0" rIns="0" bIns="0" rtlCol="0" anchor="ctr"/>
-          <a:lstStyle/>
-          <a:p>
-            <a:pPr indent="0" marL="0">
-              <a:lnSpc>
-                <a:spcPct val="98000"/>
-              </a:lnSpc>
-              <a:buNone/>
-            </a:pPr>
-            <a:r>
-              <a:rPr lang="en-US" sz="1100" b="1" dirty="0">
-                <a:solidFill>
-                  <a:srgbClr val="1B2A4A"/>
-                </a:solidFill>
-                <a:latin typeface="Calibri" pitchFamily="34" charset="0"/>
-                <a:ea typeface="Calibri" pitchFamily="34" charset="-122"/>
-                <a:cs typeface="Calibri" pitchFamily="34" charset="-120"/>
-              </a:rPr>
-              <a:t>Straight about what's demo-scale:  </a:t>
-            </a:r>
-            <a:pPr indent="0" marL="0">
-              <a:lnSpc>
-                <a:spcPct val="98000"/>
-              </a:lnSpc>
-              <a:buNone/>
-            </a:pPr>
-            <a:r>
-              <a:rPr lang="en-US" sz="1100" dirty="0">
+              <a:rPr lang="en-US" sz="1000" dirty="0">
                 <a:solidFill>
                   <a:srgbClr val="27313F"/>
                 </a:solidFill>
@@ -8567,15 +8560,15 @@
                 <a:ea typeface="Calibri" pitchFamily="34" charset="-122"/>
                 <a:cs typeface="Calibri" pitchFamily="34" charset="-120"/>
               </a:rPr>
-              <a:t>the mechanisms are real; the volume of gold charts, the model retraining and denial-prevention grow after the demo. Nothing is faked, and if the model isn't available it routes to a person rather than guess.</a:t>
-            </a:r>
-            <a:endParaRPr lang="en-US" sz="1100" dirty="0"/>
-          </a:p>
-        </p:txBody>
-      </p:sp>
-      <p:sp>
-        <p:nvSpPr>
-          <p:cNvPr id="42" name="Shape 40"/>
+              <a:t>Spend the extra effort only where it pays off — the ambiguous and multi-procedure charts.</a:t>
+            </a:r>
+            <a:endParaRPr lang="en-US" sz="1000" dirty="0"/>
+          </a:p>
+        </p:txBody>
+      </p:sp>
+      <p:sp>
+        <p:nvSpPr>
+          <p:cNvPr id="43" name="Shape 41"/>
           <p:cNvSpPr/>
           <p:nvPr/>
         </p:nvSpPr>
@@ -8595,7 +8588,7 @@
       </p:sp>
       <p:sp>
         <p:nvSpPr>
-          <p:cNvPr id="43" name="Text 41"/>
+          <p:cNvPr id="44" name="Text 42"/>
           <p:cNvSpPr/>
           <p:nvPr/>
         </p:nvSpPr>
@@ -8634,7 +8627,7 @@
       </p:sp>
       <p:sp>
         <p:nvSpPr>
-          <p:cNvPr id="44" name="Text 42"/>
+          <p:cNvPr id="45" name="Text 43"/>
           <p:cNvSpPr/>
           <p:nvPr/>
         </p:nvSpPr>
@@ -8673,7 +8666,7 @@
       </p:sp>
       <p:sp>
         <p:nvSpPr>
-          <p:cNvPr id="45" name="Text 43"/>
+          <p:cNvPr id="46" name="Text 44"/>
           <p:cNvSpPr/>
           <p:nvPr/>
         </p:nvSpPr>
@@ -8835,7 +8828,7 @@
                 <a:ea typeface="Calibri" pitchFamily="34" charset="-122"/>
                 <a:cs typeface="Calibri" pitchFamily="34" charset="-120"/>
               </a:rPr>
-              <a:t>ADOPTION PATH</a:t>
+              <a:t>SECURITY, DEPLOYMENT &amp; DATA</a:t>
             </a:r>
             <a:endParaRPr lang="en-US" sz="1100" dirty="0"/>
           </a:p>
@@ -8874,7 +8867,7 @@
                 <a:ea typeface="Georgia" pitchFamily="34" charset="-122"/>
                 <a:cs typeface="Georgia" pitchFamily="34" charset="-120"/>
               </a:rPr>
-              <a:t>Earn autonomy — don't assume it</a:t>
+              <a:t>Where it runs, what it protects, and the licensing reality</a:t>
             </a:r>
             <a:endParaRPr lang="en-US" sz="2300" dirty="0"/>
           </a:p>
@@ -8888,12 +8881,12 @@
         </p:nvSpPr>
         <p:spPr>
           <a:xfrm>
-            <a:off x="594360" y="1828800"/>
-            <a:ext cx="3520440" cy="2286000"/>
+            <a:off x="457200" y="1463040"/>
+            <a:ext cx="3630168" cy="4023360"/>
           </a:xfrm>
           <a:prstGeom prst="roundRect">
             <a:avLst>
-              <a:gd name="adj" fmla="val 2800"/>
+              <a:gd name="adj" fmla="val 1763"/>
             </a:avLst>
           </a:prstGeom>
           <a:solidFill>
@@ -8922,76 +8915,76 @@
         </p:nvSpPr>
         <p:spPr>
           <a:xfrm>
-            <a:off x="594360" y="1828800"/>
-            <a:ext cx="3520440" cy="109728"/>
-          </a:xfrm>
-          <a:prstGeom prst="rect">
-            <a:avLst/>
-          </a:prstGeom>
-          <a:solidFill>
-            <a:srgbClr val="64748B"/>
-          </a:solidFill>
-          <a:ln/>
-        </p:spPr>
-      </p:sp>
-      <p:sp>
-        <p:nvSpPr>
-          <p:cNvPr id="9" name="Shape 7"/>
-          <p:cNvSpPr/>
-          <p:nvPr/>
-        </p:nvSpPr>
-        <p:spPr>
-          <a:xfrm>
-            <a:off x="1943100" y="2194560"/>
-            <a:ext cx="822960" cy="822960"/>
+            <a:off x="457200" y="1463040"/>
+            <a:ext cx="3630168" cy="566928"/>
+          </a:xfrm>
+          <a:prstGeom prst="rect">
+            <a:avLst/>
+          </a:prstGeom>
+          <a:solidFill>
+            <a:srgbClr val="1B2A4A"/>
+          </a:solidFill>
+          <a:ln/>
+        </p:spPr>
+      </p:sp>
+      <p:sp>
+        <p:nvSpPr>
+          <p:cNvPr id="9" name="Text 7"/>
+          <p:cNvSpPr/>
+          <p:nvPr/>
+        </p:nvSpPr>
+        <p:spPr>
+          <a:xfrm>
+            <a:off x="640080" y="1463040"/>
+            <a:ext cx="3264408" cy="566928"/>
+          </a:xfrm>
+          <a:prstGeom prst="rect">
+            <a:avLst/>
+          </a:prstGeom>
+          <a:noFill/>
+          <a:ln/>
+        </p:spPr>
+        <p:txBody>
+          <a:bodyPr wrap="square" lIns="0" tIns="0" rIns="0" bIns="0" rtlCol="0" anchor="ctr"/>
+          <a:lstStyle/>
+          <a:p>
+            <a:pPr indent="0" marL="0">
+              <a:buNone/>
+            </a:pPr>
+            <a:r>
+              <a:rPr lang="en-US" sz="1350" b="1" dirty="0">
+                <a:solidFill>
+                  <a:srgbClr val="FFFFFF"/>
+                </a:solidFill>
+                <a:latin typeface="Calibri" pitchFamily="34" charset="0"/>
+                <a:ea typeface="Calibri" pitchFamily="34" charset="-122"/>
+                <a:cs typeface="Calibri" pitchFamily="34" charset="-120"/>
+              </a:rPr>
+              <a:t>Where it runs</a:t>
+            </a:r>
+            <a:endParaRPr lang="en-US" sz="1350" dirty="0"/>
+          </a:p>
+        </p:txBody>
+      </p:sp>
+      <p:sp>
+        <p:nvSpPr>
+          <p:cNvPr id="10" name="Shape 8"/>
+          <p:cNvSpPr/>
+          <p:nvPr/>
+        </p:nvSpPr>
+        <p:spPr>
+          <a:xfrm>
+            <a:off x="685800" y="2304288"/>
+            <a:ext cx="118872" cy="118872"/>
           </a:xfrm>
           <a:prstGeom prst="ellipse">
             <a:avLst/>
           </a:prstGeom>
           <a:solidFill>
-            <a:srgbClr val="64748B"/>
-          </a:solidFill>
-          <a:ln/>
-        </p:spPr>
-      </p:sp>
-      <p:sp>
-        <p:nvSpPr>
-          <p:cNvPr id="10" name="Text 8"/>
-          <p:cNvSpPr/>
-          <p:nvPr/>
-        </p:nvSpPr>
-        <p:spPr>
-          <a:xfrm>
-            <a:off x="1943100" y="2194560"/>
-            <a:ext cx="822960" cy="822960"/>
-          </a:xfrm>
-          <a:prstGeom prst="rect">
-            <a:avLst/>
-          </a:prstGeom>
-          <a:noFill/>
-          <a:ln/>
-        </p:spPr>
-        <p:txBody>
-          <a:bodyPr wrap="square" lIns="0" tIns="0" rIns="0" bIns="0" rtlCol="0" anchor="ctr"/>
-          <a:lstStyle/>
-          <a:p>
-            <a:pPr algn="ctr" indent="0" marL="0">
-              <a:buNone/>
-            </a:pPr>
-            <a:r>
-              <a:rPr lang="en-US" sz="2600" b="1" dirty="0">
-                <a:solidFill>
-                  <a:srgbClr val="FFFFFF"/>
-                </a:solidFill>
-                <a:latin typeface="Georgia" pitchFamily="34" charset="0"/>
-                <a:ea typeface="Georgia" pitchFamily="34" charset="-122"/>
-                <a:cs typeface="Georgia" pitchFamily="34" charset="-120"/>
-              </a:rPr>
-              <a:t>1</a:t>
-            </a:r>
-            <a:endParaRPr lang="en-US" sz="2600" dirty="0"/>
-          </a:p>
-        </p:txBody>
+            <a:srgbClr val="1B2A4A"/>
+          </a:solidFill>
+          <a:ln/>
+        </p:spPr>
       </p:sp>
       <p:sp>
         <p:nvSpPr>
@@ -9001,47 +8994,8 @@
         </p:nvSpPr>
         <p:spPr>
           <a:xfrm>
-            <a:off x="777240" y="3108960"/>
-            <a:ext cx="3154680" cy="365760"/>
-          </a:xfrm>
-          <a:prstGeom prst="rect">
-            <a:avLst/>
-          </a:prstGeom>
-          <a:noFill/>
-          <a:ln/>
-        </p:spPr>
-        <p:txBody>
-          <a:bodyPr wrap="square" lIns="0" tIns="0" rIns="0" bIns="0" rtlCol="0" anchor="ctr"/>
-          <a:lstStyle/>
-          <a:p>
-            <a:pPr algn="ctr" indent="0" marL="0">
-              <a:buNone/>
-            </a:pPr>
-            <a:r>
-              <a:rPr lang="en-US" sz="1600" b="1" dirty="0">
-                <a:solidFill>
-                  <a:srgbClr val="1B2A4A"/>
-                </a:solidFill>
-                <a:latin typeface="Calibri" pitchFamily="34" charset="0"/>
-                <a:ea typeface="Calibri" pitchFamily="34" charset="-122"/>
-                <a:cs typeface="Calibri" pitchFamily="34" charset="-120"/>
-              </a:rPr>
-              <a:t>Shadow</a:t>
-            </a:r>
-            <a:endParaRPr lang="en-US" sz="1600" dirty="0"/>
-          </a:p>
-        </p:txBody>
-      </p:sp>
-      <p:sp>
-        <p:nvSpPr>
-          <p:cNvPr id="12" name="Text 10"/>
-          <p:cNvSpPr/>
-          <p:nvPr/>
-        </p:nvSpPr>
-        <p:spPr>
-          <a:xfrm>
-            <a:off x="822960" y="3493008"/>
-            <a:ext cx="3063240" cy="548640"/>
+            <a:off x="914400" y="2240280"/>
+            <a:ext cx="2971800" cy="713232"/>
           </a:xfrm>
           <a:prstGeom prst="rect">
             <a:avLst/>
@@ -9053,14 +9007,14 @@
           <a:bodyPr wrap="square" lIns="0" tIns="0" rIns="0" bIns="0" rtlCol="0" anchor="t"/>
           <a:lstStyle/>
           <a:p>
-            <a:pPr algn="ctr" indent="0" marL="0">
+            <a:pPr indent="0" marL="0">
               <a:lnSpc>
-                <a:spcPct val="100000"/>
+                <a:spcPct val="98000"/>
               </a:lnSpc>
               <a:buNone/>
             </a:pPr>
             <a:r>
-              <a:rPr lang="en-US" sz="1080" dirty="0">
+              <a:rPr lang="en-US" sz="1100" dirty="0">
                 <a:solidFill>
                   <a:srgbClr val="6B7A8D"/>
                 </a:solidFill>
@@ -9068,35 +9022,73 @@
                 <a:ea typeface="Calibri" pitchFamily="34" charset="-122"/>
                 <a:cs typeface="Calibri" pitchFamily="34" charset="-120"/>
               </a:rPr>
-              <a:t>ACE codes next to your coders while humans check everything. We calibrate, build the gold set, and prove the accuracy.</a:t>
-            </a:r>
-            <a:endParaRPr lang="en-US" sz="1080" dirty="0"/>
-          </a:p>
-        </p:txBody>
-      </p:sp>
-      <p:sp>
-        <p:nvSpPr>
-          <p:cNvPr id="13" name="Shape 11"/>
-          <p:cNvSpPr/>
-          <p:nvPr/>
-        </p:nvSpPr>
-        <p:spPr>
-          <a:xfrm>
-            <a:off x="4178808" y="2971800"/>
-            <a:ext cx="329184" cy="0"/>
-          </a:xfrm>
-          <a:prstGeom prst="line">
-            <a:avLst/>
-          </a:prstGeom>
-          <a:noFill/>
-          <a:ln w="27940">
-            <a:solidFill>
-              <a:srgbClr val="13B5A6"/>
-            </a:solidFill>
-            <a:prstDash val="solid"/>
-            <a:tailEnd type="triangle"/>
-          </a:ln>
-        </p:spPr>
+              <a:t>Azure + Azure AI Foundry, US-region</a:t>
+            </a:r>
+            <a:endParaRPr lang="en-US" sz="1100" dirty="0"/>
+          </a:p>
+        </p:txBody>
+      </p:sp>
+      <p:sp>
+        <p:nvSpPr>
+          <p:cNvPr id="12" name="Shape 10"/>
+          <p:cNvSpPr/>
+          <p:nvPr/>
+        </p:nvSpPr>
+        <p:spPr>
+          <a:xfrm>
+            <a:off x="685800" y="3054096"/>
+            <a:ext cx="118872" cy="118872"/>
+          </a:xfrm>
+          <a:prstGeom prst="ellipse">
+            <a:avLst/>
+          </a:prstGeom>
+          <a:solidFill>
+            <a:srgbClr val="1B2A4A"/>
+          </a:solidFill>
+          <a:ln/>
+        </p:spPr>
+      </p:sp>
+      <p:sp>
+        <p:nvSpPr>
+          <p:cNvPr id="13" name="Text 11"/>
+          <p:cNvSpPr/>
+          <p:nvPr/>
+        </p:nvSpPr>
+        <p:spPr>
+          <a:xfrm>
+            <a:off x="914400" y="2990088"/>
+            <a:ext cx="2971800" cy="713232"/>
+          </a:xfrm>
+          <a:prstGeom prst="rect">
+            <a:avLst/>
+          </a:prstGeom>
+          <a:noFill/>
+          <a:ln/>
+        </p:spPr>
+        <p:txBody>
+          <a:bodyPr wrap="square" lIns="0" tIns="0" rIns="0" bIns="0" rtlCol="0" anchor="t"/>
+          <a:lstStyle/>
+          <a:p>
+            <a:pPr indent="0" marL="0">
+              <a:lnSpc>
+                <a:spcPct val="98000"/>
+              </a:lnSpc>
+              <a:buNone/>
+            </a:pPr>
+            <a:r>
+              <a:rPr lang="en-US" sz="1100" dirty="0">
+                <a:solidFill>
+                  <a:srgbClr val="6B7A8D"/>
+                </a:solidFill>
+                <a:latin typeface="Calibri" pitchFamily="34" charset="0"/>
+                <a:ea typeface="Calibri" pitchFamily="34" charset="-122"/>
+                <a:cs typeface="Calibri" pitchFamily="34" charset="-120"/>
+              </a:rPr>
+              <a:t>Multi-tenant, with strict separation between clients</a:t>
+            </a:r>
+            <a:endParaRPr lang="en-US" sz="1100" dirty="0"/>
+          </a:p>
+        </p:txBody>
       </p:sp>
       <p:sp>
         <p:nvSpPr>
@@ -9106,12 +9098,136 @@
         </p:nvSpPr>
         <p:spPr>
           <a:xfrm>
-            <a:off x="4572000" y="1828800"/>
-            <a:ext cx="3520440" cy="2286000"/>
+            <a:off x="685800" y="3803904"/>
+            <a:ext cx="118872" cy="118872"/>
+          </a:xfrm>
+          <a:prstGeom prst="ellipse">
+            <a:avLst/>
+          </a:prstGeom>
+          <a:solidFill>
+            <a:srgbClr val="1B2A4A"/>
+          </a:solidFill>
+          <a:ln/>
+        </p:spPr>
+      </p:sp>
+      <p:sp>
+        <p:nvSpPr>
+          <p:cNvPr id="15" name="Text 13"/>
+          <p:cNvSpPr/>
+          <p:nvPr/>
+        </p:nvSpPr>
+        <p:spPr>
+          <a:xfrm>
+            <a:off x="914400" y="3739896"/>
+            <a:ext cx="2971800" cy="713232"/>
+          </a:xfrm>
+          <a:prstGeom prst="rect">
+            <a:avLst/>
+          </a:prstGeom>
+          <a:noFill/>
+          <a:ln/>
+        </p:spPr>
+        <p:txBody>
+          <a:bodyPr wrap="square" lIns="0" tIns="0" rIns="0" bIns="0" rtlCol="0" anchor="t"/>
+          <a:lstStyle/>
+          <a:p>
+            <a:pPr indent="0" marL="0">
+              <a:lnSpc>
+                <a:spcPct val="98000"/>
+              </a:lnSpc>
+              <a:buNone/>
+            </a:pPr>
+            <a:r>
+              <a:rPr lang="en-US" sz="1100" dirty="0">
+                <a:solidFill>
+                  <a:srgbClr val="6B7A8D"/>
+                </a:solidFill>
+                <a:latin typeface="Calibri" pitchFamily="34" charset="0"/>
+                <a:ea typeface="Calibri" pitchFamily="34" charset="-122"/>
+                <a:cs typeface="Calibri" pitchFamily="34" charset="-120"/>
+              </a:rPr>
+              <a:t>Docker today → AKS / container apps in the cloud</a:t>
+            </a:r>
+            <a:endParaRPr lang="en-US" sz="1100" dirty="0"/>
+          </a:p>
+        </p:txBody>
+      </p:sp>
+      <p:sp>
+        <p:nvSpPr>
+          <p:cNvPr id="16" name="Shape 14"/>
+          <p:cNvSpPr/>
+          <p:nvPr/>
+        </p:nvSpPr>
+        <p:spPr>
+          <a:xfrm>
+            <a:off x="685800" y="4553712"/>
+            <a:ext cx="118872" cy="118872"/>
+          </a:xfrm>
+          <a:prstGeom prst="ellipse">
+            <a:avLst/>
+          </a:prstGeom>
+          <a:solidFill>
+            <a:srgbClr val="1B2A4A"/>
+          </a:solidFill>
+          <a:ln/>
+        </p:spPr>
+      </p:sp>
+      <p:sp>
+        <p:nvSpPr>
+          <p:cNvPr id="17" name="Text 15"/>
+          <p:cNvSpPr/>
+          <p:nvPr/>
+        </p:nvSpPr>
+        <p:spPr>
+          <a:xfrm>
+            <a:off x="914400" y="4489704"/>
+            <a:ext cx="2971800" cy="713232"/>
+          </a:xfrm>
+          <a:prstGeom prst="rect">
+            <a:avLst/>
+          </a:prstGeom>
+          <a:noFill/>
+          <a:ln/>
+        </p:spPr>
+        <p:txBody>
+          <a:bodyPr wrap="square" lIns="0" tIns="0" rIns="0" bIns="0" rtlCol="0" anchor="t"/>
+          <a:lstStyle/>
+          <a:p>
+            <a:pPr indent="0" marL="0">
+              <a:lnSpc>
+                <a:spcPct val="98000"/>
+              </a:lnSpc>
+              <a:buNone/>
+            </a:pPr>
+            <a:r>
+              <a:rPr lang="en-US" sz="1100" dirty="0">
+                <a:solidFill>
+                  <a:srgbClr val="6B7A8D"/>
+                </a:solidFill>
+                <a:latin typeface="Calibri" pitchFamily="34" charset="0"/>
+                <a:ea typeface="Calibri" pitchFamily="34" charset="-122"/>
+                <a:cs typeface="Calibri" pitchFamily="34" charset="-120"/>
+              </a:rPr>
+              <a:t>A path to smaller in-region models for cost &amp; residency</a:t>
+            </a:r>
+            <a:endParaRPr lang="en-US" sz="1100" dirty="0"/>
+          </a:p>
+        </p:txBody>
+      </p:sp>
+      <p:sp>
+        <p:nvSpPr>
+          <p:cNvPr id="18" name="Shape 16"/>
+          <p:cNvSpPr/>
+          <p:nvPr/>
+        </p:nvSpPr>
+        <p:spPr>
+          <a:xfrm>
+            <a:off x="4279392" y="1463040"/>
+            <a:ext cx="3630168" cy="4023360"/>
           </a:xfrm>
           <a:prstGeom prst="roundRect">
             <a:avLst>
-              <a:gd name="adj" fmla="val 2800"/>
+              <a:gd name="adj" fmla="val 1763"/>
             </a:avLst>
           </a:prstGeom>
           <a:solidFill>
@@ -9134,14 +9250,14 @@
       </p:sp>
       <p:sp>
         <p:nvSpPr>
-          <p:cNvPr id="15" name="Shape 13"/>
-          <p:cNvSpPr/>
-          <p:nvPr/>
-        </p:nvSpPr>
-        <p:spPr>
-          <a:xfrm>
-            <a:off x="4572000" y="1828800"/>
-            <a:ext cx="3520440" cy="109728"/>
+          <p:cNvPr id="19" name="Shape 17"/>
+          <p:cNvSpPr/>
+          <p:nvPr/>
+        </p:nvSpPr>
+        <p:spPr>
+          <a:xfrm>
+            <a:off x="4279392" y="1463040"/>
+            <a:ext cx="3630168" cy="566928"/>
           </a:xfrm>
           <a:prstGeom prst="rect">
             <a:avLst/>
@@ -9154,14 +9270,53 @@
       </p:sp>
       <p:sp>
         <p:nvSpPr>
-          <p:cNvPr id="16" name="Shape 14"/>
-          <p:cNvSpPr/>
-          <p:nvPr/>
-        </p:nvSpPr>
-        <p:spPr>
-          <a:xfrm>
-            <a:off x="5920740" y="2194560"/>
-            <a:ext cx="822960" cy="822960"/>
+          <p:cNvPr id="20" name="Text 18"/>
+          <p:cNvSpPr/>
+          <p:nvPr/>
+        </p:nvSpPr>
+        <p:spPr>
+          <a:xfrm>
+            <a:off x="4462272" y="1463040"/>
+            <a:ext cx="3264408" cy="566928"/>
+          </a:xfrm>
+          <a:prstGeom prst="rect">
+            <a:avLst/>
+          </a:prstGeom>
+          <a:noFill/>
+          <a:ln/>
+        </p:spPr>
+        <p:txBody>
+          <a:bodyPr wrap="square" lIns="0" tIns="0" rIns="0" bIns="0" rtlCol="0" anchor="ctr"/>
+          <a:lstStyle/>
+          <a:p>
+            <a:pPr indent="0" marL="0">
+              <a:buNone/>
+            </a:pPr>
+            <a:r>
+              <a:rPr lang="en-US" sz="1350" b="1" dirty="0">
+                <a:solidFill>
+                  <a:srgbClr val="FFFFFF"/>
+                </a:solidFill>
+                <a:latin typeface="Calibri" pitchFamily="34" charset="0"/>
+                <a:ea typeface="Calibri" pitchFamily="34" charset="-122"/>
+                <a:cs typeface="Calibri" pitchFamily="34" charset="-120"/>
+              </a:rPr>
+              <a:t>What it protects</a:t>
+            </a:r>
+            <a:endParaRPr lang="en-US" sz="1350" dirty="0"/>
+          </a:p>
+        </p:txBody>
+      </p:sp>
+      <p:sp>
+        <p:nvSpPr>
+          <p:cNvPr id="21" name="Shape 19"/>
+          <p:cNvSpPr/>
+          <p:nvPr/>
+        </p:nvSpPr>
+        <p:spPr>
+          <a:xfrm>
+            <a:off x="4507992" y="2304288"/>
+            <a:ext cx="118872" cy="118872"/>
           </a:xfrm>
           <a:prstGeom prst="ellipse">
             <a:avLst/>
@@ -9174,92 +9329,14 @@
       </p:sp>
       <p:sp>
         <p:nvSpPr>
-          <p:cNvPr id="17" name="Text 15"/>
-          <p:cNvSpPr/>
-          <p:nvPr/>
-        </p:nvSpPr>
-        <p:spPr>
-          <a:xfrm>
-            <a:off x="5920740" y="2194560"/>
-            <a:ext cx="822960" cy="822960"/>
-          </a:xfrm>
-          <a:prstGeom prst="rect">
-            <a:avLst/>
-          </a:prstGeom>
-          <a:noFill/>
-          <a:ln/>
-        </p:spPr>
-        <p:txBody>
-          <a:bodyPr wrap="square" lIns="0" tIns="0" rIns="0" bIns="0" rtlCol="0" anchor="ctr"/>
-          <a:lstStyle/>
-          <a:p>
-            <a:pPr algn="ctr" indent="0" marL="0">
-              <a:buNone/>
-            </a:pPr>
-            <a:r>
-              <a:rPr lang="en-US" sz="2600" b="1" dirty="0">
-                <a:solidFill>
-                  <a:srgbClr val="FFFFFF"/>
-                </a:solidFill>
-                <a:latin typeface="Georgia" pitchFamily="34" charset="0"/>
-                <a:ea typeface="Georgia" pitchFamily="34" charset="-122"/>
-                <a:cs typeface="Georgia" pitchFamily="34" charset="-120"/>
-              </a:rPr>
-              <a:t>2</a:t>
-            </a:r>
-            <a:endParaRPr lang="en-US" sz="2600" dirty="0"/>
-          </a:p>
-        </p:txBody>
-      </p:sp>
-      <p:sp>
-        <p:nvSpPr>
-          <p:cNvPr id="18" name="Text 16"/>
-          <p:cNvSpPr/>
-          <p:nvPr/>
-        </p:nvSpPr>
-        <p:spPr>
-          <a:xfrm>
-            <a:off x="4754880" y="3108960"/>
-            <a:ext cx="3154680" cy="365760"/>
-          </a:xfrm>
-          <a:prstGeom prst="rect">
-            <a:avLst/>
-          </a:prstGeom>
-          <a:noFill/>
-          <a:ln/>
-        </p:spPr>
-        <p:txBody>
-          <a:bodyPr wrap="square" lIns="0" tIns="0" rIns="0" bIns="0" rtlCol="0" anchor="ctr"/>
-          <a:lstStyle/>
-          <a:p>
-            <a:pPr algn="ctr" indent="0" marL="0">
-              <a:buNone/>
-            </a:pPr>
-            <a:r>
-              <a:rPr lang="en-US" sz="1600" b="1" dirty="0">
-                <a:solidFill>
-                  <a:srgbClr val="1B2A4A"/>
-                </a:solidFill>
-                <a:latin typeface="Calibri" pitchFamily="34" charset="0"/>
-                <a:ea typeface="Calibri" pitchFamily="34" charset="-122"/>
-                <a:cs typeface="Calibri" pitchFamily="34" charset="-120"/>
-              </a:rPr>
-              <a:t>Pilot</a:t>
-            </a:r>
-            <a:endParaRPr lang="en-US" sz="1600" dirty="0"/>
-          </a:p>
-        </p:txBody>
-      </p:sp>
-      <p:sp>
-        <p:nvSpPr>
-          <p:cNvPr id="19" name="Text 17"/>
-          <p:cNvSpPr/>
-          <p:nvPr/>
-        </p:nvSpPr>
-        <p:spPr>
-          <a:xfrm>
-            <a:off x="4800600" y="3493008"/>
-            <a:ext cx="3063240" cy="548640"/>
+          <p:cNvPr id="22" name="Text 20"/>
+          <p:cNvSpPr/>
+          <p:nvPr/>
+        </p:nvSpPr>
+        <p:spPr>
+          <a:xfrm>
+            <a:off x="4736592" y="2240280"/>
+            <a:ext cx="2971800" cy="713232"/>
           </a:xfrm>
           <a:prstGeom prst="rect">
             <a:avLst/>
@@ -9271,14 +9348,14 @@
           <a:bodyPr wrap="square" lIns="0" tIns="0" rIns="0" bIns="0" rtlCol="0" anchor="t"/>
           <a:lstStyle/>
           <a:p>
-            <a:pPr algn="ctr" indent="0" marL="0">
+            <a:pPr indent="0" marL="0">
               <a:lnSpc>
-                <a:spcPct val="100000"/>
+                <a:spcPct val="98000"/>
               </a:lnSpc>
               <a:buNone/>
             </a:pPr>
             <a:r>
-              <a:rPr lang="en-US" sz="1080" dirty="0">
+              <a:rPr lang="en-US" sz="1100" dirty="0">
                 <a:solidFill>
                   <a:srgbClr val="6B7A8D"/>
                 </a:solidFill>
@@ -9286,50 +9363,212 @@
                 <a:ea typeface="Calibri" pitchFamily="34" charset="-122"/>
                 <a:cs typeface="Calibri" pitchFamily="34" charset="-120"/>
               </a:rPr>
-              <a:t>Turn on auto-billing for the high-confidence lane. QA sampling eases off as the model keeps holding its numbers.</a:t>
-            </a:r>
-            <a:endParaRPr lang="en-US" sz="1080" dirty="0"/>
-          </a:p>
-        </p:txBody>
-      </p:sp>
-      <p:sp>
-        <p:nvSpPr>
-          <p:cNvPr id="20" name="Shape 18"/>
-          <p:cNvSpPr/>
-          <p:nvPr/>
-        </p:nvSpPr>
-        <p:spPr>
-          <a:xfrm>
-            <a:off x="8156448" y="2971800"/>
-            <a:ext cx="329184" cy="0"/>
-          </a:xfrm>
-          <a:prstGeom prst="line">
-            <a:avLst/>
-          </a:prstGeom>
-          <a:noFill/>
-          <a:ln w="27940">
-            <a:solidFill>
-              <a:srgbClr val="13B5A6"/>
-            </a:solidFill>
-            <a:prstDash val="solid"/>
-            <a:tailEnd type="triangle"/>
-          </a:ln>
-        </p:spPr>
-      </p:sp>
-      <p:sp>
-        <p:nvSpPr>
-          <p:cNvPr id="21" name="Shape 19"/>
-          <p:cNvSpPr/>
-          <p:nvPr/>
-        </p:nvSpPr>
-        <p:spPr>
-          <a:xfrm>
-            <a:off x="8549640" y="1828800"/>
-            <a:ext cx="3520440" cy="2286000"/>
+              <a:t>Demo data is synthetic — no real patient information</a:t>
+            </a:r>
+            <a:endParaRPr lang="en-US" sz="1100" dirty="0"/>
+          </a:p>
+        </p:txBody>
+      </p:sp>
+      <p:sp>
+        <p:nvSpPr>
+          <p:cNvPr id="23" name="Shape 21"/>
+          <p:cNvSpPr/>
+          <p:nvPr/>
+        </p:nvSpPr>
+        <p:spPr>
+          <a:xfrm>
+            <a:off x="4507992" y="3054096"/>
+            <a:ext cx="118872" cy="118872"/>
+          </a:xfrm>
+          <a:prstGeom prst="ellipse">
+            <a:avLst/>
+          </a:prstGeom>
+          <a:solidFill>
+            <a:srgbClr val="0E8C81"/>
+          </a:solidFill>
+          <a:ln/>
+        </p:spPr>
+      </p:sp>
+      <p:sp>
+        <p:nvSpPr>
+          <p:cNvPr id="24" name="Text 22"/>
+          <p:cNvSpPr/>
+          <p:nvPr/>
+        </p:nvSpPr>
+        <p:spPr>
+          <a:xfrm>
+            <a:off x="4736592" y="2990088"/>
+            <a:ext cx="2971800" cy="713232"/>
+          </a:xfrm>
+          <a:prstGeom prst="rect">
+            <a:avLst/>
+          </a:prstGeom>
+          <a:noFill/>
+          <a:ln/>
+        </p:spPr>
+        <p:txBody>
+          <a:bodyPr wrap="square" lIns="0" tIns="0" rIns="0" bIns="0" rtlCol="0" anchor="t"/>
+          <a:lstStyle/>
+          <a:p>
+            <a:pPr indent="0" marL="0">
+              <a:lnSpc>
+                <a:spcPct val="98000"/>
+              </a:lnSpc>
+              <a:buNone/>
+            </a:pPr>
+            <a:r>
+              <a:rPr lang="en-US" sz="1100" dirty="0">
+                <a:solidFill>
+                  <a:srgbClr val="6B7A8D"/>
+                </a:solidFill>
+                <a:latin typeface="Calibri" pitchFamily="34" charset="0"/>
+                <a:ea typeface="Calibri" pitchFamily="34" charset="-122"/>
+                <a:cs typeface="Calibri" pitchFamily="34" charset="-120"/>
+              </a:rPr>
+              <a:t>One secret (the model key), kept out of source control</a:t>
+            </a:r>
+            <a:endParaRPr lang="en-US" sz="1100" dirty="0"/>
+          </a:p>
+        </p:txBody>
+      </p:sp>
+      <p:sp>
+        <p:nvSpPr>
+          <p:cNvPr id="25" name="Shape 23"/>
+          <p:cNvSpPr/>
+          <p:nvPr/>
+        </p:nvSpPr>
+        <p:spPr>
+          <a:xfrm>
+            <a:off x="4507992" y="3803904"/>
+            <a:ext cx="118872" cy="118872"/>
+          </a:xfrm>
+          <a:prstGeom prst="ellipse">
+            <a:avLst/>
+          </a:prstGeom>
+          <a:solidFill>
+            <a:srgbClr val="0E8C81"/>
+          </a:solidFill>
+          <a:ln/>
+        </p:spPr>
+      </p:sp>
+      <p:sp>
+        <p:nvSpPr>
+          <p:cNvPr id="26" name="Text 24"/>
+          <p:cNvSpPr/>
+          <p:nvPr/>
+        </p:nvSpPr>
+        <p:spPr>
+          <a:xfrm>
+            <a:off x="4736592" y="3739896"/>
+            <a:ext cx="2971800" cy="713232"/>
+          </a:xfrm>
+          <a:prstGeom prst="rect">
+            <a:avLst/>
+          </a:prstGeom>
+          <a:noFill/>
+          <a:ln/>
+        </p:spPr>
+        <p:txBody>
+          <a:bodyPr wrap="square" lIns="0" tIns="0" rIns="0" bIns="0" rtlCol="0" anchor="t"/>
+          <a:lstStyle/>
+          <a:p>
+            <a:pPr indent="0" marL="0">
+              <a:lnSpc>
+                <a:spcPct val="98000"/>
+              </a:lnSpc>
+              <a:buNone/>
+            </a:pPr>
+            <a:r>
+              <a:rPr lang="en-US" sz="1100" dirty="0">
+                <a:solidFill>
+                  <a:srgbClr val="6B7A8D"/>
+                </a:solidFill>
+                <a:latin typeface="Calibri" pitchFamily="34" charset="0"/>
+                <a:ea typeface="Calibri" pitchFamily="34" charset="-122"/>
+                <a:cs typeface="Calibri" pitchFamily="34" charset="-120"/>
+              </a:rPr>
+              <a:t>A full audit trail and an admin change log</a:t>
+            </a:r>
+            <a:endParaRPr lang="en-US" sz="1100" dirty="0"/>
+          </a:p>
+        </p:txBody>
+      </p:sp>
+      <p:sp>
+        <p:nvSpPr>
+          <p:cNvPr id="27" name="Shape 25"/>
+          <p:cNvSpPr/>
+          <p:nvPr/>
+        </p:nvSpPr>
+        <p:spPr>
+          <a:xfrm>
+            <a:off x="4507992" y="4553712"/>
+            <a:ext cx="118872" cy="118872"/>
+          </a:xfrm>
+          <a:prstGeom prst="ellipse">
+            <a:avLst/>
+          </a:prstGeom>
+          <a:solidFill>
+            <a:srgbClr val="0E8C81"/>
+          </a:solidFill>
+          <a:ln/>
+        </p:spPr>
+      </p:sp>
+      <p:sp>
+        <p:nvSpPr>
+          <p:cNvPr id="28" name="Text 26"/>
+          <p:cNvSpPr/>
+          <p:nvPr/>
+        </p:nvSpPr>
+        <p:spPr>
+          <a:xfrm>
+            <a:off x="4736592" y="4489704"/>
+            <a:ext cx="2971800" cy="713232"/>
+          </a:xfrm>
+          <a:prstGeom prst="rect">
+            <a:avLst/>
+          </a:prstGeom>
+          <a:noFill/>
+          <a:ln/>
+        </p:spPr>
+        <p:txBody>
+          <a:bodyPr wrap="square" lIns="0" tIns="0" rIns="0" bIns="0" rtlCol="0" anchor="t"/>
+          <a:lstStyle/>
+          <a:p>
+            <a:pPr indent="0" marL="0">
+              <a:lnSpc>
+                <a:spcPct val="98000"/>
+              </a:lnSpc>
+              <a:buNone/>
+            </a:pPr>
+            <a:r>
+              <a:rPr lang="en-US" sz="1100" dirty="0">
+                <a:solidFill>
+                  <a:srgbClr val="6B7A8D"/>
+                </a:solidFill>
+                <a:latin typeface="Calibri" pitchFamily="34" charset="0"/>
+                <a:ea typeface="Calibri" pitchFamily="34" charset="-122"/>
+                <a:cs typeface="Calibri" pitchFamily="34" charset="-120"/>
+              </a:rPr>
+              <a:t>SOC 2 controls and encryption at deployment</a:t>
+            </a:r>
+            <a:endParaRPr lang="en-US" sz="1100" dirty="0"/>
+          </a:p>
+        </p:txBody>
+      </p:sp>
+      <p:sp>
+        <p:nvSpPr>
+          <p:cNvPr id="29" name="Shape 27"/>
+          <p:cNvSpPr/>
+          <p:nvPr/>
+        </p:nvSpPr>
+        <p:spPr>
+          <a:xfrm>
+            <a:off x="8101584" y="1463040"/>
+            <a:ext cx="3630168" cy="4023360"/>
           </a:xfrm>
           <a:prstGeom prst="roundRect">
             <a:avLst>
-              <a:gd name="adj" fmla="val 2800"/>
+              <a:gd name="adj" fmla="val 1763"/>
             </a:avLst>
           </a:prstGeom>
           <a:solidFill>
@@ -9352,132 +9591,93 @@
       </p:sp>
       <p:sp>
         <p:nvSpPr>
-          <p:cNvPr id="22" name="Shape 20"/>
-          <p:cNvSpPr/>
-          <p:nvPr/>
-        </p:nvSpPr>
-        <p:spPr>
-          <a:xfrm>
-            <a:off x="8549640" y="1828800"/>
-            <a:ext cx="3520440" cy="109728"/>
-          </a:xfrm>
-          <a:prstGeom prst="rect">
-            <a:avLst/>
-          </a:prstGeom>
-          <a:solidFill>
-            <a:srgbClr val="1B2A4A"/>
-          </a:solidFill>
-          <a:ln/>
-        </p:spPr>
-      </p:sp>
-      <p:sp>
-        <p:nvSpPr>
-          <p:cNvPr id="23" name="Shape 21"/>
-          <p:cNvSpPr/>
-          <p:nvPr/>
-        </p:nvSpPr>
-        <p:spPr>
-          <a:xfrm>
-            <a:off x="9898380" y="2194560"/>
-            <a:ext cx="822960" cy="822960"/>
+          <p:cNvPr id="30" name="Shape 28"/>
+          <p:cNvSpPr/>
+          <p:nvPr/>
+        </p:nvSpPr>
+        <p:spPr>
+          <a:xfrm>
+            <a:off x="8101584" y="1463040"/>
+            <a:ext cx="3630168" cy="566928"/>
+          </a:xfrm>
+          <a:prstGeom prst="rect">
+            <a:avLst/>
+          </a:prstGeom>
+          <a:solidFill>
+            <a:srgbClr val="13B5A6"/>
+          </a:solidFill>
+          <a:ln/>
+        </p:spPr>
+      </p:sp>
+      <p:sp>
+        <p:nvSpPr>
+          <p:cNvPr id="31" name="Text 29"/>
+          <p:cNvSpPr/>
+          <p:nvPr/>
+        </p:nvSpPr>
+        <p:spPr>
+          <a:xfrm>
+            <a:off x="8284464" y="1463040"/>
+            <a:ext cx="3264408" cy="566928"/>
+          </a:xfrm>
+          <a:prstGeom prst="rect">
+            <a:avLst/>
+          </a:prstGeom>
+          <a:noFill/>
+          <a:ln/>
+        </p:spPr>
+        <p:txBody>
+          <a:bodyPr wrap="square" lIns="0" tIns="0" rIns="0" bIns="0" rtlCol="0" anchor="ctr"/>
+          <a:lstStyle/>
+          <a:p>
+            <a:pPr indent="0" marL="0">
+              <a:buNone/>
+            </a:pPr>
+            <a:r>
+              <a:rPr lang="en-US" sz="1350" b="1" dirty="0">
+                <a:solidFill>
+                  <a:srgbClr val="FFFFFF"/>
+                </a:solidFill>
+                <a:latin typeface="Calibri" pitchFamily="34" charset="0"/>
+                <a:ea typeface="Calibri" pitchFamily="34" charset="-122"/>
+                <a:cs typeface="Calibri" pitchFamily="34" charset="-120"/>
+              </a:rPr>
+              <a:t>The licensing reality</a:t>
+            </a:r>
+            <a:endParaRPr lang="en-US" sz="1350" dirty="0"/>
+          </a:p>
+        </p:txBody>
+      </p:sp>
+      <p:sp>
+        <p:nvSpPr>
+          <p:cNvPr id="32" name="Shape 30"/>
+          <p:cNvSpPr/>
+          <p:nvPr/>
+        </p:nvSpPr>
+        <p:spPr>
+          <a:xfrm>
+            <a:off x="8330184" y="2304288"/>
+            <a:ext cx="118872" cy="118872"/>
           </a:xfrm>
           <a:prstGeom prst="ellipse">
             <a:avLst/>
           </a:prstGeom>
           <a:solidFill>
-            <a:srgbClr val="1B2A4A"/>
-          </a:solidFill>
-          <a:ln/>
-        </p:spPr>
-      </p:sp>
-      <p:sp>
-        <p:nvSpPr>
-          <p:cNvPr id="24" name="Text 22"/>
-          <p:cNvSpPr/>
-          <p:nvPr/>
-        </p:nvSpPr>
-        <p:spPr>
-          <a:xfrm>
-            <a:off x="9898380" y="2194560"/>
-            <a:ext cx="822960" cy="822960"/>
-          </a:xfrm>
-          <a:prstGeom prst="rect">
-            <a:avLst/>
-          </a:prstGeom>
-          <a:noFill/>
-          <a:ln/>
-        </p:spPr>
-        <p:txBody>
-          <a:bodyPr wrap="square" lIns="0" tIns="0" rIns="0" bIns="0" rtlCol="0" anchor="ctr"/>
-          <a:lstStyle/>
-          <a:p>
-            <a:pPr algn="ctr" indent="0" marL="0">
-              <a:buNone/>
-            </a:pPr>
-            <a:r>
-              <a:rPr lang="en-US" sz="2600" b="1" dirty="0">
-                <a:solidFill>
-                  <a:srgbClr val="FFFFFF"/>
-                </a:solidFill>
-                <a:latin typeface="Georgia" pitchFamily="34" charset="0"/>
-                <a:ea typeface="Georgia" pitchFamily="34" charset="-122"/>
-                <a:cs typeface="Georgia" pitchFamily="34" charset="-120"/>
-              </a:rPr>
-              <a:t>3</a:t>
-            </a:r>
-            <a:endParaRPr lang="en-US" sz="2600" dirty="0"/>
-          </a:p>
-        </p:txBody>
-      </p:sp>
-      <p:sp>
-        <p:nvSpPr>
-          <p:cNvPr id="25" name="Text 23"/>
-          <p:cNvSpPr/>
-          <p:nvPr/>
-        </p:nvSpPr>
-        <p:spPr>
-          <a:xfrm>
-            <a:off x="8732520" y="3108960"/>
-            <a:ext cx="3154680" cy="365760"/>
-          </a:xfrm>
-          <a:prstGeom prst="rect">
-            <a:avLst/>
-          </a:prstGeom>
-          <a:noFill/>
-          <a:ln/>
-        </p:spPr>
-        <p:txBody>
-          <a:bodyPr wrap="square" lIns="0" tIns="0" rIns="0" bIns="0" rtlCol="0" anchor="ctr"/>
-          <a:lstStyle/>
-          <a:p>
-            <a:pPr algn="ctr" indent="0" marL="0">
-              <a:buNone/>
-            </a:pPr>
-            <a:r>
-              <a:rPr lang="en-US" sz="1600" b="1" dirty="0">
-                <a:solidFill>
-                  <a:srgbClr val="1B2A4A"/>
-                </a:solidFill>
-                <a:latin typeface="Calibri" pitchFamily="34" charset="0"/>
-                <a:ea typeface="Calibri" pitchFamily="34" charset="-122"/>
-                <a:cs typeface="Calibri" pitchFamily="34" charset="-120"/>
-              </a:rPr>
-              <a:t>Scale</a:t>
-            </a:r>
-            <a:endParaRPr lang="en-US" sz="1600" dirty="0"/>
-          </a:p>
-        </p:txBody>
-      </p:sp>
-      <p:sp>
-        <p:nvSpPr>
-          <p:cNvPr id="26" name="Text 24"/>
-          <p:cNvSpPr/>
-          <p:nvPr/>
-        </p:nvSpPr>
-        <p:spPr>
-          <a:xfrm>
-            <a:off x="8778240" y="3493008"/>
-            <a:ext cx="3063240" cy="548640"/>
+            <a:srgbClr val="13B5A6"/>
+          </a:solidFill>
+          <a:ln/>
+        </p:spPr>
+      </p:sp>
+      <p:sp>
+        <p:nvSpPr>
+          <p:cNvPr id="33" name="Text 31"/>
+          <p:cNvSpPr/>
+          <p:nvPr/>
+        </p:nvSpPr>
+        <p:spPr>
+          <a:xfrm>
+            <a:off x="8558784" y="2240280"/>
+            <a:ext cx="2971800" cy="713232"/>
           </a:xfrm>
           <a:prstGeom prst="rect">
             <a:avLst/>
@@ -9489,14 +9689,14 @@
           <a:bodyPr wrap="square" lIns="0" tIns="0" rIns="0" bIns="0" rtlCol="0" anchor="t"/>
           <a:lstStyle/>
           <a:p>
-            <a:pPr algn="ctr" indent="0" marL="0">
+            <a:pPr indent="0" marL="0">
               <a:lnSpc>
-                <a:spcPct val="100000"/>
+                <a:spcPct val="98000"/>
               </a:lnSpc>
               <a:buNone/>
             </a:pPr>
             <a:r>
-              <a:rPr lang="en-US" sz="1080" dirty="0">
+              <a:rPr lang="en-US" sz="1100" dirty="0">
                 <a:solidFill>
                   <a:srgbClr val="6B7A8D"/>
                 </a:solidFill>
@@ -9504,146 +9704,274 @@
                 <a:ea typeface="Calibri" pitchFamily="34" charset="-122"/>
                 <a:cs typeface="Calibri" pitchFamily="34" charset="-120"/>
               </a:rPr>
-              <a:t>Add specialties through config and watch the auto-bill rate climb toward 80%, as the model is certified at 95%+.</a:t>
-            </a:r>
-            <a:endParaRPr lang="en-US" sz="1080" dirty="0"/>
-          </a:p>
-        </p:txBody>
-      </p:sp>
-      <p:sp>
-        <p:nvSpPr>
-          <p:cNvPr id="27" name="Shape 25"/>
-          <p:cNvSpPr/>
-          <p:nvPr/>
-        </p:nvSpPr>
-        <p:spPr>
-          <a:xfrm>
-            <a:off x="594360" y="4572000"/>
-            <a:ext cx="11000232" cy="1463040"/>
+              <a:t>Public now: ICD-10-CM, HCPCS, NCCI, MUE, guidelines</a:t>
+            </a:r>
+            <a:endParaRPr lang="en-US" sz="1100" dirty="0"/>
+          </a:p>
+        </p:txBody>
+      </p:sp>
+      <p:sp>
+        <p:nvSpPr>
+          <p:cNvPr id="34" name="Shape 32"/>
+          <p:cNvSpPr/>
+          <p:nvPr/>
+        </p:nvSpPr>
+        <p:spPr>
+          <a:xfrm>
+            <a:off x="8330184" y="3054096"/>
+            <a:ext cx="118872" cy="118872"/>
+          </a:xfrm>
+          <a:prstGeom prst="ellipse">
+            <a:avLst/>
+          </a:prstGeom>
+          <a:solidFill>
+            <a:srgbClr val="13B5A6"/>
+          </a:solidFill>
+          <a:ln/>
+        </p:spPr>
+      </p:sp>
+      <p:sp>
+        <p:nvSpPr>
+          <p:cNvPr id="35" name="Text 33"/>
+          <p:cNvSpPr/>
+          <p:nvPr/>
+        </p:nvSpPr>
+        <p:spPr>
+          <a:xfrm>
+            <a:off x="8558784" y="2990088"/>
+            <a:ext cx="2971800" cy="713232"/>
+          </a:xfrm>
+          <a:prstGeom prst="rect">
+            <a:avLst/>
+          </a:prstGeom>
+          <a:noFill/>
+          <a:ln/>
+        </p:spPr>
+        <p:txBody>
+          <a:bodyPr wrap="square" lIns="0" tIns="0" rIns="0" bIns="0" rtlCol="0" anchor="t"/>
+          <a:lstStyle/>
+          <a:p>
+            <a:pPr indent="0" marL="0">
+              <a:lnSpc>
+                <a:spcPct val="98000"/>
+              </a:lnSpc>
+              <a:buNone/>
+            </a:pPr>
+            <a:r>
+              <a:rPr lang="en-US" sz="1100" dirty="0">
+                <a:solidFill>
+                  <a:srgbClr val="6B7A8D"/>
+                </a:solidFill>
+                <a:latin typeface="Calibri" pitchFamily="34" charset="0"/>
+                <a:ea typeface="Calibri" pitchFamily="34" charset="-122"/>
+                <a:cs typeface="Calibri" pitchFamily="34" charset="-120"/>
+              </a:rPr>
+              <a:t>CPT (AMA) is a placeholder → your licence in production</a:t>
+            </a:r>
+            <a:endParaRPr lang="en-US" sz="1100" dirty="0"/>
+          </a:p>
+        </p:txBody>
+      </p:sp>
+      <p:sp>
+        <p:nvSpPr>
+          <p:cNvPr id="36" name="Shape 34"/>
+          <p:cNvSpPr/>
+          <p:nvPr/>
+        </p:nvSpPr>
+        <p:spPr>
+          <a:xfrm>
+            <a:off x="8330184" y="3803904"/>
+            <a:ext cx="118872" cy="118872"/>
+          </a:xfrm>
+          <a:prstGeom prst="ellipse">
+            <a:avLst/>
+          </a:prstGeom>
+          <a:solidFill>
+            <a:srgbClr val="13B5A6"/>
+          </a:solidFill>
+          <a:ln/>
+        </p:spPr>
+      </p:sp>
+      <p:sp>
+        <p:nvSpPr>
+          <p:cNvPr id="37" name="Text 35"/>
+          <p:cNvSpPr/>
+          <p:nvPr/>
+        </p:nvSpPr>
+        <p:spPr>
+          <a:xfrm>
+            <a:off x="8558784" y="3739896"/>
+            <a:ext cx="2971800" cy="713232"/>
+          </a:xfrm>
+          <a:prstGeom prst="rect">
+            <a:avLst/>
+          </a:prstGeom>
+          <a:noFill/>
+          <a:ln/>
+        </p:spPr>
+        <p:txBody>
+          <a:bodyPr wrap="square" lIns="0" tIns="0" rIns="0" bIns="0" rtlCol="0" anchor="t"/>
+          <a:lstStyle/>
+          <a:p>
+            <a:pPr indent="0" marL="0">
+              <a:lnSpc>
+                <a:spcPct val="98000"/>
+              </a:lnSpc>
+              <a:buNone/>
+            </a:pPr>
+            <a:r>
+              <a:rPr lang="en-US" sz="1100" dirty="0">
+                <a:solidFill>
+                  <a:srgbClr val="6B7A8D"/>
+                </a:solidFill>
+                <a:latin typeface="Calibri" pitchFamily="34" charset="0"/>
+                <a:ea typeface="Calibri" pitchFamily="34" charset="-122"/>
+                <a:cs typeface="Calibri" pitchFamily="34" charset="-120"/>
+              </a:rPr>
+              <a:t>Ontology: a demo set → licensed SNOMED CT / UMLS</a:t>
+            </a:r>
+            <a:endParaRPr lang="en-US" sz="1100" dirty="0"/>
+          </a:p>
+        </p:txBody>
+      </p:sp>
+      <p:sp>
+        <p:nvSpPr>
+          <p:cNvPr id="38" name="Shape 36"/>
+          <p:cNvSpPr/>
+          <p:nvPr/>
+        </p:nvSpPr>
+        <p:spPr>
+          <a:xfrm>
+            <a:off x="8330184" y="4553712"/>
+            <a:ext cx="118872" cy="118872"/>
+          </a:xfrm>
+          <a:prstGeom prst="ellipse">
+            <a:avLst/>
+          </a:prstGeom>
+          <a:solidFill>
+            <a:srgbClr val="13B5A6"/>
+          </a:solidFill>
+          <a:ln/>
+        </p:spPr>
+      </p:sp>
+      <p:sp>
+        <p:nvSpPr>
+          <p:cNvPr id="39" name="Text 37"/>
+          <p:cNvSpPr/>
+          <p:nvPr/>
+        </p:nvSpPr>
+        <p:spPr>
+          <a:xfrm>
+            <a:off x="8558784" y="4489704"/>
+            <a:ext cx="2971800" cy="713232"/>
+          </a:xfrm>
+          <a:prstGeom prst="rect">
+            <a:avLst/>
+          </a:prstGeom>
+          <a:noFill/>
+          <a:ln/>
+        </p:spPr>
+        <p:txBody>
+          <a:bodyPr wrap="square" lIns="0" tIns="0" rIns="0" bIns="0" rtlCol="0" anchor="t"/>
+          <a:lstStyle/>
+          <a:p>
+            <a:pPr indent="0" marL="0">
+              <a:lnSpc>
+                <a:spcPct val="98000"/>
+              </a:lnSpc>
+              <a:buNone/>
+            </a:pPr>
+            <a:r>
+              <a:rPr lang="en-US" sz="1100" dirty="0">
+                <a:solidFill>
+                  <a:srgbClr val="6B7A8D"/>
+                </a:solidFill>
+                <a:latin typeface="Calibri" pitchFamily="34" charset="0"/>
+                <a:ea typeface="Calibri" pitchFamily="34" charset="-122"/>
+                <a:cs typeface="Calibri" pitchFamily="34" charset="-120"/>
+              </a:rPr>
+              <a:t>Same shapes throughout — it's a swap, not a rebuild</a:t>
+            </a:r>
+            <a:endParaRPr lang="en-US" sz="1100" dirty="0"/>
+          </a:p>
+        </p:txBody>
+      </p:sp>
+      <p:sp>
+        <p:nvSpPr>
+          <p:cNvPr id="40" name="Shape 38"/>
+          <p:cNvSpPr/>
+          <p:nvPr/>
+        </p:nvSpPr>
+        <p:spPr>
+          <a:xfrm>
+            <a:off x="457200" y="5623560"/>
+            <a:ext cx="11274552" cy="685800"/>
           </a:xfrm>
           <a:prstGeom prst="roundRect">
             <a:avLst>
-              <a:gd name="adj" fmla="val 3750"/>
+              <a:gd name="adj" fmla="val 8000"/>
             </a:avLst>
           </a:prstGeom>
           <a:solidFill>
-            <a:srgbClr val="1B2A4A"/>
-          </a:solidFill>
-          <a:ln/>
-        </p:spPr>
-      </p:sp>
-      <p:sp>
-        <p:nvSpPr>
-          <p:cNvPr id="28" name="Text 26"/>
-          <p:cNvSpPr/>
-          <p:nvPr/>
-        </p:nvSpPr>
-        <p:spPr>
-          <a:xfrm>
-            <a:off x="822960" y="4681728"/>
-            <a:ext cx="10058400" cy="320040"/>
-          </a:xfrm>
-          <a:prstGeom prst="rect">
-            <a:avLst/>
-          </a:prstGeom>
-          <a:noFill/>
-          <a:ln/>
-        </p:spPr>
-        <p:txBody>
-          <a:bodyPr wrap="square" lIns="0" tIns="0" rIns="0" bIns="0" rtlCol="0" anchor="ctr"/>
-          <a:lstStyle/>
-          <a:p>
-            <a:pPr indent="0" marL="0">
-              <a:buNone/>
-            </a:pPr>
-            <a:r>
-              <a:rPr lang="en-US" sz="1300" b="1" dirty="0">
-                <a:solidFill>
-                  <a:srgbClr val="FFFFFF"/>
-                </a:solidFill>
-                <a:latin typeface="Calibri" pitchFamily="34" charset="0"/>
-                <a:ea typeface="Calibri" pitchFamily="34" charset="-122"/>
-                <a:cs typeface="Calibri" pitchFamily="34" charset="-120"/>
-              </a:rPr>
-              <a:t>What moves as we go</a:t>
-            </a:r>
-            <a:endParaRPr lang="en-US" sz="1300" dirty="0"/>
-          </a:p>
-        </p:txBody>
-      </p:sp>
-      <p:sp>
-        <p:nvSpPr>
-          <p:cNvPr id="29" name="Text 27"/>
-          <p:cNvSpPr/>
-          <p:nvPr/>
-        </p:nvSpPr>
-        <p:spPr>
-          <a:xfrm>
-            <a:off x="868680" y="5029200"/>
-            <a:ext cx="2560320" cy="502920"/>
-          </a:xfrm>
-          <a:prstGeom prst="rect">
-            <a:avLst/>
-          </a:prstGeom>
-          <a:noFill/>
-          <a:ln/>
-        </p:spPr>
-        <p:txBody>
-          <a:bodyPr wrap="square" lIns="0" tIns="0" rIns="0" bIns="0" rtlCol="0" anchor="ctr"/>
-          <a:lstStyle/>
-          <a:p>
-            <a:pPr indent="0" marL="0">
-              <a:buNone/>
-            </a:pPr>
-            <a:r>
-              <a:rPr lang="en-US" sz="2200" b="1" dirty="0">
-                <a:solidFill>
-                  <a:srgbClr val="13B5A6"/>
-                </a:solidFill>
-                <a:latin typeface="Georgia" pitchFamily="34" charset="0"/>
-                <a:ea typeface="Georgia" pitchFamily="34" charset="-122"/>
-                <a:cs typeface="Georgia" pitchFamily="34" charset="-120"/>
-              </a:rPr>
-              <a:t>90%+</a:t>
-            </a:r>
-            <a:endParaRPr lang="en-US" sz="2200" dirty="0"/>
-          </a:p>
-        </p:txBody>
-      </p:sp>
-      <p:sp>
-        <p:nvSpPr>
-          <p:cNvPr id="30" name="Text 28"/>
-          <p:cNvSpPr/>
-          <p:nvPr/>
-        </p:nvSpPr>
-        <p:spPr>
-          <a:xfrm>
-            <a:off x="868680" y="5532120"/>
-            <a:ext cx="2560320" cy="365760"/>
-          </a:xfrm>
-          <a:prstGeom prst="rect">
-            <a:avLst/>
-          </a:prstGeom>
-          <a:noFill/>
-          <a:ln/>
-        </p:spPr>
-        <p:txBody>
-          <a:bodyPr wrap="square" lIns="0" tIns="0" rIns="0" bIns="0" rtlCol="0" anchor="ctr"/>
-          <a:lstStyle/>
-          <a:p>
-            <a:pPr indent="0" marL="0">
+            <a:srgbClr val="EAF1F8"/>
+          </a:solidFill>
+          <a:ln/>
+        </p:spPr>
+      </p:sp>
+      <p:sp>
+        <p:nvSpPr>
+          <p:cNvPr id="41" name="Text 39"/>
+          <p:cNvSpPr/>
+          <p:nvPr/>
+        </p:nvSpPr>
+        <p:spPr>
+          <a:xfrm>
+            <a:off x="685800" y="5623560"/>
+            <a:ext cx="10881360" cy="685800"/>
+          </a:xfrm>
+          <a:prstGeom prst="rect">
+            <a:avLst/>
+          </a:prstGeom>
+          <a:noFill/>
+          <a:ln/>
+        </p:spPr>
+        <p:txBody>
+          <a:bodyPr wrap="square" lIns="0" tIns="0" rIns="0" bIns="0" rtlCol="0" anchor="ctr"/>
+          <a:lstStyle/>
+          <a:p>
+            <a:pPr indent="0" marL="0">
+              <a:lnSpc>
+                <a:spcPct val="98000"/>
+              </a:lnSpc>
+              <a:buNone/>
+            </a:pPr>
+            <a:r>
+              <a:rPr lang="en-US" sz="1100" b="1" dirty="0">
+                <a:solidFill>
+                  <a:srgbClr val="1B2A4A"/>
+                </a:solidFill>
+                <a:latin typeface="Calibri" pitchFamily="34" charset="0"/>
+                <a:ea typeface="Calibri" pitchFamily="34" charset="-122"/>
+                <a:cs typeface="Calibri" pitchFamily="34" charset="-120"/>
+              </a:rPr>
+              <a:t>Straight about what's demo-scale:  </a:t>
+            </a:r>
+            <a:pPr indent="0" marL="0">
+              <a:lnSpc>
+                <a:spcPct val="98000"/>
+              </a:lnSpc>
               <a:buNone/>
             </a:pPr>
             <a:r>
               <a:rPr lang="en-US" sz="1100" dirty="0">
                 <a:solidFill>
-                  <a:srgbClr val="CADCFC"/>
-                </a:solidFill>
-                <a:latin typeface="Calibri" pitchFamily="34" charset="0"/>
-                <a:ea typeface="Calibri" pitchFamily="34" charset="-122"/>
-                <a:cs typeface="Calibri" pitchFamily="34" charset="-120"/>
-              </a:rPr>
-              <a:t>Chart accuracy</a:t>
+                  <a:srgbClr val="27313F"/>
+                </a:solidFill>
+                <a:latin typeface="Calibri" pitchFamily="34" charset="0"/>
+                <a:ea typeface="Calibri" pitchFamily="34" charset="-122"/>
+                <a:cs typeface="Calibri" pitchFamily="34" charset="-120"/>
+              </a:rPr>
+              <a:t>the mechanisms are real; the volume of gold charts, the model retraining and denial-prevention grow after the demo. Nothing is faked, and if the model isn't available it routes to a person rather than guess.</a:t>
             </a:r>
             <a:endParaRPr lang="en-US" sz="1100" dirty="0"/>
           </a:p>
@@ -9651,241 +9979,7 @@
       </p:sp>
       <p:sp>
         <p:nvSpPr>
-          <p:cNvPr id="31" name="Text 29"/>
-          <p:cNvSpPr/>
-          <p:nvPr/>
-        </p:nvSpPr>
-        <p:spPr>
-          <a:xfrm>
-            <a:off x="3611880" y="5029200"/>
-            <a:ext cx="2560320" cy="502920"/>
-          </a:xfrm>
-          <a:prstGeom prst="rect">
-            <a:avLst/>
-          </a:prstGeom>
-          <a:noFill/>
-          <a:ln/>
-        </p:spPr>
-        <p:txBody>
-          <a:bodyPr wrap="square" lIns="0" tIns="0" rIns="0" bIns="0" rtlCol="0" anchor="ctr"/>
-          <a:lstStyle/>
-          <a:p>
-            <a:pPr indent="0" marL="0">
-              <a:buNone/>
-            </a:pPr>
-            <a:r>
-              <a:rPr lang="en-US" sz="2200" b="1" dirty="0">
-                <a:solidFill>
-                  <a:srgbClr val="13B5A6"/>
-                </a:solidFill>
-                <a:latin typeface="Georgia" pitchFamily="34" charset="0"/>
-                <a:ea typeface="Georgia" pitchFamily="34" charset="-122"/>
-                <a:cs typeface="Georgia" pitchFamily="34" charset="-120"/>
-              </a:rPr>
-              <a:t>80%+</a:t>
-            </a:r>
-            <a:endParaRPr lang="en-US" sz="2200" dirty="0"/>
-          </a:p>
-        </p:txBody>
-      </p:sp>
-      <p:sp>
-        <p:nvSpPr>
-          <p:cNvPr id="32" name="Text 30"/>
-          <p:cNvSpPr/>
-          <p:nvPr/>
-        </p:nvSpPr>
-        <p:spPr>
-          <a:xfrm>
-            <a:off x="3611880" y="5532120"/>
-            <a:ext cx="2560320" cy="365760"/>
-          </a:xfrm>
-          <a:prstGeom prst="rect">
-            <a:avLst/>
-          </a:prstGeom>
-          <a:noFill/>
-          <a:ln/>
-        </p:spPr>
-        <p:txBody>
-          <a:bodyPr wrap="square" lIns="0" tIns="0" rIns="0" bIns="0" rtlCol="0" anchor="ctr"/>
-          <a:lstStyle/>
-          <a:p>
-            <a:pPr indent="0" marL="0">
-              <a:buNone/>
-            </a:pPr>
-            <a:r>
-              <a:rPr lang="en-US" sz="1100" dirty="0">
-                <a:solidFill>
-                  <a:srgbClr val="CADCFC"/>
-                </a:solidFill>
-                <a:latin typeface="Calibri" pitchFamily="34" charset="0"/>
-                <a:ea typeface="Calibri" pitchFamily="34" charset="-122"/>
-                <a:cs typeface="Calibri" pitchFamily="34" charset="-120"/>
-              </a:rPr>
-              <a:t>Auto-billed</a:t>
-            </a:r>
-            <a:endParaRPr lang="en-US" sz="1100" dirty="0"/>
-          </a:p>
-        </p:txBody>
-      </p:sp>
-      <p:sp>
-        <p:nvSpPr>
-          <p:cNvPr id="33" name="Text 31"/>
-          <p:cNvSpPr/>
-          <p:nvPr/>
-        </p:nvSpPr>
-        <p:spPr>
-          <a:xfrm>
-            <a:off x="6355080" y="5029200"/>
-            <a:ext cx="2560320" cy="502920"/>
-          </a:xfrm>
-          <a:prstGeom prst="rect">
-            <a:avLst/>
-          </a:prstGeom>
-          <a:noFill/>
-          <a:ln/>
-        </p:spPr>
-        <p:txBody>
-          <a:bodyPr wrap="square" lIns="0" tIns="0" rIns="0" bIns="0" rtlCol="0" anchor="ctr"/>
-          <a:lstStyle/>
-          <a:p>
-            <a:pPr indent="0" marL="0">
-              <a:buNone/>
-            </a:pPr>
-            <a:r>
-              <a:rPr lang="en-US" sz="2200" b="1" dirty="0">
-                <a:solidFill>
-                  <a:srgbClr val="13B5A6"/>
-                </a:solidFill>
-                <a:latin typeface="Georgia" pitchFamily="34" charset="0"/>
-                <a:ea typeface="Georgia" pitchFamily="34" charset="-122"/>
-                <a:cs typeface="Georgia" pitchFamily="34" charset="-120"/>
-              </a:rPr>
-              <a:t>30%+</a:t>
-            </a:r>
-            <a:endParaRPr lang="en-US" sz="2200" dirty="0"/>
-          </a:p>
-        </p:txBody>
-      </p:sp>
-      <p:sp>
-        <p:nvSpPr>
-          <p:cNvPr id="34" name="Text 32"/>
-          <p:cNvSpPr/>
-          <p:nvPr/>
-        </p:nvSpPr>
-        <p:spPr>
-          <a:xfrm>
-            <a:off x="6355080" y="5532120"/>
-            <a:ext cx="2560320" cy="365760"/>
-          </a:xfrm>
-          <a:prstGeom prst="rect">
-            <a:avLst/>
-          </a:prstGeom>
-          <a:noFill/>
-          <a:ln/>
-        </p:spPr>
-        <p:txBody>
-          <a:bodyPr wrap="square" lIns="0" tIns="0" rIns="0" bIns="0" rtlCol="0" anchor="ctr"/>
-          <a:lstStyle/>
-          <a:p>
-            <a:pPr indent="0" marL="0">
-              <a:buNone/>
-            </a:pPr>
-            <a:r>
-              <a:rPr lang="en-US" sz="1100" dirty="0">
-                <a:solidFill>
-                  <a:srgbClr val="CADCFC"/>
-                </a:solidFill>
-                <a:latin typeface="Calibri" pitchFamily="34" charset="0"/>
-                <a:ea typeface="Calibri" pitchFamily="34" charset="-122"/>
-                <a:cs typeface="Calibri" pitchFamily="34" charset="-120"/>
-              </a:rPr>
-              <a:t>Less manual effort</a:t>
-            </a:r>
-            <a:endParaRPr lang="en-US" sz="1100" dirty="0"/>
-          </a:p>
-        </p:txBody>
-      </p:sp>
-      <p:sp>
-        <p:nvSpPr>
-          <p:cNvPr id="35" name="Text 33"/>
-          <p:cNvSpPr/>
-          <p:nvPr/>
-        </p:nvSpPr>
-        <p:spPr>
-          <a:xfrm>
-            <a:off x="9098280" y="5029200"/>
-            <a:ext cx="2560320" cy="502920"/>
-          </a:xfrm>
-          <a:prstGeom prst="rect">
-            <a:avLst/>
-          </a:prstGeom>
-          <a:noFill/>
-          <a:ln/>
-        </p:spPr>
-        <p:txBody>
-          <a:bodyPr wrap="square" lIns="0" tIns="0" rIns="0" bIns="0" rtlCol="0" anchor="ctr"/>
-          <a:lstStyle/>
-          <a:p>
-            <a:pPr indent="0" marL="0">
-              <a:buNone/>
-            </a:pPr>
-            <a:r>
-              <a:rPr lang="en-US" sz="2200" b="1" dirty="0">
-                <a:solidFill>
-                  <a:srgbClr val="13B5A6"/>
-                </a:solidFill>
-                <a:latin typeface="Georgia" pitchFamily="34" charset="0"/>
-                <a:ea typeface="Georgia" pitchFamily="34" charset="-122"/>
-                <a:cs typeface="Georgia" pitchFamily="34" charset="-120"/>
-              </a:rPr>
-              <a:t>10–15%</a:t>
-            </a:r>
-            <a:endParaRPr lang="en-US" sz="2200" dirty="0"/>
-          </a:p>
-        </p:txBody>
-      </p:sp>
-      <p:sp>
-        <p:nvSpPr>
-          <p:cNvPr id="36" name="Text 34"/>
-          <p:cNvSpPr/>
-          <p:nvPr/>
-        </p:nvSpPr>
-        <p:spPr>
-          <a:xfrm>
-            <a:off x="9098280" y="5532120"/>
-            <a:ext cx="2560320" cy="365760"/>
-          </a:xfrm>
-          <a:prstGeom prst="rect">
-            <a:avLst/>
-          </a:prstGeom>
-          <a:noFill/>
-          <a:ln/>
-        </p:spPr>
-        <p:txBody>
-          <a:bodyPr wrap="square" lIns="0" tIns="0" rIns="0" bIns="0" rtlCol="0" anchor="ctr"/>
-          <a:lstStyle/>
-          <a:p>
-            <a:pPr indent="0" marL="0">
-              <a:buNone/>
-            </a:pPr>
-            <a:r>
-              <a:rPr lang="en-US" sz="1100" dirty="0">
-                <a:solidFill>
-                  <a:srgbClr val="CADCFC"/>
-                </a:solidFill>
-                <a:latin typeface="Calibri" pitchFamily="34" charset="0"/>
-                <a:ea typeface="Calibri" pitchFamily="34" charset="-122"/>
-                <a:cs typeface="Calibri" pitchFamily="34" charset="-120"/>
-              </a:rPr>
-              <a:t>Faster turnaround</a:t>
-            </a:r>
-            <a:endParaRPr lang="en-US" sz="1100" dirty="0"/>
-          </a:p>
-        </p:txBody>
-      </p:sp>
-      <p:sp>
-        <p:nvSpPr>
-          <p:cNvPr id="37" name="Shape 35"/>
+          <p:cNvPr id="42" name="Shape 40"/>
           <p:cNvSpPr/>
           <p:nvPr/>
         </p:nvSpPr>
@@ -9905,7 +9999,7 @@
       </p:sp>
       <p:sp>
         <p:nvSpPr>
-          <p:cNvPr id="38" name="Text 36"/>
+          <p:cNvPr id="43" name="Text 41"/>
           <p:cNvSpPr/>
           <p:nvPr/>
         </p:nvSpPr>
@@ -9944,7 +10038,7 @@
       </p:sp>
       <p:sp>
         <p:nvSpPr>
-          <p:cNvPr id="39" name="Text 37"/>
+          <p:cNvPr id="44" name="Text 42"/>
           <p:cNvSpPr/>
           <p:nvPr/>
         </p:nvSpPr>
@@ -9983,7 +10077,7 @@
       </p:sp>
       <p:sp>
         <p:nvSpPr>
-          <p:cNvPr id="40" name="Text 38"/>
+          <p:cNvPr id="45" name="Text 43"/>
           <p:cNvSpPr/>
           <p:nvPr/>
         </p:nvSpPr>
@@ -10031,6 +10125,1316 @@
 <file path=ppt/slides/slide15.xml><?xml version="1.0" encoding="utf-8"?>
 <p:sld xmlns:a="http://schemas.openxmlformats.org/drawingml/2006/main" xmlns:r="http://schemas.openxmlformats.org/officeDocument/2006/relationships" xmlns:p="http://schemas.openxmlformats.org/presentationml/2006/main">
   <p:cSld name="Slide 15">
+    <p:bg>
+      <p:bgPr>
+        <a:solidFill>
+          <a:srgbClr val="F5F8FC"/>
+        </a:solidFill>
+      </p:bgPr>
+    </p:bg>
+    <p:spTree>
+      <p:nvGrpSpPr>
+        <p:cNvPr id="1" name=""/>
+        <p:cNvGrpSpPr/>
+        <p:nvPr/>
+      </p:nvGrpSpPr>
+      <p:grpSpPr>
+        <a:xfrm>
+          <a:off x="0" y="0"/>
+          <a:ext cx="0" cy="0"/>
+          <a:chOff x="0" y="0"/>
+          <a:chExt cx="0" cy="0"/>
+        </a:xfrm>
+      </p:grpSpPr>
+      <p:sp>
+        <p:nvSpPr>
+          <p:cNvPr id="2" name="Shape 0"/>
+          <p:cNvSpPr/>
+          <p:nvPr/>
+        </p:nvSpPr>
+        <p:spPr>
+          <a:xfrm>
+            <a:off x="0" y="0"/>
+            <a:ext cx="12188952" cy="1078992"/>
+          </a:xfrm>
+          <a:prstGeom prst="rect">
+            <a:avLst/>
+          </a:prstGeom>
+          <a:solidFill>
+            <a:srgbClr val="FFFFFF"/>
+          </a:solidFill>
+          <a:ln/>
+        </p:spPr>
+      </p:sp>
+      <p:sp>
+        <p:nvSpPr>
+          <p:cNvPr id="3" name="Shape 1"/>
+          <p:cNvSpPr/>
+          <p:nvPr/>
+        </p:nvSpPr>
+        <p:spPr>
+          <a:xfrm>
+            <a:off x="0" y="1078992"/>
+            <a:ext cx="12188952" cy="27432"/>
+          </a:xfrm>
+          <a:prstGeom prst="rect">
+            <a:avLst/>
+          </a:prstGeom>
+          <a:solidFill>
+            <a:srgbClr val="D8E1EC"/>
+          </a:solidFill>
+          <a:ln/>
+        </p:spPr>
+      </p:sp>
+      <p:sp>
+        <p:nvSpPr>
+          <p:cNvPr id="4" name="Shape 2"/>
+          <p:cNvSpPr/>
+          <p:nvPr/>
+        </p:nvSpPr>
+        <p:spPr>
+          <a:xfrm>
+            <a:off x="457200" y="310896"/>
+            <a:ext cx="109728" cy="512064"/>
+          </a:xfrm>
+          <a:prstGeom prst="rect">
+            <a:avLst/>
+          </a:prstGeom>
+          <a:solidFill>
+            <a:srgbClr val="13B5A6"/>
+          </a:solidFill>
+          <a:ln/>
+        </p:spPr>
+      </p:sp>
+      <p:sp>
+        <p:nvSpPr>
+          <p:cNvPr id="5" name="Text 3"/>
+          <p:cNvSpPr/>
+          <p:nvPr/>
+        </p:nvSpPr>
+        <p:spPr>
+          <a:xfrm>
+            <a:off x="713232" y="274320"/>
+            <a:ext cx="10058400" cy="237744"/>
+          </a:xfrm>
+          <a:prstGeom prst="rect">
+            <a:avLst/>
+          </a:prstGeom>
+          <a:noFill/>
+          <a:ln/>
+        </p:spPr>
+        <p:txBody>
+          <a:bodyPr wrap="square" lIns="0" tIns="0" rIns="0" bIns="0" rtlCol="0" anchor="ctr"/>
+          <a:lstStyle/>
+          <a:p>
+            <a:pPr indent="0" marL="0">
+              <a:buNone/>
+            </a:pPr>
+            <a:r>
+              <a:rPr lang="en-US" sz="1100" b="1" spc="200" kern="0" dirty="0">
+                <a:solidFill>
+                  <a:srgbClr val="13B5A6"/>
+                </a:solidFill>
+                <a:latin typeface="Calibri" pitchFamily="34" charset="0"/>
+                <a:ea typeface="Calibri" pitchFamily="34" charset="-122"/>
+                <a:cs typeface="Calibri" pitchFamily="34" charset="-120"/>
+              </a:rPr>
+              <a:t>ADOPTION PATH</a:t>
+            </a:r>
+            <a:endParaRPr lang="en-US" sz="1100" dirty="0"/>
+          </a:p>
+        </p:txBody>
+      </p:sp>
+      <p:sp>
+        <p:nvSpPr>
+          <p:cNvPr id="6" name="Text 4"/>
+          <p:cNvSpPr/>
+          <p:nvPr/>
+        </p:nvSpPr>
+        <p:spPr>
+          <a:xfrm>
+            <a:off x="713232" y="475488"/>
+            <a:ext cx="11155680" cy="457200"/>
+          </a:xfrm>
+          <a:prstGeom prst="rect">
+            <a:avLst/>
+          </a:prstGeom>
+          <a:noFill/>
+          <a:ln/>
+        </p:spPr>
+        <p:txBody>
+          <a:bodyPr wrap="square" lIns="0" tIns="0" rIns="0" bIns="0" rtlCol="0" anchor="ctr"/>
+          <a:lstStyle/>
+          <a:p>
+            <a:pPr indent="0" marL="0">
+              <a:buNone/>
+            </a:pPr>
+            <a:r>
+              <a:rPr lang="en-US" sz="2300" b="1" dirty="0">
+                <a:solidFill>
+                  <a:srgbClr val="1B2A4A"/>
+                </a:solidFill>
+                <a:latin typeface="Georgia" pitchFamily="34" charset="0"/>
+                <a:ea typeface="Georgia" pitchFamily="34" charset="-122"/>
+                <a:cs typeface="Georgia" pitchFamily="34" charset="-120"/>
+              </a:rPr>
+              <a:t>Earn autonomy — don't assume it</a:t>
+            </a:r>
+            <a:endParaRPr lang="en-US" sz="2300" dirty="0"/>
+          </a:p>
+        </p:txBody>
+      </p:sp>
+      <p:sp>
+        <p:nvSpPr>
+          <p:cNvPr id="7" name="Shape 5"/>
+          <p:cNvSpPr/>
+          <p:nvPr/>
+        </p:nvSpPr>
+        <p:spPr>
+          <a:xfrm>
+            <a:off x="594360" y="1828800"/>
+            <a:ext cx="3520440" cy="2286000"/>
+          </a:xfrm>
+          <a:prstGeom prst="roundRect">
+            <a:avLst>
+              <a:gd name="adj" fmla="val 2800"/>
+            </a:avLst>
+          </a:prstGeom>
+          <a:solidFill>
+            <a:srgbClr val="FFFFFF"/>
+          </a:solidFill>
+          <a:ln w="12700">
+            <a:solidFill>
+              <a:srgbClr val="D8E1EC"/>
+            </a:solidFill>
+            <a:prstDash val="solid"/>
+          </a:ln>
+          <a:effectLst>
+            <a:outerShdw sx="100000" sy="100000" kx="0" ky="0" algn="bl" rotWithShape="0" blurRad="88900" dist="38100" dir="8100000">
+              <a:srgbClr val="1B2A4A">
+                <a:alpha val="12000"/>
+              </a:srgbClr>
+            </a:outerShdw>
+          </a:effectLst>
+        </p:spPr>
+      </p:sp>
+      <p:sp>
+        <p:nvSpPr>
+          <p:cNvPr id="8" name="Shape 6"/>
+          <p:cNvSpPr/>
+          <p:nvPr/>
+        </p:nvSpPr>
+        <p:spPr>
+          <a:xfrm>
+            <a:off x="594360" y="1828800"/>
+            <a:ext cx="3520440" cy="109728"/>
+          </a:xfrm>
+          <a:prstGeom prst="rect">
+            <a:avLst/>
+          </a:prstGeom>
+          <a:solidFill>
+            <a:srgbClr val="64748B"/>
+          </a:solidFill>
+          <a:ln/>
+        </p:spPr>
+      </p:sp>
+      <p:sp>
+        <p:nvSpPr>
+          <p:cNvPr id="9" name="Shape 7"/>
+          <p:cNvSpPr/>
+          <p:nvPr/>
+        </p:nvSpPr>
+        <p:spPr>
+          <a:xfrm>
+            <a:off x="1943100" y="2194560"/>
+            <a:ext cx="822960" cy="822960"/>
+          </a:xfrm>
+          <a:prstGeom prst="ellipse">
+            <a:avLst/>
+          </a:prstGeom>
+          <a:solidFill>
+            <a:srgbClr val="64748B"/>
+          </a:solidFill>
+          <a:ln/>
+        </p:spPr>
+      </p:sp>
+      <p:sp>
+        <p:nvSpPr>
+          <p:cNvPr id="10" name="Text 8"/>
+          <p:cNvSpPr/>
+          <p:nvPr/>
+        </p:nvSpPr>
+        <p:spPr>
+          <a:xfrm>
+            <a:off x="1943100" y="2194560"/>
+            <a:ext cx="822960" cy="822960"/>
+          </a:xfrm>
+          <a:prstGeom prst="rect">
+            <a:avLst/>
+          </a:prstGeom>
+          <a:noFill/>
+          <a:ln/>
+        </p:spPr>
+        <p:txBody>
+          <a:bodyPr wrap="square" lIns="0" tIns="0" rIns="0" bIns="0" rtlCol="0" anchor="ctr"/>
+          <a:lstStyle/>
+          <a:p>
+            <a:pPr algn="ctr" indent="0" marL="0">
+              <a:buNone/>
+            </a:pPr>
+            <a:r>
+              <a:rPr lang="en-US" sz="2600" b="1" dirty="0">
+                <a:solidFill>
+                  <a:srgbClr val="FFFFFF"/>
+                </a:solidFill>
+                <a:latin typeface="Georgia" pitchFamily="34" charset="0"/>
+                <a:ea typeface="Georgia" pitchFamily="34" charset="-122"/>
+                <a:cs typeface="Georgia" pitchFamily="34" charset="-120"/>
+              </a:rPr>
+              <a:t>1</a:t>
+            </a:r>
+            <a:endParaRPr lang="en-US" sz="2600" dirty="0"/>
+          </a:p>
+        </p:txBody>
+      </p:sp>
+      <p:sp>
+        <p:nvSpPr>
+          <p:cNvPr id="11" name="Text 9"/>
+          <p:cNvSpPr/>
+          <p:nvPr/>
+        </p:nvSpPr>
+        <p:spPr>
+          <a:xfrm>
+            <a:off x="777240" y="3108960"/>
+            <a:ext cx="3154680" cy="365760"/>
+          </a:xfrm>
+          <a:prstGeom prst="rect">
+            <a:avLst/>
+          </a:prstGeom>
+          <a:noFill/>
+          <a:ln/>
+        </p:spPr>
+        <p:txBody>
+          <a:bodyPr wrap="square" lIns="0" tIns="0" rIns="0" bIns="0" rtlCol="0" anchor="ctr"/>
+          <a:lstStyle/>
+          <a:p>
+            <a:pPr algn="ctr" indent="0" marL="0">
+              <a:buNone/>
+            </a:pPr>
+            <a:r>
+              <a:rPr lang="en-US" sz="1600" b="1" dirty="0">
+                <a:solidFill>
+                  <a:srgbClr val="1B2A4A"/>
+                </a:solidFill>
+                <a:latin typeface="Calibri" pitchFamily="34" charset="0"/>
+                <a:ea typeface="Calibri" pitchFamily="34" charset="-122"/>
+                <a:cs typeface="Calibri" pitchFamily="34" charset="-120"/>
+              </a:rPr>
+              <a:t>Shadow</a:t>
+            </a:r>
+            <a:endParaRPr lang="en-US" sz="1600" dirty="0"/>
+          </a:p>
+        </p:txBody>
+      </p:sp>
+      <p:sp>
+        <p:nvSpPr>
+          <p:cNvPr id="12" name="Text 10"/>
+          <p:cNvSpPr/>
+          <p:nvPr/>
+        </p:nvSpPr>
+        <p:spPr>
+          <a:xfrm>
+            <a:off x="822960" y="3493008"/>
+            <a:ext cx="3063240" cy="548640"/>
+          </a:xfrm>
+          <a:prstGeom prst="rect">
+            <a:avLst/>
+          </a:prstGeom>
+          <a:noFill/>
+          <a:ln/>
+        </p:spPr>
+        <p:txBody>
+          <a:bodyPr wrap="square" lIns="0" tIns="0" rIns="0" bIns="0" rtlCol="0" anchor="t"/>
+          <a:lstStyle/>
+          <a:p>
+            <a:pPr algn="ctr" indent="0" marL="0">
+              <a:lnSpc>
+                <a:spcPct val="100000"/>
+              </a:lnSpc>
+              <a:buNone/>
+            </a:pPr>
+            <a:r>
+              <a:rPr lang="en-US" sz="1080" dirty="0">
+                <a:solidFill>
+                  <a:srgbClr val="6B7A8D"/>
+                </a:solidFill>
+                <a:latin typeface="Calibri" pitchFamily="34" charset="0"/>
+                <a:ea typeface="Calibri" pitchFamily="34" charset="-122"/>
+                <a:cs typeface="Calibri" pitchFamily="34" charset="-120"/>
+              </a:rPr>
+              <a:t>ACE codes next to your coders while humans check everything. We calibrate, build the gold set, and prove the accuracy.</a:t>
+            </a:r>
+            <a:endParaRPr lang="en-US" sz="1080" dirty="0"/>
+          </a:p>
+        </p:txBody>
+      </p:sp>
+      <p:sp>
+        <p:nvSpPr>
+          <p:cNvPr id="13" name="Shape 11"/>
+          <p:cNvSpPr/>
+          <p:nvPr/>
+        </p:nvSpPr>
+        <p:spPr>
+          <a:xfrm>
+            <a:off x="4178808" y="2971800"/>
+            <a:ext cx="329184" cy="0"/>
+          </a:xfrm>
+          <a:prstGeom prst="line">
+            <a:avLst/>
+          </a:prstGeom>
+          <a:noFill/>
+          <a:ln w="27940">
+            <a:solidFill>
+              <a:srgbClr val="13B5A6"/>
+            </a:solidFill>
+            <a:prstDash val="solid"/>
+            <a:tailEnd type="triangle"/>
+          </a:ln>
+        </p:spPr>
+      </p:sp>
+      <p:sp>
+        <p:nvSpPr>
+          <p:cNvPr id="14" name="Shape 12"/>
+          <p:cNvSpPr/>
+          <p:nvPr/>
+        </p:nvSpPr>
+        <p:spPr>
+          <a:xfrm>
+            <a:off x="4572000" y="1828800"/>
+            <a:ext cx="3520440" cy="2286000"/>
+          </a:xfrm>
+          <a:prstGeom prst="roundRect">
+            <a:avLst>
+              <a:gd name="adj" fmla="val 2800"/>
+            </a:avLst>
+          </a:prstGeom>
+          <a:solidFill>
+            <a:srgbClr val="FFFFFF"/>
+          </a:solidFill>
+          <a:ln w="12700">
+            <a:solidFill>
+              <a:srgbClr val="D8E1EC"/>
+            </a:solidFill>
+            <a:prstDash val="solid"/>
+          </a:ln>
+          <a:effectLst>
+            <a:outerShdw sx="100000" sy="100000" kx="0" ky="0" algn="bl" rotWithShape="0" blurRad="88900" dist="38100" dir="8100000">
+              <a:srgbClr val="1B2A4A">
+                <a:alpha val="12000"/>
+              </a:srgbClr>
+            </a:outerShdw>
+          </a:effectLst>
+        </p:spPr>
+      </p:sp>
+      <p:sp>
+        <p:nvSpPr>
+          <p:cNvPr id="15" name="Shape 13"/>
+          <p:cNvSpPr/>
+          <p:nvPr/>
+        </p:nvSpPr>
+        <p:spPr>
+          <a:xfrm>
+            <a:off x="4572000" y="1828800"/>
+            <a:ext cx="3520440" cy="109728"/>
+          </a:xfrm>
+          <a:prstGeom prst="rect">
+            <a:avLst/>
+          </a:prstGeom>
+          <a:solidFill>
+            <a:srgbClr val="0E8C81"/>
+          </a:solidFill>
+          <a:ln/>
+        </p:spPr>
+      </p:sp>
+      <p:sp>
+        <p:nvSpPr>
+          <p:cNvPr id="16" name="Shape 14"/>
+          <p:cNvSpPr/>
+          <p:nvPr/>
+        </p:nvSpPr>
+        <p:spPr>
+          <a:xfrm>
+            <a:off x="5920740" y="2194560"/>
+            <a:ext cx="822960" cy="822960"/>
+          </a:xfrm>
+          <a:prstGeom prst="ellipse">
+            <a:avLst/>
+          </a:prstGeom>
+          <a:solidFill>
+            <a:srgbClr val="0E8C81"/>
+          </a:solidFill>
+          <a:ln/>
+        </p:spPr>
+      </p:sp>
+      <p:sp>
+        <p:nvSpPr>
+          <p:cNvPr id="17" name="Text 15"/>
+          <p:cNvSpPr/>
+          <p:nvPr/>
+        </p:nvSpPr>
+        <p:spPr>
+          <a:xfrm>
+            <a:off x="5920740" y="2194560"/>
+            <a:ext cx="822960" cy="822960"/>
+          </a:xfrm>
+          <a:prstGeom prst="rect">
+            <a:avLst/>
+          </a:prstGeom>
+          <a:noFill/>
+          <a:ln/>
+        </p:spPr>
+        <p:txBody>
+          <a:bodyPr wrap="square" lIns="0" tIns="0" rIns="0" bIns="0" rtlCol="0" anchor="ctr"/>
+          <a:lstStyle/>
+          <a:p>
+            <a:pPr algn="ctr" indent="0" marL="0">
+              <a:buNone/>
+            </a:pPr>
+            <a:r>
+              <a:rPr lang="en-US" sz="2600" b="1" dirty="0">
+                <a:solidFill>
+                  <a:srgbClr val="FFFFFF"/>
+                </a:solidFill>
+                <a:latin typeface="Georgia" pitchFamily="34" charset="0"/>
+                <a:ea typeface="Georgia" pitchFamily="34" charset="-122"/>
+                <a:cs typeface="Georgia" pitchFamily="34" charset="-120"/>
+              </a:rPr>
+              <a:t>2</a:t>
+            </a:r>
+            <a:endParaRPr lang="en-US" sz="2600" dirty="0"/>
+          </a:p>
+        </p:txBody>
+      </p:sp>
+      <p:sp>
+        <p:nvSpPr>
+          <p:cNvPr id="18" name="Text 16"/>
+          <p:cNvSpPr/>
+          <p:nvPr/>
+        </p:nvSpPr>
+        <p:spPr>
+          <a:xfrm>
+            <a:off x="4754880" y="3108960"/>
+            <a:ext cx="3154680" cy="365760"/>
+          </a:xfrm>
+          <a:prstGeom prst="rect">
+            <a:avLst/>
+          </a:prstGeom>
+          <a:noFill/>
+          <a:ln/>
+        </p:spPr>
+        <p:txBody>
+          <a:bodyPr wrap="square" lIns="0" tIns="0" rIns="0" bIns="0" rtlCol="0" anchor="ctr"/>
+          <a:lstStyle/>
+          <a:p>
+            <a:pPr algn="ctr" indent="0" marL="0">
+              <a:buNone/>
+            </a:pPr>
+            <a:r>
+              <a:rPr lang="en-US" sz="1600" b="1" dirty="0">
+                <a:solidFill>
+                  <a:srgbClr val="1B2A4A"/>
+                </a:solidFill>
+                <a:latin typeface="Calibri" pitchFamily="34" charset="0"/>
+                <a:ea typeface="Calibri" pitchFamily="34" charset="-122"/>
+                <a:cs typeface="Calibri" pitchFamily="34" charset="-120"/>
+              </a:rPr>
+              <a:t>Pilot</a:t>
+            </a:r>
+            <a:endParaRPr lang="en-US" sz="1600" dirty="0"/>
+          </a:p>
+        </p:txBody>
+      </p:sp>
+      <p:sp>
+        <p:nvSpPr>
+          <p:cNvPr id="19" name="Text 17"/>
+          <p:cNvSpPr/>
+          <p:nvPr/>
+        </p:nvSpPr>
+        <p:spPr>
+          <a:xfrm>
+            <a:off x="4800600" y="3493008"/>
+            <a:ext cx="3063240" cy="548640"/>
+          </a:xfrm>
+          <a:prstGeom prst="rect">
+            <a:avLst/>
+          </a:prstGeom>
+          <a:noFill/>
+          <a:ln/>
+        </p:spPr>
+        <p:txBody>
+          <a:bodyPr wrap="square" lIns="0" tIns="0" rIns="0" bIns="0" rtlCol="0" anchor="t"/>
+          <a:lstStyle/>
+          <a:p>
+            <a:pPr algn="ctr" indent="0" marL="0">
+              <a:lnSpc>
+                <a:spcPct val="100000"/>
+              </a:lnSpc>
+              <a:buNone/>
+            </a:pPr>
+            <a:r>
+              <a:rPr lang="en-US" sz="1080" dirty="0">
+                <a:solidFill>
+                  <a:srgbClr val="6B7A8D"/>
+                </a:solidFill>
+                <a:latin typeface="Calibri" pitchFamily="34" charset="0"/>
+                <a:ea typeface="Calibri" pitchFamily="34" charset="-122"/>
+                <a:cs typeface="Calibri" pitchFamily="34" charset="-120"/>
+              </a:rPr>
+              <a:t>Turn on auto-billing for the high-confidence lane. QA sampling eases off as the model keeps holding its numbers.</a:t>
+            </a:r>
+            <a:endParaRPr lang="en-US" sz="1080" dirty="0"/>
+          </a:p>
+        </p:txBody>
+      </p:sp>
+      <p:sp>
+        <p:nvSpPr>
+          <p:cNvPr id="20" name="Shape 18"/>
+          <p:cNvSpPr/>
+          <p:nvPr/>
+        </p:nvSpPr>
+        <p:spPr>
+          <a:xfrm>
+            <a:off x="8156448" y="2971800"/>
+            <a:ext cx="329184" cy="0"/>
+          </a:xfrm>
+          <a:prstGeom prst="line">
+            <a:avLst/>
+          </a:prstGeom>
+          <a:noFill/>
+          <a:ln w="27940">
+            <a:solidFill>
+              <a:srgbClr val="13B5A6"/>
+            </a:solidFill>
+            <a:prstDash val="solid"/>
+            <a:tailEnd type="triangle"/>
+          </a:ln>
+        </p:spPr>
+      </p:sp>
+      <p:sp>
+        <p:nvSpPr>
+          <p:cNvPr id="21" name="Shape 19"/>
+          <p:cNvSpPr/>
+          <p:nvPr/>
+        </p:nvSpPr>
+        <p:spPr>
+          <a:xfrm>
+            <a:off x="8549640" y="1828800"/>
+            <a:ext cx="3520440" cy="2286000"/>
+          </a:xfrm>
+          <a:prstGeom prst="roundRect">
+            <a:avLst>
+              <a:gd name="adj" fmla="val 2800"/>
+            </a:avLst>
+          </a:prstGeom>
+          <a:solidFill>
+            <a:srgbClr val="FFFFFF"/>
+          </a:solidFill>
+          <a:ln w="12700">
+            <a:solidFill>
+              <a:srgbClr val="D8E1EC"/>
+            </a:solidFill>
+            <a:prstDash val="solid"/>
+          </a:ln>
+          <a:effectLst>
+            <a:outerShdw sx="100000" sy="100000" kx="0" ky="0" algn="bl" rotWithShape="0" blurRad="88900" dist="38100" dir="8100000">
+              <a:srgbClr val="1B2A4A">
+                <a:alpha val="12000"/>
+              </a:srgbClr>
+            </a:outerShdw>
+          </a:effectLst>
+        </p:spPr>
+      </p:sp>
+      <p:sp>
+        <p:nvSpPr>
+          <p:cNvPr id="22" name="Shape 20"/>
+          <p:cNvSpPr/>
+          <p:nvPr/>
+        </p:nvSpPr>
+        <p:spPr>
+          <a:xfrm>
+            <a:off x="8549640" y="1828800"/>
+            <a:ext cx="3520440" cy="109728"/>
+          </a:xfrm>
+          <a:prstGeom prst="rect">
+            <a:avLst/>
+          </a:prstGeom>
+          <a:solidFill>
+            <a:srgbClr val="1B2A4A"/>
+          </a:solidFill>
+          <a:ln/>
+        </p:spPr>
+      </p:sp>
+      <p:sp>
+        <p:nvSpPr>
+          <p:cNvPr id="23" name="Shape 21"/>
+          <p:cNvSpPr/>
+          <p:nvPr/>
+        </p:nvSpPr>
+        <p:spPr>
+          <a:xfrm>
+            <a:off x="9898380" y="2194560"/>
+            <a:ext cx="822960" cy="822960"/>
+          </a:xfrm>
+          <a:prstGeom prst="ellipse">
+            <a:avLst/>
+          </a:prstGeom>
+          <a:solidFill>
+            <a:srgbClr val="1B2A4A"/>
+          </a:solidFill>
+          <a:ln/>
+        </p:spPr>
+      </p:sp>
+      <p:sp>
+        <p:nvSpPr>
+          <p:cNvPr id="24" name="Text 22"/>
+          <p:cNvSpPr/>
+          <p:nvPr/>
+        </p:nvSpPr>
+        <p:spPr>
+          <a:xfrm>
+            <a:off x="9898380" y="2194560"/>
+            <a:ext cx="822960" cy="822960"/>
+          </a:xfrm>
+          <a:prstGeom prst="rect">
+            <a:avLst/>
+          </a:prstGeom>
+          <a:noFill/>
+          <a:ln/>
+        </p:spPr>
+        <p:txBody>
+          <a:bodyPr wrap="square" lIns="0" tIns="0" rIns="0" bIns="0" rtlCol="0" anchor="ctr"/>
+          <a:lstStyle/>
+          <a:p>
+            <a:pPr algn="ctr" indent="0" marL="0">
+              <a:buNone/>
+            </a:pPr>
+            <a:r>
+              <a:rPr lang="en-US" sz="2600" b="1" dirty="0">
+                <a:solidFill>
+                  <a:srgbClr val="FFFFFF"/>
+                </a:solidFill>
+                <a:latin typeface="Georgia" pitchFamily="34" charset="0"/>
+                <a:ea typeface="Georgia" pitchFamily="34" charset="-122"/>
+                <a:cs typeface="Georgia" pitchFamily="34" charset="-120"/>
+              </a:rPr>
+              <a:t>3</a:t>
+            </a:r>
+            <a:endParaRPr lang="en-US" sz="2600" dirty="0"/>
+          </a:p>
+        </p:txBody>
+      </p:sp>
+      <p:sp>
+        <p:nvSpPr>
+          <p:cNvPr id="25" name="Text 23"/>
+          <p:cNvSpPr/>
+          <p:nvPr/>
+        </p:nvSpPr>
+        <p:spPr>
+          <a:xfrm>
+            <a:off x="8732520" y="3108960"/>
+            <a:ext cx="3154680" cy="365760"/>
+          </a:xfrm>
+          <a:prstGeom prst="rect">
+            <a:avLst/>
+          </a:prstGeom>
+          <a:noFill/>
+          <a:ln/>
+        </p:spPr>
+        <p:txBody>
+          <a:bodyPr wrap="square" lIns="0" tIns="0" rIns="0" bIns="0" rtlCol="0" anchor="ctr"/>
+          <a:lstStyle/>
+          <a:p>
+            <a:pPr algn="ctr" indent="0" marL="0">
+              <a:buNone/>
+            </a:pPr>
+            <a:r>
+              <a:rPr lang="en-US" sz="1600" b="1" dirty="0">
+                <a:solidFill>
+                  <a:srgbClr val="1B2A4A"/>
+                </a:solidFill>
+                <a:latin typeface="Calibri" pitchFamily="34" charset="0"/>
+                <a:ea typeface="Calibri" pitchFamily="34" charset="-122"/>
+                <a:cs typeface="Calibri" pitchFamily="34" charset="-120"/>
+              </a:rPr>
+              <a:t>Scale</a:t>
+            </a:r>
+            <a:endParaRPr lang="en-US" sz="1600" dirty="0"/>
+          </a:p>
+        </p:txBody>
+      </p:sp>
+      <p:sp>
+        <p:nvSpPr>
+          <p:cNvPr id="26" name="Text 24"/>
+          <p:cNvSpPr/>
+          <p:nvPr/>
+        </p:nvSpPr>
+        <p:spPr>
+          <a:xfrm>
+            <a:off x="8778240" y="3493008"/>
+            <a:ext cx="3063240" cy="548640"/>
+          </a:xfrm>
+          <a:prstGeom prst="rect">
+            <a:avLst/>
+          </a:prstGeom>
+          <a:noFill/>
+          <a:ln/>
+        </p:spPr>
+        <p:txBody>
+          <a:bodyPr wrap="square" lIns="0" tIns="0" rIns="0" bIns="0" rtlCol="0" anchor="t"/>
+          <a:lstStyle/>
+          <a:p>
+            <a:pPr algn="ctr" indent="0" marL="0">
+              <a:lnSpc>
+                <a:spcPct val="100000"/>
+              </a:lnSpc>
+              <a:buNone/>
+            </a:pPr>
+            <a:r>
+              <a:rPr lang="en-US" sz="1080" dirty="0">
+                <a:solidFill>
+                  <a:srgbClr val="6B7A8D"/>
+                </a:solidFill>
+                <a:latin typeface="Calibri" pitchFamily="34" charset="0"/>
+                <a:ea typeface="Calibri" pitchFamily="34" charset="-122"/>
+                <a:cs typeface="Calibri" pitchFamily="34" charset="-120"/>
+              </a:rPr>
+              <a:t>Add specialties through config and watch the auto-bill rate climb toward 80%, as the model is certified at 95%+.</a:t>
+            </a:r>
+            <a:endParaRPr lang="en-US" sz="1080" dirty="0"/>
+          </a:p>
+        </p:txBody>
+      </p:sp>
+      <p:sp>
+        <p:nvSpPr>
+          <p:cNvPr id="27" name="Shape 25"/>
+          <p:cNvSpPr/>
+          <p:nvPr/>
+        </p:nvSpPr>
+        <p:spPr>
+          <a:xfrm>
+            <a:off x="594360" y="4572000"/>
+            <a:ext cx="11000232" cy="1463040"/>
+          </a:xfrm>
+          <a:prstGeom prst="roundRect">
+            <a:avLst>
+              <a:gd name="adj" fmla="val 3750"/>
+            </a:avLst>
+          </a:prstGeom>
+          <a:solidFill>
+            <a:srgbClr val="1B2A4A"/>
+          </a:solidFill>
+          <a:ln/>
+        </p:spPr>
+      </p:sp>
+      <p:sp>
+        <p:nvSpPr>
+          <p:cNvPr id="28" name="Text 26"/>
+          <p:cNvSpPr/>
+          <p:nvPr/>
+        </p:nvSpPr>
+        <p:spPr>
+          <a:xfrm>
+            <a:off x="822960" y="4681728"/>
+            <a:ext cx="10058400" cy="320040"/>
+          </a:xfrm>
+          <a:prstGeom prst="rect">
+            <a:avLst/>
+          </a:prstGeom>
+          <a:noFill/>
+          <a:ln/>
+        </p:spPr>
+        <p:txBody>
+          <a:bodyPr wrap="square" lIns="0" tIns="0" rIns="0" bIns="0" rtlCol="0" anchor="ctr"/>
+          <a:lstStyle/>
+          <a:p>
+            <a:pPr indent="0" marL="0">
+              <a:buNone/>
+            </a:pPr>
+            <a:r>
+              <a:rPr lang="en-US" sz="1300" b="1" dirty="0">
+                <a:solidFill>
+                  <a:srgbClr val="FFFFFF"/>
+                </a:solidFill>
+                <a:latin typeface="Calibri" pitchFamily="34" charset="0"/>
+                <a:ea typeface="Calibri" pitchFamily="34" charset="-122"/>
+                <a:cs typeface="Calibri" pitchFamily="34" charset="-120"/>
+              </a:rPr>
+              <a:t>What moves as we go</a:t>
+            </a:r>
+            <a:endParaRPr lang="en-US" sz="1300" dirty="0"/>
+          </a:p>
+        </p:txBody>
+      </p:sp>
+      <p:sp>
+        <p:nvSpPr>
+          <p:cNvPr id="29" name="Text 27"/>
+          <p:cNvSpPr/>
+          <p:nvPr/>
+        </p:nvSpPr>
+        <p:spPr>
+          <a:xfrm>
+            <a:off x="868680" y="5029200"/>
+            <a:ext cx="2560320" cy="502920"/>
+          </a:xfrm>
+          <a:prstGeom prst="rect">
+            <a:avLst/>
+          </a:prstGeom>
+          <a:noFill/>
+          <a:ln/>
+        </p:spPr>
+        <p:txBody>
+          <a:bodyPr wrap="square" lIns="0" tIns="0" rIns="0" bIns="0" rtlCol="0" anchor="ctr"/>
+          <a:lstStyle/>
+          <a:p>
+            <a:pPr indent="0" marL="0">
+              <a:buNone/>
+            </a:pPr>
+            <a:r>
+              <a:rPr lang="en-US" sz="2200" b="1" dirty="0">
+                <a:solidFill>
+                  <a:srgbClr val="13B5A6"/>
+                </a:solidFill>
+                <a:latin typeface="Georgia" pitchFamily="34" charset="0"/>
+                <a:ea typeface="Georgia" pitchFamily="34" charset="-122"/>
+                <a:cs typeface="Georgia" pitchFamily="34" charset="-120"/>
+              </a:rPr>
+              <a:t>90%+</a:t>
+            </a:r>
+            <a:endParaRPr lang="en-US" sz="2200" dirty="0"/>
+          </a:p>
+        </p:txBody>
+      </p:sp>
+      <p:sp>
+        <p:nvSpPr>
+          <p:cNvPr id="30" name="Text 28"/>
+          <p:cNvSpPr/>
+          <p:nvPr/>
+        </p:nvSpPr>
+        <p:spPr>
+          <a:xfrm>
+            <a:off x="868680" y="5532120"/>
+            <a:ext cx="2560320" cy="365760"/>
+          </a:xfrm>
+          <a:prstGeom prst="rect">
+            <a:avLst/>
+          </a:prstGeom>
+          <a:noFill/>
+          <a:ln/>
+        </p:spPr>
+        <p:txBody>
+          <a:bodyPr wrap="square" lIns="0" tIns="0" rIns="0" bIns="0" rtlCol="0" anchor="ctr"/>
+          <a:lstStyle/>
+          <a:p>
+            <a:pPr indent="0" marL="0">
+              <a:buNone/>
+            </a:pPr>
+            <a:r>
+              <a:rPr lang="en-US" sz="1100" dirty="0">
+                <a:solidFill>
+                  <a:srgbClr val="CADCFC"/>
+                </a:solidFill>
+                <a:latin typeface="Calibri" pitchFamily="34" charset="0"/>
+                <a:ea typeface="Calibri" pitchFamily="34" charset="-122"/>
+                <a:cs typeface="Calibri" pitchFamily="34" charset="-120"/>
+              </a:rPr>
+              <a:t>Chart accuracy</a:t>
+            </a:r>
+            <a:endParaRPr lang="en-US" sz="1100" dirty="0"/>
+          </a:p>
+        </p:txBody>
+      </p:sp>
+      <p:sp>
+        <p:nvSpPr>
+          <p:cNvPr id="31" name="Text 29"/>
+          <p:cNvSpPr/>
+          <p:nvPr/>
+        </p:nvSpPr>
+        <p:spPr>
+          <a:xfrm>
+            <a:off x="3611880" y="5029200"/>
+            <a:ext cx="2560320" cy="502920"/>
+          </a:xfrm>
+          <a:prstGeom prst="rect">
+            <a:avLst/>
+          </a:prstGeom>
+          <a:noFill/>
+          <a:ln/>
+        </p:spPr>
+        <p:txBody>
+          <a:bodyPr wrap="square" lIns="0" tIns="0" rIns="0" bIns="0" rtlCol="0" anchor="ctr"/>
+          <a:lstStyle/>
+          <a:p>
+            <a:pPr indent="0" marL="0">
+              <a:buNone/>
+            </a:pPr>
+            <a:r>
+              <a:rPr lang="en-US" sz="2200" b="1" dirty="0">
+                <a:solidFill>
+                  <a:srgbClr val="13B5A6"/>
+                </a:solidFill>
+                <a:latin typeface="Georgia" pitchFamily="34" charset="0"/>
+                <a:ea typeface="Georgia" pitchFamily="34" charset="-122"/>
+                <a:cs typeface="Georgia" pitchFamily="34" charset="-120"/>
+              </a:rPr>
+              <a:t>80%+</a:t>
+            </a:r>
+            <a:endParaRPr lang="en-US" sz="2200" dirty="0"/>
+          </a:p>
+        </p:txBody>
+      </p:sp>
+      <p:sp>
+        <p:nvSpPr>
+          <p:cNvPr id="32" name="Text 30"/>
+          <p:cNvSpPr/>
+          <p:nvPr/>
+        </p:nvSpPr>
+        <p:spPr>
+          <a:xfrm>
+            <a:off x="3611880" y="5532120"/>
+            <a:ext cx="2560320" cy="365760"/>
+          </a:xfrm>
+          <a:prstGeom prst="rect">
+            <a:avLst/>
+          </a:prstGeom>
+          <a:noFill/>
+          <a:ln/>
+        </p:spPr>
+        <p:txBody>
+          <a:bodyPr wrap="square" lIns="0" tIns="0" rIns="0" bIns="0" rtlCol="0" anchor="ctr"/>
+          <a:lstStyle/>
+          <a:p>
+            <a:pPr indent="0" marL="0">
+              <a:buNone/>
+            </a:pPr>
+            <a:r>
+              <a:rPr lang="en-US" sz="1100" dirty="0">
+                <a:solidFill>
+                  <a:srgbClr val="CADCFC"/>
+                </a:solidFill>
+                <a:latin typeface="Calibri" pitchFamily="34" charset="0"/>
+                <a:ea typeface="Calibri" pitchFamily="34" charset="-122"/>
+                <a:cs typeface="Calibri" pitchFamily="34" charset="-120"/>
+              </a:rPr>
+              <a:t>Auto-billed</a:t>
+            </a:r>
+            <a:endParaRPr lang="en-US" sz="1100" dirty="0"/>
+          </a:p>
+        </p:txBody>
+      </p:sp>
+      <p:sp>
+        <p:nvSpPr>
+          <p:cNvPr id="33" name="Text 31"/>
+          <p:cNvSpPr/>
+          <p:nvPr/>
+        </p:nvSpPr>
+        <p:spPr>
+          <a:xfrm>
+            <a:off x="6355080" y="5029200"/>
+            <a:ext cx="2560320" cy="502920"/>
+          </a:xfrm>
+          <a:prstGeom prst="rect">
+            <a:avLst/>
+          </a:prstGeom>
+          <a:noFill/>
+          <a:ln/>
+        </p:spPr>
+        <p:txBody>
+          <a:bodyPr wrap="square" lIns="0" tIns="0" rIns="0" bIns="0" rtlCol="0" anchor="ctr"/>
+          <a:lstStyle/>
+          <a:p>
+            <a:pPr indent="0" marL="0">
+              <a:buNone/>
+            </a:pPr>
+            <a:r>
+              <a:rPr lang="en-US" sz="2200" b="1" dirty="0">
+                <a:solidFill>
+                  <a:srgbClr val="13B5A6"/>
+                </a:solidFill>
+                <a:latin typeface="Georgia" pitchFamily="34" charset="0"/>
+                <a:ea typeface="Georgia" pitchFamily="34" charset="-122"/>
+                <a:cs typeface="Georgia" pitchFamily="34" charset="-120"/>
+              </a:rPr>
+              <a:t>30%+</a:t>
+            </a:r>
+            <a:endParaRPr lang="en-US" sz="2200" dirty="0"/>
+          </a:p>
+        </p:txBody>
+      </p:sp>
+      <p:sp>
+        <p:nvSpPr>
+          <p:cNvPr id="34" name="Text 32"/>
+          <p:cNvSpPr/>
+          <p:nvPr/>
+        </p:nvSpPr>
+        <p:spPr>
+          <a:xfrm>
+            <a:off x="6355080" y="5532120"/>
+            <a:ext cx="2560320" cy="365760"/>
+          </a:xfrm>
+          <a:prstGeom prst="rect">
+            <a:avLst/>
+          </a:prstGeom>
+          <a:noFill/>
+          <a:ln/>
+        </p:spPr>
+        <p:txBody>
+          <a:bodyPr wrap="square" lIns="0" tIns="0" rIns="0" bIns="0" rtlCol="0" anchor="ctr"/>
+          <a:lstStyle/>
+          <a:p>
+            <a:pPr indent="0" marL="0">
+              <a:buNone/>
+            </a:pPr>
+            <a:r>
+              <a:rPr lang="en-US" sz="1100" dirty="0">
+                <a:solidFill>
+                  <a:srgbClr val="CADCFC"/>
+                </a:solidFill>
+                <a:latin typeface="Calibri" pitchFamily="34" charset="0"/>
+                <a:ea typeface="Calibri" pitchFamily="34" charset="-122"/>
+                <a:cs typeface="Calibri" pitchFamily="34" charset="-120"/>
+              </a:rPr>
+              <a:t>Less manual effort</a:t>
+            </a:r>
+            <a:endParaRPr lang="en-US" sz="1100" dirty="0"/>
+          </a:p>
+        </p:txBody>
+      </p:sp>
+      <p:sp>
+        <p:nvSpPr>
+          <p:cNvPr id="35" name="Text 33"/>
+          <p:cNvSpPr/>
+          <p:nvPr/>
+        </p:nvSpPr>
+        <p:spPr>
+          <a:xfrm>
+            <a:off x="9098280" y="5029200"/>
+            <a:ext cx="2560320" cy="502920"/>
+          </a:xfrm>
+          <a:prstGeom prst="rect">
+            <a:avLst/>
+          </a:prstGeom>
+          <a:noFill/>
+          <a:ln/>
+        </p:spPr>
+        <p:txBody>
+          <a:bodyPr wrap="square" lIns="0" tIns="0" rIns="0" bIns="0" rtlCol="0" anchor="ctr"/>
+          <a:lstStyle/>
+          <a:p>
+            <a:pPr indent="0" marL="0">
+              <a:buNone/>
+            </a:pPr>
+            <a:r>
+              <a:rPr lang="en-US" sz="2200" b="1" dirty="0">
+                <a:solidFill>
+                  <a:srgbClr val="13B5A6"/>
+                </a:solidFill>
+                <a:latin typeface="Georgia" pitchFamily="34" charset="0"/>
+                <a:ea typeface="Georgia" pitchFamily="34" charset="-122"/>
+                <a:cs typeface="Georgia" pitchFamily="34" charset="-120"/>
+              </a:rPr>
+              <a:t>10–15%</a:t>
+            </a:r>
+            <a:endParaRPr lang="en-US" sz="2200" dirty="0"/>
+          </a:p>
+        </p:txBody>
+      </p:sp>
+      <p:sp>
+        <p:nvSpPr>
+          <p:cNvPr id="36" name="Text 34"/>
+          <p:cNvSpPr/>
+          <p:nvPr/>
+        </p:nvSpPr>
+        <p:spPr>
+          <a:xfrm>
+            <a:off x="9098280" y="5532120"/>
+            <a:ext cx="2560320" cy="365760"/>
+          </a:xfrm>
+          <a:prstGeom prst="rect">
+            <a:avLst/>
+          </a:prstGeom>
+          <a:noFill/>
+          <a:ln/>
+        </p:spPr>
+        <p:txBody>
+          <a:bodyPr wrap="square" lIns="0" tIns="0" rIns="0" bIns="0" rtlCol="0" anchor="ctr"/>
+          <a:lstStyle/>
+          <a:p>
+            <a:pPr indent="0" marL="0">
+              <a:buNone/>
+            </a:pPr>
+            <a:r>
+              <a:rPr lang="en-US" sz="1100" dirty="0">
+                <a:solidFill>
+                  <a:srgbClr val="CADCFC"/>
+                </a:solidFill>
+                <a:latin typeface="Calibri" pitchFamily="34" charset="0"/>
+                <a:ea typeface="Calibri" pitchFamily="34" charset="-122"/>
+                <a:cs typeface="Calibri" pitchFamily="34" charset="-120"/>
+              </a:rPr>
+              <a:t>Faster turnaround</a:t>
+            </a:r>
+            <a:endParaRPr lang="en-US" sz="1100" dirty="0"/>
+          </a:p>
+        </p:txBody>
+      </p:sp>
+      <p:sp>
+        <p:nvSpPr>
+          <p:cNvPr id="37" name="Shape 35"/>
+          <p:cNvSpPr/>
+          <p:nvPr/>
+        </p:nvSpPr>
+        <p:spPr>
+          <a:xfrm>
+            <a:off x="0" y="6565392"/>
+            <a:ext cx="12188952" cy="292608"/>
+          </a:xfrm>
+          <a:prstGeom prst="rect">
+            <a:avLst/>
+          </a:prstGeom>
+          <a:solidFill>
+            <a:srgbClr val="0E1B33"/>
+          </a:solidFill>
+          <a:ln/>
+        </p:spPr>
+      </p:sp>
+      <p:sp>
+        <p:nvSpPr>
+          <p:cNvPr id="38" name="Text 36"/>
+          <p:cNvSpPr/>
+          <p:nvPr/>
+        </p:nvSpPr>
+        <p:spPr>
+          <a:xfrm>
+            <a:off x="457200" y="6565392"/>
+            <a:ext cx="5486400" cy="292608"/>
+          </a:xfrm>
+          <a:prstGeom prst="rect">
+            <a:avLst/>
+          </a:prstGeom>
+          <a:noFill/>
+          <a:ln/>
+        </p:spPr>
+        <p:txBody>
+          <a:bodyPr wrap="square" lIns="0" tIns="0" rIns="0" bIns="0" rtlCol="0" anchor="ctr"/>
+          <a:lstStyle/>
+          <a:p>
+            <a:pPr indent="0" marL="0">
+              <a:buNone/>
+            </a:pPr>
+            <a:r>
+              <a:rPr lang="en-US" sz="850" dirty="0">
+                <a:solidFill>
+                  <a:srgbClr val="9FB0C7"/>
+                </a:solidFill>
+                <a:latin typeface="Calibri" pitchFamily="34" charset="0"/>
+                <a:ea typeface="Calibri" pitchFamily="34" charset="-122"/>
+                <a:cs typeface="Calibri" pitchFamily="34" charset="-120"/>
+              </a:rPr>
+              <a:t>ACE · Autonomous Coding Engine</a:t>
+            </a:r>
+            <a:endParaRPr lang="en-US" sz="850" dirty="0"/>
+          </a:p>
+        </p:txBody>
+      </p:sp>
+      <p:sp>
+        <p:nvSpPr>
+          <p:cNvPr id="39" name="Text 37"/>
+          <p:cNvSpPr/>
+          <p:nvPr/>
+        </p:nvSpPr>
+        <p:spPr>
+          <a:xfrm>
+            <a:off x="6245352" y="6565392"/>
+            <a:ext cx="5486400" cy="292608"/>
+          </a:xfrm>
+          <a:prstGeom prst="rect">
+            <a:avLst/>
+          </a:prstGeom>
+          <a:noFill/>
+          <a:ln/>
+        </p:spPr>
+        <p:txBody>
+          <a:bodyPr wrap="square" lIns="0" tIns="0" rIns="0" bIns="0" rtlCol="0" anchor="ctr"/>
+          <a:lstStyle/>
+          <a:p>
+            <a:pPr algn="r" indent="0" marL="0">
+              <a:buNone/>
+            </a:pPr>
+            <a:r>
+              <a:rPr lang="en-US" sz="850" dirty="0">
+                <a:solidFill>
+                  <a:srgbClr val="9FB0C7"/>
+                </a:solidFill>
+                <a:latin typeface="Calibri" pitchFamily="34" charset="0"/>
+                <a:ea typeface="Calibri" pitchFamily="34" charset="-122"/>
+                <a:cs typeface="Calibri" pitchFamily="34" charset="-120"/>
+              </a:rPr>
+              <a:t>Nous Infosystems  ·  for Vee Healthtek  ·  Confidential</a:t>
+            </a:r>
+            <a:endParaRPr lang="en-US" sz="850" dirty="0"/>
+          </a:p>
+        </p:txBody>
+      </p:sp>
+      <p:sp>
+        <p:nvSpPr>
+          <p:cNvPr id="40" name="Text 38"/>
+          <p:cNvSpPr/>
+          <p:nvPr/>
+        </p:nvSpPr>
+        <p:spPr>
+          <a:xfrm>
+            <a:off x="11686032" y="6565392"/>
+            <a:ext cx="365760" cy="292608"/>
+          </a:xfrm>
+          <a:prstGeom prst="rect">
+            <a:avLst/>
+          </a:prstGeom>
+          <a:noFill/>
+          <a:ln/>
+        </p:spPr>
+        <p:txBody>
+          <a:bodyPr wrap="square" lIns="0" tIns="0" rIns="0" bIns="0" rtlCol="0" anchor="ctr"/>
+          <a:lstStyle/>
+          <a:p>
+            <a:pPr algn="r" indent="0" marL="0">
+              <a:buNone/>
+            </a:pPr>
+            <a:r>
+              <a:rPr lang="en-US" sz="850" b="1" dirty="0">
+                <a:solidFill>
+                  <a:srgbClr val="13B5A6"/>
+                </a:solidFill>
+                <a:latin typeface="Calibri" pitchFamily="34" charset="0"/>
+                <a:ea typeface="Calibri" pitchFamily="34" charset="-122"/>
+                <a:cs typeface="Calibri" pitchFamily="34" charset="-120"/>
+              </a:rPr>
+              <a:t>15</a:t>
+            </a:r>
+            <a:endParaRPr lang="en-US" sz="850" dirty="0"/>
+          </a:p>
+        </p:txBody>
+      </p:sp>
+    </p:spTree>
+  </p:cSld>
+  <p:clrMapOvr>
+    <a:masterClrMapping/>
+  </p:clrMapOvr>
+</p:sld>
+</file>
+
+<file path=ppt/slides/slide16.xml><?xml version="1.0" encoding="utf-8"?>
+<p:sld xmlns:a="http://schemas.openxmlformats.org/drawingml/2006/main" xmlns:r="http://schemas.openxmlformats.org/officeDocument/2006/relationships" xmlns:p="http://schemas.openxmlformats.org/presentationml/2006/main">
+  <p:cSld name="Slide 16">
     <p:bg>
       <p:bgPr>
         <a:solidFill>
@@ -13313,7 +14717,7 @@
                 <a:ea typeface="Calibri" pitchFamily="34" charset="-122"/>
                 <a:cs typeface="Calibri" pitchFamily="34" charset="-120"/>
               </a:rPr>
-              <a:t>Radiology-led and already multi-specialty; new specialties onboard via config, not a rebuild.</a:t>
+              <a:t>Sixteen tracks today — fourteen outpatient specialties plus inpatient DRG and HCC risk adjustment; new specialties onboard via config, not a rebuild.</a:t>
             </a:r>
             <a:endParaRPr lang="en-US" sz="1050" dirty="0"/>
           </a:p>
@@ -14794,7 +16198,7 @@
                 <a:ea typeface="Calibri" pitchFamily="34" charset="-122"/>
                 <a:cs typeface="Calibri" pitchFamily="34" charset="-120"/>
               </a:rPr>
-              <a:t>from the PMS / EHR (FHIR · HL7 · EDI)</a:t>
+              <a:t>PMS / EHR feeds — or a scanned PDF, read by the model</a:t>
             </a:r>
             <a:endParaRPr lang="en-US" sz="1150" dirty="0"/>
           </a:p>
@@ -16447,7 +17851,7 @@
                 <a:ea typeface="Calibri" pitchFamily="34" charset="-122"/>
                 <a:cs typeface="Calibri" pitchFamily="34" charset="-120"/>
               </a:rPr>
-              <a:t>Turns a free-text report into structured findings, procedures, laterality and contrast — a summary a coder can scan in seconds.</a:t>
+              <a:t>Turns a free-text report — or a scanned PDF / fax it transcribes itself — into structured findings, procedures, laterality and contrast.</a:t>
             </a:r>
             <a:endParaRPr lang="en-US" sz="1100" dirty="0"/>
           </a:p>
@@ -18317,7 +19721,7 @@
                 <a:ea typeface="Calibri" pitchFamily="34" charset="-122"/>
                 <a:cs typeface="Calibri" pitchFamily="34" charset="-120"/>
               </a:rPr>
-              <a:t>Anthropic Claude — Sonnet by default, Opus on hard charts</a:t>
+              <a:t>Claude today — switchable in Admin at runtime; keys stay in the environment</a:t>
             </a:r>
             <a:endParaRPr lang="en-US" sz="1150" dirty="0"/>
           </a:p>
